--- a/作品詳細アピール.pptx
+++ b/作品詳細アピール.pptx
@@ -7,17 +7,15 @@
   <p:sldIdLst>
     <p:sldId id="256" r:id="rId2"/>
     <p:sldId id="257" r:id="rId3"/>
-    <p:sldId id="260" r:id="rId4"/>
-    <p:sldId id="261" r:id="rId5"/>
-    <p:sldId id="262" r:id="rId6"/>
-    <p:sldId id="263" r:id="rId7"/>
-    <p:sldId id="264" r:id="rId8"/>
-    <p:sldId id="265" r:id="rId9"/>
-    <p:sldId id="266" r:id="rId10"/>
-    <p:sldId id="267" r:id="rId11"/>
-    <p:sldId id="268" r:id="rId12"/>
-    <p:sldId id="269" r:id="rId13"/>
-    <p:sldId id="270" r:id="rId14"/>
+    <p:sldId id="263" r:id="rId4"/>
+    <p:sldId id="264" r:id="rId5"/>
+    <p:sldId id="265" r:id="rId6"/>
+    <p:sldId id="266" r:id="rId7"/>
+    <p:sldId id="267" r:id="rId8"/>
+    <p:sldId id="268" r:id="rId9"/>
+    <p:sldId id="271" r:id="rId10"/>
+    <p:sldId id="272" r:id="rId11"/>
+    <p:sldId id="270" r:id="rId12"/>
   </p:sldIdLst>
   <p:sldSz cx="12192000" cy="6858000"/>
   <p:notesSz cx="12192000" cy="6858000"/>
@@ -1534,7 +1532,13 @@
   <p:cSld>
     <p:spTree>
       <p:nvGrpSpPr>
-        <p:cNvPr id="1" name=""/>
+        <p:cNvPr id="1" name="">
+          <a:extLst>
+            <a:ext uri="{FF2B5EF4-FFF2-40B4-BE49-F238E27FC236}">
+              <a16:creationId xmlns:a16="http://schemas.microsoft.com/office/drawing/2014/main" id="{E8F20201-F212-8E15-5BAA-85DE9FAD732B}"/>
+            </a:ext>
+          </a:extLst>
+        </p:cNvPr>
         <p:cNvGrpSpPr/>
         <p:nvPr/>
       </p:nvGrpSpPr>
@@ -1548,7 +1552,13 @@
       </p:grpSpPr>
       <p:sp>
         <p:nvSpPr>
-          <p:cNvPr id="2" name="object 2"/>
+          <p:cNvPr id="2" name="object 2">
+            <a:extLst>
+              <a:ext uri="{FF2B5EF4-FFF2-40B4-BE49-F238E27FC236}">
+                <a16:creationId xmlns:a16="http://schemas.microsoft.com/office/drawing/2014/main" id="{5D34781A-E9FB-0FC3-3B12-32B525CFF24A}"/>
+              </a:ext>
+            </a:extLst>
+          </p:cNvPr>
           <p:cNvSpPr txBox="1">
             <a:spLocks noGrp="1"/>
           </p:cNvSpPr>
@@ -1558,8 +1568,8 @@
         </p:nvSpPr>
         <p:spPr>
           <a:xfrm>
-            <a:off x="442671" y="482041"/>
-            <a:ext cx="3936365" cy="697230"/>
+            <a:off x="457200" y="381000"/>
+            <a:ext cx="7287259" cy="697230"/>
           </a:xfrm>
           <a:prstGeom prst="rect">
             <a:avLst/>
@@ -1580,29 +1590,40 @@
               </a:spcBef>
             </a:pPr>
             <a:r>
-              <a:rPr spc="-25" dirty="0"/>
-              <a:t>描画処理の流れ</a:t>
-            </a:r>
-          </a:p>
-        </p:txBody>
-      </p:sp>
-      <p:sp>
-        <p:nvSpPr>
-          <p:cNvPr id="3" name="object 3"/>
+              <a:rPr lang="ja-JP" altLang="en-US" spc="-25" dirty="0"/>
+              <a:t>当たり判定 </a:t>
+            </a:r>
+            <a:r>
+              <a:rPr lang="en-US" altLang="ja-JP" spc="-25" dirty="0" err="1"/>
+              <a:t>AABBTree</a:t>
+            </a:r>
+            <a:endParaRPr spc="-25" dirty="0"/>
+          </a:p>
+        </p:txBody>
+      </p:sp>
+      <p:sp>
+        <p:nvSpPr>
+          <p:cNvPr id="3" name="object 3">
+            <a:extLst>
+              <a:ext uri="{FF2B5EF4-FFF2-40B4-BE49-F238E27FC236}">
+                <a16:creationId xmlns:a16="http://schemas.microsoft.com/office/drawing/2014/main" id="{091F54AC-0E1D-829F-9292-E5B3131B496A}"/>
+              </a:ext>
+            </a:extLst>
+          </p:cNvPr>
           <p:cNvSpPr txBox="1"/>
           <p:nvPr/>
         </p:nvSpPr>
         <p:spPr>
           <a:xfrm>
-            <a:off x="897432" y="1355597"/>
-            <a:ext cx="1517015" cy="391160"/>
+            <a:off x="609600" y="1524000"/>
+            <a:ext cx="11420475" cy="2217915"/>
           </a:xfrm>
           <a:prstGeom prst="rect">
             <a:avLst/>
           </a:prstGeom>
         </p:spPr>
         <p:txBody>
-          <a:bodyPr vert="horz" wrap="square" lIns="0" tIns="12700" rIns="0" bIns="0" rtlCol="0">
+          <a:bodyPr vert="horz" wrap="square" lIns="0" tIns="12065" rIns="0" bIns="0" rtlCol="0">
             <a:spAutoFit/>
           </a:bodyPr>
           <a:lstStyle/>
@@ -1612,906 +1633,194 @@
                 <a:spcPct val="100000"/>
               </a:lnSpc>
               <a:spcBef>
-                <a:spcPts val="100"/>
-              </a:spcBef>
-            </a:pPr>
-            <a:r>
-              <a:rPr sz="2400" spc="-10" dirty="0">
-                <a:solidFill>
-                  <a:srgbClr val="FFFFFF"/>
-                </a:solidFill>
-                <a:latin typeface="Arial MT"/>
-                <a:cs typeface="Arial MT"/>
-              </a:rPr>
-              <a:t>GameMain</a:t>
-            </a:r>
-            <a:endParaRPr sz="2400">
-              <a:latin typeface="Arial MT"/>
-              <a:cs typeface="Arial MT"/>
-            </a:endParaRPr>
-          </a:p>
-        </p:txBody>
-      </p:sp>
-      <p:sp>
-        <p:nvSpPr>
-          <p:cNvPr id="4" name="object 4"/>
-          <p:cNvSpPr txBox="1"/>
+                <a:spcPts val="95"/>
+              </a:spcBef>
+            </a:pPr>
+            <a:r>
+              <a:rPr lang="ja-JP" altLang="en-US" sz="2800" dirty="0">
+                <a:solidFill>
+                  <a:schemeClr val="bg1"/>
+                </a:solidFill>
+                <a:latin typeface="MS Gothic"/>
+                <a:cs typeface="MS Gothic"/>
+              </a:rPr>
+              <a:t>どれくらい早くなったのか</a:t>
+            </a:r>
+            <a:endParaRPr lang="en-US" altLang="ja-JP" sz="2800" dirty="0">
+              <a:solidFill>
+                <a:schemeClr val="bg1"/>
+              </a:solidFill>
+              <a:latin typeface="MS Gothic"/>
+              <a:cs typeface="MS Gothic"/>
+            </a:endParaRPr>
+          </a:p>
+          <a:p>
+            <a:pPr marL="12700">
+              <a:lnSpc>
+                <a:spcPct val="100000"/>
+              </a:lnSpc>
+              <a:spcBef>
+                <a:spcPts val="95"/>
+              </a:spcBef>
+            </a:pPr>
+            <a:r>
+              <a:rPr lang="en-US" altLang="ja-JP" sz="2800" dirty="0" err="1">
+                <a:solidFill>
+                  <a:schemeClr val="bg1"/>
+                </a:solidFill>
+                <a:latin typeface="MS Gothic"/>
+                <a:cs typeface="MS Gothic"/>
+              </a:rPr>
+              <a:t>AABBTree</a:t>
+            </a:r>
+            <a:r>
+              <a:rPr lang="ja-JP" altLang="en-US" sz="2800" dirty="0">
+                <a:solidFill>
+                  <a:schemeClr val="bg1"/>
+                </a:solidFill>
+                <a:latin typeface="MS Gothic"/>
+                <a:cs typeface="MS Gothic"/>
+              </a:rPr>
+              <a:t>を使用すると</a:t>
+            </a:r>
+            <a:endParaRPr lang="en-US" altLang="ja-JP" sz="2800" dirty="0">
+              <a:solidFill>
+                <a:schemeClr val="bg1"/>
+              </a:solidFill>
+              <a:latin typeface="MS Gothic"/>
+              <a:cs typeface="MS Gothic"/>
+            </a:endParaRPr>
+          </a:p>
+          <a:p>
+            <a:pPr marL="12700">
+              <a:lnSpc>
+                <a:spcPct val="100000"/>
+              </a:lnSpc>
+              <a:spcBef>
+                <a:spcPts val="95"/>
+              </a:spcBef>
+            </a:pPr>
+            <a:r>
+              <a:rPr lang="ja-JP" altLang="en-US" sz="2800" dirty="0">
+                <a:solidFill>
+                  <a:schemeClr val="bg1"/>
+                </a:solidFill>
+                <a:latin typeface="MS Gothic"/>
+                <a:cs typeface="MS Gothic"/>
+              </a:rPr>
+              <a:t>押し戻し処理などを入れて</a:t>
+            </a:r>
+            <a:endParaRPr lang="en-US" altLang="ja-JP" sz="2800" dirty="0">
+              <a:solidFill>
+                <a:schemeClr val="bg1"/>
+              </a:solidFill>
+              <a:latin typeface="MS Gothic"/>
+              <a:cs typeface="MS Gothic"/>
+            </a:endParaRPr>
+          </a:p>
+          <a:p>
+            <a:pPr marL="12700">
+              <a:lnSpc>
+                <a:spcPct val="100000"/>
+              </a:lnSpc>
+              <a:spcBef>
+                <a:spcPts val="95"/>
+              </a:spcBef>
+            </a:pPr>
+            <a:r>
+              <a:rPr lang="ja-JP" altLang="en-US" sz="2800" dirty="0">
+                <a:solidFill>
+                  <a:schemeClr val="bg1"/>
+                </a:solidFill>
+                <a:latin typeface="MS Gothic"/>
+                <a:cs typeface="MS Gothic"/>
+              </a:rPr>
+              <a:t> </a:t>
+            </a:r>
+            <a:r>
+              <a:rPr lang="en-US" altLang="ja-JP" sz="2800" dirty="0">
+                <a:solidFill>
+                  <a:schemeClr val="bg1"/>
+                </a:solidFill>
+                <a:latin typeface="MS Gothic"/>
+                <a:cs typeface="MS Gothic"/>
+              </a:rPr>
+              <a:t>0.006</a:t>
+            </a:r>
+            <a:r>
+              <a:rPr lang="ja-JP" altLang="en-US" sz="2800" dirty="0">
+                <a:solidFill>
+                  <a:schemeClr val="bg1"/>
+                </a:solidFill>
+                <a:latin typeface="MS Gothic"/>
+                <a:cs typeface="MS Gothic"/>
+              </a:rPr>
+              <a:t> 秒くらい</a:t>
+            </a:r>
+            <a:endParaRPr lang="en-US" altLang="ja-JP" sz="2800" dirty="0">
+              <a:solidFill>
+                <a:schemeClr val="bg1"/>
+              </a:solidFill>
+              <a:latin typeface="MS Gothic"/>
+              <a:cs typeface="MS Gothic"/>
+            </a:endParaRPr>
+          </a:p>
+          <a:p>
+            <a:pPr marL="12700">
+              <a:lnSpc>
+                <a:spcPct val="100000"/>
+              </a:lnSpc>
+              <a:spcBef>
+                <a:spcPts val="95"/>
+              </a:spcBef>
+            </a:pPr>
+            <a:endParaRPr lang="en-US" altLang="ja-JP" sz="2800" dirty="0">
+              <a:solidFill>
+                <a:schemeClr val="bg1"/>
+              </a:solidFill>
+              <a:latin typeface="MS Gothic"/>
+              <a:cs typeface="MS Gothic"/>
+            </a:endParaRPr>
+          </a:p>
+        </p:txBody>
+      </p:sp>
+      <p:pic>
+        <p:nvPicPr>
+          <p:cNvPr id="7" name="図 6" descr="グラフィカル ユーザー インターフェイス&#10;&#10;AI 生成コンテンツは誤りを含む可能性があります。">
+            <a:extLst>
+              <a:ext uri="{FF2B5EF4-FFF2-40B4-BE49-F238E27FC236}">
+                <a16:creationId xmlns:a16="http://schemas.microsoft.com/office/drawing/2014/main" id="{78DA35B5-0016-0478-FB9B-80688324A03C}"/>
+              </a:ext>
+            </a:extLst>
+          </p:cNvPr>
+          <p:cNvPicPr>
+            <a:picLocks noChangeAspect="1"/>
+          </p:cNvPicPr>
           <p:nvPr/>
-        </p:nvSpPr>
+        </p:nvPicPr>
+        <p:blipFill>
+          <a:blip r:embed="rId2"/>
+          <a:srcRect t="51672" b="27979"/>
+          <a:stretch>
+            <a:fillRect/>
+          </a:stretch>
+        </p:blipFill>
         <p:spPr>
           <a:xfrm>
-            <a:off x="1150416" y="1719833"/>
-            <a:ext cx="327660" cy="793750"/>
+            <a:off x="7744459" y="1295400"/>
+            <a:ext cx="2908031" cy="697230"/>
           </a:xfrm>
           <a:prstGeom prst="rect">
             <a:avLst/>
           </a:prstGeom>
         </p:spPr>
-        <p:txBody>
-          <a:bodyPr vert="horz" wrap="square" lIns="0" tIns="31114" rIns="0" bIns="0" rtlCol="0">
-            <a:spAutoFit/>
-          </a:bodyPr>
-          <a:lstStyle/>
-          <a:p>
-            <a:pPr marL="12700">
-              <a:lnSpc>
-                <a:spcPct val="100000"/>
-              </a:lnSpc>
-              <a:spcBef>
-                <a:spcPts val="244"/>
-              </a:spcBef>
-            </a:pPr>
-            <a:r>
-              <a:rPr sz="2400" spc="-965" dirty="0">
-                <a:solidFill>
-                  <a:srgbClr val="FFFFFF"/>
-                </a:solidFill>
-                <a:latin typeface="Arial MT"/>
-                <a:cs typeface="Arial MT"/>
-              </a:rPr>
-              <a:t>│</a:t>
-            </a:r>
-            <a:endParaRPr sz="2400">
-              <a:latin typeface="Arial MT"/>
-              <a:cs typeface="Arial MT"/>
-            </a:endParaRPr>
-          </a:p>
-          <a:p>
-            <a:pPr marL="12700">
-              <a:lnSpc>
-                <a:spcPct val="100000"/>
-              </a:lnSpc>
-              <a:spcBef>
-                <a:spcPts val="140"/>
-              </a:spcBef>
-            </a:pPr>
-            <a:r>
-              <a:rPr sz="2400" spc="-50" dirty="0">
-                <a:solidFill>
-                  <a:srgbClr val="FFFFFF"/>
-                </a:solidFill>
-                <a:latin typeface="Arial MT"/>
-                <a:cs typeface="Arial MT"/>
-              </a:rPr>
-              <a:t>▼</a:t>
-            </a:r>
-            <a:endParaRPr sz="2400">
-              <a:latin typeface="Arial MT"/>
-              <a:cs typeface="Arial MT"/>
-            </a:endParaRPr>
-          </a:p>
-        </p:txBody>
-      </p:sp>
-      <p:sp>
-        <p:nvSpPr>
-          <p:cNvPr id="5" name="object 5"/>
-          <p:cNvSpPr txBox="1"/>
-          <p:nvPr/>
-        </p:nvSpPr>
-        <p:spPr>
-          <a:xfrm>
-            <a:off x="897432" y="2504389"/>
-            <a:ext cx="4629785" cy="1924050"/>
-          </a:xfrm>
-          <a:prstGeom prst="rect">
-            <a:avLst/>
-          </a:prstGeom>
-        </p:spPr>
-        <p:txBody>
-          <a:bodyPr vert="horz" wrap="square" lIns="0" tIns="12700" rIns="0" bIns="0" rtlCol="0">
-            <a:spAutoFit/>
-          </a:bodyPr>
-          <a:lstStyle/>
-          <a:p>
-            <a:pPr marL="12700">
-              <a:lnSpc>
-                <a:spcPct val="100000"/>
-              </a:lnSpc>
-              <a:spcBef>
-                <a:spcPts val="100"/>
-              </a:spcBef>
-            </a:pPr>
-            <a:r>
-              <a:rPr sz="2400" spc="-25" dirty="0">
-                <a:solidFill>
-                  <a:srgbClr val="FFFFFF"/>
-                </a:solidFill>
-                <a:latin typeface="Arial MT"/>
-                <a:cs typeface="Arial MT"/>
-              </a:rPr>
-              <a:t>BaseDrawManager</a:t>
-            </a:r>
-            <a:r>
-              <a:rPr sz="2400" spc="-25" dirty="0">
-                <a:solidFill>
-                  <a:srgbClr val="FFFFFF"/>
-                </a:solidFill>
-                <a:latin typeface="MS Gothic"/>
-                <a:cs typeface="MS Gothic"/>
-              </a:rPr>
-              <a:t>（</a:t>
-            </a:r>
-            <a:r>
-              <a:rPr sz="2400" spc="-10" dirty="0">
-                <a:solidFill>
-                  <a:srgbClr val="FFFFFF"/>
-                </a:solidFill>
-                <a:latin typeface="MS Gothic"/>
-                <a:cs typeface="MS Gothic"/>
-              </a:rPr>
-              <a:t>抽象層</a:t>
-            </a:r>
-            <a:r>
-              <a:rPr sz="2400" spc="-50" dirty="0">
-                <a:solidFill>
-                  <a:srgbClr val="FFFFFF"/>
-                </a:solidFill>
-                <a:latin typeface="MS Gothic"/>
-                <a:cs typeface="MS Gothic"/>
-              </a:rPr>
-              <a:t>）</a:t>
-            </a:r>
-            <a:endParaRPr sz="2400">
-              <a:latin typeface="MS Gothic"/>
-              <a:cs typeface="MS Gothic"/>
-            </a:endParaRPr>
-          </a:p>
-          <a:p>
-            <a:pPr marL="265430">
-              <a:lnSpc>
-                <a:spcPct val="100000"/>
-              </a:lnSpc>
-              <a:spcBef>
-                <a:spcPts val="135"/>
-              </a:spcBef>
-            </a:pPr>
-            <a:r>
-              <a:rPr sz="2400" spc="-965" dirty="0">
-                <a:solidFill>
-                  <a:srgbClr val="FFFFFF"/>
-                </a:solidFill>
-                <a:latin typeface="Arial MT"/>
-                <a:cs typeface="Arial MT"/>
-              </a:rPr>
-              <a:t>│</a:t>
-            </a:r>
-            <a:endParaRPr sz="2400">
-              <a:latin typeface="Arial MT"/>
-              <a:cs typeface="Arial MT"/>
-            </a:endParaRPr>
-          </a:p>
-          <a:p>
-            <a:pPr marL="265430">
-              <a:lnSpc>
-                <a:spcPct val="100000"/>
-              </a:lnSpc>
-              <a:spcBef>
-                <a:spcPts val="145"/>
-              </a:spcBef>
-            </a:pPr>
-            <a:r>
-              <a:rPr sz="2400" spc="-50" dirty="0">
-                <a:solidFill>
-                  <a:srgbClr val="FFFFFF"/>
-                </a:solidFill>
-                <a:latin typeface="Arial MT"/>
-                <a:cs typeface="Arial MT"/>
-              </a:rPr>
-              <a:t>▼</a:t>
-            </a:r>
-            <a:endParaRPr sz="2400">
-              <a:latin typeface="Arial MT"/>
-              <a:cs typeface="Arial MT"/>
-            </a:endParaRPr>
-          </a:p>
-          <a:p>
-            <a:pPr marL="12700">
-              <a:lnSpc>
-                <a:spcPct val="100000"/>
-              </a:lnSpc>
-              <a:spcBef>
-                <a:spcPts val="130"/>
-              </a:spcBef>
-            </a:pPr>
-            <a:r>
-              <a:rPr sz="2400" spc="-20" dirty="0">
-                <a:solidFill>
-                  <a:srgbClr val="FFFFFF"/>
-                </a:solidFill>
-                <a:latin typeface="Arial MT"/>
-                <a:cs typeface="Arial MT"/>
-              </a:rPr>
-              <a:t>DirectX_DrawManager</a:t>
-            </a:r>
-            <a:r>
-              <a:rPr sz="2400" spc="-20" dirty="0">
-                <a:solidFill>
-                  <a:srgbClr val="FFFFFF"/>
-                </a:solidFill>
-                <a:latin typeface="MS Gothic"/>
-                <a:cs typeface="MS Gothic"/>
-              </a:rPr>
-              <a:t>（</a:t>
-            </a:r>
-            <a:r>
-              <a:rPr sz="2400" spc="-10" dirty="0">
-                <a:solidFill>
-                  <a:srgbClr val="FFFFFF"/>
-                </a:solidFill>
-                <a:latin typeface="MS Gothic"/>
-                <a:cs typeface="MS Gothic"/>
-              </a:rPr>
-              <a:t>実装層</a:t>
-            </a:r>
-            <a:r>
-              <a:rPr sz="2400" spc="-50" dirty="0">
-                <a:solidFill>
-                  <a:srgbClr val="FFFFFF"/>
-                </a:solidFill>
-                <a:latin typeface="MS Gothic"/>
-                <a:cs typeface="MS Gothic"/>
-              </a:rPr>
-              <a:t>）</a:t>
-            </a:r>
-            <a:endParaRPr sz="2400">
-              <a:latin typeface="MS Gothic"/>
-              <a:cs typeface="MS Gothic"/>
-            </a:endParaRPr>
-          </a:p>
-          <a:p>
-            <a:pPr marL="265430">
-              <a:lnSpc>
-                <a:spcPct val="100000"/>
-              </a:lnSpc>
-              <a:spcBef>
-                <a:spcPts val="135"/>
-              </a:spcBef>
-            </a:pPr>
-            <a:r>
-              <a:rPr sz="2400" spc="-965" dirty="0">
-                <a:solidFill>
-                  <a:srgbClr val="FFFFFF"/>
-                </a:solidFill>
-                <a:latin typeface="Arial MT"/>
-                <a:cs typeface="Arial MT"/>
-              </a:rPr>
-              <a:t>│</a:t>
-            </a:r>
-            <a:endParaRPr sz="2400">
-              <a:latin typeface="Arial MT"/>
-              <a:cs typeface="Arial MT"/>
-            </a:endParaRPr>
-          </a:p>
-        </p:txBody>
-      </p:sp>
-      <p:sp>
-        <p:nvSpPr>
-          <p:cNvPr id="6" name="object 6"/>
-          <p:cNvSpPr txBox="1"/>
-          <p:nvPr/>
-        </p:nvSpPr>
-        <p:spPr>
-          <a:xfrm>
-            <a:off x="1150416" y="4420870"/>
-            <a:ext cx="7108190" cy="1923414"/>
-          </a:xfrm>
-          <a:prstGeom prst="rect">
-            <a:avLst/>
-          </a:prstGeom>
-        </p:spPr>
-        <p:txBody>
-          <a:bodyPr vert="horz" wrap="square" lIns="0" tIns="12700" rIns="0" bIns="0" rtlCol="0">
-            <a:spAutoFit/>
-          </a:bodyPr>
-          <a:lstStyle/>
-          <a:p>
-            <a:pPr marL="12700">
-              <a:lnSpc>
-                <a:spcPct val="100000"/>
-              </a:lnSpc>
-              <a:spcBef>
-                <a:spcPts val="100"/>
-              </a:spcBef>
-            </a:pPr>
-            <a:r>
-              <a:rPr sz="2400" spc="-515" dirty="0">
-                <a:solidFill>
-                  <a:srgbClr val="FFFFFF"/>
-                </a:solidFill>
-                <a:latin typeface="Arial MT"/>
-                <a:cs typeface="Arial MT"/>
-              </a:rPr>
-              <a:t>├── </a:t>
-            </a:r>
-            <a:r>
-              <a:rPr sz="2400" spc="-25" dirty="0">
-                <a:solidFill>
-                  <a:srgbClr val="FFFFFF"/>
-                </a:solidFill>
-                <a:latin typeface="Arial MT"/>
-                <a:cs typeface="Arial MT"/>
-              </a:rPr>
-              <a:t>ShaderManager(</a:t>
-            </a:r>
-            <a:r>
-              <a:rPr sz="2400" dirty="0">
-                <a:solidFill>
-                  <a:srgbClr val="FFFFFF"/>
-                </a:solidFill>
-                <a:latin typeface="MS Gothic"/>
-                <a:cs typeface="MS Gothic"/>
-              </a:rPr>
-              <a:t>リフレクション情報を取得</a:t>
-            </a:r>
-            <a:r>
-              <a:rPr sz="2400" spc="-50" dirty="0">
-                <a:solidFill>
-                  <a:srgbClr val="FFFFFF"/>
-                </a:solidFill>
-                <a:latin typeface="Arial MT"/>
-                <a:cs typeface="Arial MT"/>
-              </a:rPr>
-              <a:t>)</a:t>
-            </a:r>
-            <a:endParaRPr sz="2400">
-              <a:latin typeface="Arial MT"/>
-              <a:cs typeface="Arial MT"/>
-            </a:endParaRPr>
-          </a:p>
-          <a:p>
-            <a:pPr marL="12700">
-              <a:lnSpc>
-                <a:spcPct val="100000"/>
-              </a:lnSpc>
-              <a:spcBef>
-                <a:spcPts val="130"/>
-              </a:spcBef>
-            </a:pPr>
-            <a:r>
-              <a:rPr sz="2400" spc="-480" dirty="0">
-                <a:solidFill>
-                  <a:srgbClr val="FFFFFF"/>
-                </a:solidFill>
-                <a:latin typeface="Arial MT"/>
-                <a:cs typeface="Arial MT"/>
-              </a:rPr>
-              <a:t>├── </a:t>
-            </a:r>
-            <a:r>
-              <a:rPr sz="2400" spc="-20" dirty="0">
-                <a:solidFill>
-                  <a:srgbClr val="FFFFFF"/>
-                </a:solidFill>
-                <a:latin typeface="Arial MT"/>
-                <a:cs typeface="Arial MT"/>
-              </a:rPr>
-              <a:t>ConstantBufferManager(Shader</a:t>
-            </a:r>
-            <a:r>
-              <a:rPr sz="2400" dirty="0">
-                <a:solidFill>
-                  <a:srgbClr val="FFFFFF"/>
-                </a:solidFill>
-                <a:latin typeface="MS Gothic"/>
-                <a:cs typeface="MS Gothic"/>
-              </a:rPr>
-              <a:t>から名前検索</a:t>
-            </a:r>
-            <a:r>
-              <a:rPr sz="2400" spc="-50" dirty="0">
-                <a:solidFill>
-                  <a:srgbClr val="FFFFFF"/>
-                </a:solidFill>
-                <a:latin typeface="Arial MT"/>
-                <a:cs typeface="Arial MT"/>
-              </a:rPr>
-              <a:t>)</a:t>
-            </a:r>
-            <a:endParaRPr sz="2400">
-              <a:latin typeface="Arial MT"/>
-              <a:cs typeface="Arial MT"/>
-            </a:endParaRPr>
-          </a:p>
-          <a:p>
-            <a:pPr marL="12700">
-              <a:lnSpc>
-                <a:spcPct val="100000"/>
-              </a:lnSpc>
-              <a:spcBef>
-                <a:spcPts val="130"/>
-              </a:spcBef>
-            </a:pPr>
-            <a:r>
-              <a:rPr sz="2400" spc="-490" dirty="0">
-                <a:solidFill>
-                  <a:srgbClr val="FFFFFF"/>
-                </a:solidFill>
-                <a:latin typeface="Arial MT"/>
-                <a:cs typeface="Arial MT"/>
-              </a:rPr>
-              <a:t>├── </a:t>
-            </a:r>
-            <a:r>
-              <a:rPr sz="2400" spc="-20" dirty="0">
-                <a:solidFill>
-                  <a:srgbClr val="FFFFFF"/>
-                </a:solidFill>
-                <a:latin typeface="Arial MT"/>
-                <a:cs typeface="Arial MT"/>
-              </a:rPr>
-              <a:t>VertexBufferManager</a:t>
-            </a:r>
-            <a:r>
-              <a:rPr sz="2400" spc="-20" dirty="0">
-                <a:solidFill>
-                  <a:srgbClr val="FFFFFF"/>
-                </a:solidFill>
-                <a:latin typeface="MS Gothic"/>
-                <a:cs typeface="MS Gothic"/>
-              </a:rPr>
-              <a:t>（</a:t>
-            </a:r>
-            <a:r>
-              <a:rPr sz="2400" spc="-10" dirty="0">
-                <a:solidFill>
-                  <a:srgbClr val="FFFFFF"/>
-                </a:solidFill>
-                <a:latin typeface="MS Gothic"/>
-                <a:cs typeface="MS Gothic"/>
-              </a:rPr>
-              <a:t>頂点シェーダ名で検索</a:t>
-            </a:r>
-            <a:r>
-              <a:rPr sz="2400" spc="-50" dirty="0">
-                <a:solidFill>
-                  <a:srgbClr val="FFFFFF"/>
-                </a:solidFill>
-                <a:latin typeface="Arial MT"/>
-                <a:cs typeface="Arial MT"/>
-              </a:rPr>
-              <a:t>)</a:t>
-            </a:r>
-            <a:endParaRPr sz="2400">
-              <a:latin typeface="Arial MT"/>
-              <a:cs typeface="Arial MT"/>
-            </a:endParaRPr>
-          </a:p>
-          <a:p>
-            <a:pPr marL="12700">
-              <a:lnSpc>
-                <a:spcPct val="100000"/>
-              </a:lnSpc>
-              <a:spcBef>
-                <a:spcPts val="150"/>
-              </a:spcBef>
-            </a:pPr>
-            <a:r>
-              <a:rPr sz="2400" spc="-535" dirty="0">
-                <a:solidFill>
-                  <a:srgbClr val="FFFFFF"/>
-                </a:solidFill>
-                <a:latin typeface="Arial MT"/>
-                <a:cs typeface="Arial MT"/>
-              </a:rPr>
-              <a:t>└── </a:t>
-            </a:r>
-            <a:r>
-              <a:rPr sz="2400" spc="-20" dirty="0">
-                <a:solidFill>
-                  <a:srgbClr val="FFFFFF"/>
-                </a:solidFill>
-                <a:latin typeface="Arial MT"/>
-                <a:cs typeface="Arial MT"/>
-              </a:rPr>
-              <a:t>ViewManager</a:t>
-            </a:r>
-            <a:r>
-              <a:rPr sz="2400" spc="-20" dirty="0">
-                <a:solidFill>
-                  <a:srgbClr val="FFFFFF"/>
-                </a:solidFill>
-                <a:latin typeface="MS Gothic"/>
-                <a:cs typeface="MS Gothic"/>
-              </a:rPr>
-              <a:t>（</a:t>
-            </a:r>
-            <a:r>
-              <a:rPr sz="2400" dirty="0">
-                <a:solidFill>
-                  <a:srgbClr val="FFFFFF"/>
-                </a:solidFill>
-                <a:latin typeface="MS Gothic"/>
-                <a:cs typeface="MS Gothic"/>
-              </a:rPr>
-              <a:t>テクスチャ名から取得</a:t>
-            </a:r>
-            <a:r>
-              <a:rPr sz="2400" spc="-50" dirty="0">
-                <a:solidFill>
-                  <a:srgbClr val="FFFFFF"/>
-                </a:solidFill>
-                <a:latin typeface="MS Gothic"/>
-                <a:cs typeface="MS Gothic"/>
-              </a:rPr>
-              <a:t>）</a:t>
-            </a:r>
-            <a:endParaRPr sz="2400">
-              <a:latin typeface="MS Gothic"/>
-              <a:cs typeface="MS Gothic"/>
-            </a:endParaRPr>
-          </a:p>
-          <a:p>
-            <a:pPr marL="12700">
-              <a:lnSpc>
-                <a:spcPct val="100000"/>
-              </a:lnSpc>
-              <a:spcBef>
-                <a:spcPts val="130"/>
-              </a:spcBef>
-            </a:pPr>
-            <a:r>
-              <a:rPr sz="2400" spc="-720" dirty="0">
-                <a:solidFill>
-                  <a:srgbClr val="FFFFFF"/>
-                </a:solidFill>
-                <a:latin typeface="Arial MT"/>
-                <a:cs typeface="Arial MT"/>
-              </a:rPr>
-              <a:t>└──</a:t>
-            </a:r>
-            <a:r>
-              <a:rPr sz="2400" spc="-20" dirty="0">
-                <a:solidFill>
-                  <a:srgbClr val="FFFFFF"/>
-                </a:solidFill>
-                <a:latin typeface="Arial MT"/>
-                <a:cs typeface="Arial MT"/>
-              </a:rPr>
-              <a:t> </a:t>
-            </a:r>
-            <a:r>
-              <a:rPr sz="2400" spc="-10" dirty="0">
-                <a:solidFill>
-                  <a:srgbClr val="FFFFFF"/>
-                </a:solidFill>
-                <a:latin typeface="Arial MT"/>
-                <a:cs typeface="Arial MT"/>
-              </a:rPr>
-              <a:t>TextureManager</a:t>
-            </a:r>
-            <a:endParaRPr sz="2400">
-              <a:latin typeface="Arial MT"/>
-              <a:cs typeface="Arial MT"/>
-            </a:endParaRPr>
-          </a:p>
-        </p:txBody>
-      </p:sp>
-      <p:sp>
-        <p:nvSpPr>
-          <p:cNvPr id="7" name="object 7"/>
-          <p:cNvSpPr txBox="1"/>
-          <p:nvPr/>
-        </p:nvSpPr>
-        <p:spPr>
-          <a:xfrm>
-            <a:off x="4615560" y="886764"/>
-            <a:ext cx="7576820" cy="647065"/>
-          </a:xfrm>
-          <a:prstGeom prst="rect">
-            <a:avLst/>
-          </a:prstGeom>
-          <a:ln w="9525">
-            <a:solidFill>
-              <a:srgbClr val="FFFFFF"/>
-            </a:solidFill>
-          </a:ln>
-        </p:spPr>
-        <p:txBody>
-          <a:bodyPr vert="horz" wrap="square" lIns="0" tIns="41275" rIns="0" bIns="0" rtlCol="0">
-            <a:spAutoFit/>
-          </a:bodyPr>
-          <a:lstStyle/>
-          <a:p>
-            <a:pPr marL="92075">
-              <a:lnSpc>
-                <a:spcPct val="100000"/>
-              </a:lnSpc>
-              <a:spcBef>
-                <a:spcPts val="325"/>
-              </a:spcBef>
-            </a:pPr>
-            <a:r>
-              <a:rPr sz="1800" dirty="0">
-                <a:solidFill>
-                  <a:srgbClr val="FFFFFF"/>
-                </a:solidFill>
-                <a:latin typeface="Arial MT"/>
-                <a:cs typeface="Arial MT"/>
-              </a:rPr>
-              <a:t>GameMain</a:t>
-            </a:r>
-            <a:r>
-              <a:rPr sz="1800" spc="-35" dirty="0">
-                <a:solidFill>
-                  <a:srgbClr val="FFFFFF"/>
-                </a:solidFill>
-                <a:latin typeface="Arial MT"/>
-                <a:cs typeface="Arial MT"/>
-              </a:rPr>
-              <a:t> </a:t>
-            </a:r>
-            <a:r>
-              <a:rPr sz="1800" spc="-135" dirty="0">
-                <a:solidFill>
-                  <a:srgbClr val="FFFFFF"/>
-                </a:solidFill>
-                <a:latin typeface="MS Gothic"/>
-                <a:cs typeface="MS Gothic"/>
-              </a:rPr>
-              <a:t>から </a:t>
-            </a:r>
-            <a:r>
-              <a:rPr sz="1800" dirty="0">
-                <a:solidFill>
-                  <a:srgbClr val="FFFFFF"/>
-                </a:solidFill>
-                <a:latin typeface="Arial MT"/>
-                <a:cs typeface="Arial MT"/>
-              </a:rPr>
-              <a:t>API</a:t>
-            </a:r>
-            <a:r>
-              <a:rPr sz="1800" spc="-20" dirty="0">
-                <a:solidFill>
-                  <a:srgbClr val="FFFFFF"/>
-                </a:solidFill>
-                <a:latin typeface="Arial MT"/>
-                <a:cs typeface="Arial MT"/>
-              </a:rPr>
-              <a:t> </a:t>
-            </a:r>
-            <a:r>
-              <a:rPr sz="1800" spc="-5" dirty="0">
-                <a:solidFill>
-                  <a:srgbClr val="FFFFFF"/>
-                </a:solidFill>
-                <a:latin typeface="MS Gothic"/>
-                <a:cs typeface="MS Gothic"/>
-              </a:rPr>
-              <a:t>非依存の描画命令を送信</a:t>
-            </a:r>
-            <a:endParaRPr sz="1800">
-              <a:latin typeface="MS Gothic"/>
-              <a:cs typeface="MS Gothic"/>
-            </a:endParaRPr>
-          </a:p>
-          <a:p>
-            <a:pPr marL="92075">
-              <a:lnSpc>
-                <a:spcPct val="100000"/>
-              </a:lnSpc>
-            </a:pPr>
-            <a:r>
-              <a:rPr sz="1800" spc="-10" dirty="0">
-                <a:solidFill>
-                  <a:srgbClr val="FFFFFF"/>
-                </a:solidFill>
-                <a:latin typeface="MS Gothic"/>
-                <a:cs typeface="MS Gothic"/>
-              </a:rPr>
-              <a:t>❦の流れを共通化し、</a:t>
-            </a:r>
-            <a:r>
-              <a:rPr sz="1800" spc="-10" dirty="0">
-                <a:solidFill>
-                  <a:srgbClr val="FFFFFF"/>
-                </a:solidFill>
-                <a:latin typeface="Arial MT"/>
-                <a:cs typeface="Arial MT"/>
-              </a:rPr>
-              <a:t>API</a:t>
-            </a:r>
-            <a:r>
-              <a:rPr sz="1800" spc="-15" dirty="0">
-                <a:solidFill>
-                  <a:srgbClr val="FFFFFF"/>
-                </a:solidFill>
-                <a:latin typeface="MS Gothic"/>
-                <a:cs typeface="MS Gothic"/>
-              </a:rPr>
-              <a:t>差し替えを容易にできるように設計しました</a:t>
-            </a:r>
-            <a:endParaRPr sz="1800">
-              <a:latin typeface="MS Gothic"/>
-              <a:cs typeface="MS Gothic"/>
-            </a:endParaRPr>
-          </a:p>
-        </p:txBody>
-      </p:sp>
-      <p:sp>
-        <p:nvSpPr>
-          <p:cNvPr id="8" name="object 8"/>
-          <p:cNvSpPr txBox="1"/>
-          <p:nvPr/>
-        </p:nvSpPr>
-        <p:spPr>
-          <a:xfrm>
-            <a:off x="6255511" y="2967240"/>
-            <a:ext cx="5614670" cy="923925"/>
-          </a:xfrm>
-          <a:prstGeom prst="rect">
-            <a:avLst/>
-          </a:prstGeom>
-          <a:ln w="9525">
-            <a:solidFill>
-              <a:srgbClr val="FFFFFF"/>
-            </a:solidFill>
-          </a:ln>
-        </p:spPr>
-        <p:txBody>
-          <a:bodyPr vert="horz" wrap="square" lIns="0" tIns="41910" rIns="0" bIns="0" rtlCol="0">
-            <a:spAutoFit/>
-          </a:bodyPr>
-          <a:lstStyle/>
-          <a:p>
-            <a:pPr marL="92075" marR="256540">
-              <a:lnSpc>
-                <a:spcPct val="100000"/>
-              </a:lnSpc>
-              <a:spcBef>
-                <a:spcPts val="330"/>
-              </a:spcBef>
-            </a:pPr>
-            <a:r>
-              <a:rPr sz="1800" spc="-5" dirty="0">
-                <a:solidFill>
-                  <a:srgbClr val="FFFFFF"/>
-                </a:solidFill>
-                <a:latin typeface="MS Gothic"/>
-                <a:cs typeface="MS Gothic"/>
-              </a:rPr>
-              <a:t>現在は、描画に必要な名前を引数で渡しているが、</a:t>
-            </a:r>
-            <a:r>
-              <a:rPr sz="1800" dirty="0">
-                <a:solidFill>
-                  <a:srgbClr val="FFFFFF"/>
-                </a:solidFill>
-                <a:latin typeface="MS Gothic"/>
-                <a:cs typeface="MS Gothic"/>
-              </a:rPr>
-              <a:t>将来的には、描画</a:t>
-            </a:r>
-            <a:r>
-              <a:rPr sz="1800" spc="-10" dirty="0">
-                <a:solidFill>
-                  <a:srgbClr val="FFFFFF"/>
-                </a:solidFill>
-                <a:latin typeface="Arial MT"/>
-                <a:cs typeface="Arial MT"/>
-              </a:rPr>
-              <a:t>ID</a:t>
-            </a:r>
-            <a:r>
-              <a:rPr sz="1800" spc="-5" dirty="0">
-                <a:solidFill>
-                  <a:srgbClr val="FFFFFF"/>
-                </a:solidFill>
-                <a:latin typeface="MS Gothic"/>
-                <a:cs typeface="MS Gothic"/>
-              </a:rPr>
-              <a:t>で描画してオブジェクトが</a:t>
-            </a:r>
-            <a:endParaRPr sz="1800">
-              <a:latin typeface="MS Gothic"/>
-              <a:cs typeface="MS Gothic"/>
-            </a:endParaRPr>
-          </a:p>
-          <a:p>
-            <a:pPr marL="92075">
-              <a:lnSpc>
-                <a:spcPct val="100000"/>
-              </a:lnSpc>
-            </a:pPr>
-            <a:r>
-              <a:rPr sz="1800" spc="-5" dirty="0">
-                <a:solidFill>
-                  <a:srgbClr val="FFFFFF"/>
-                </a:solidFill>
-                <a:latin typeface="MS Gothic"/>
-                <a:cs typeface="MS Gothic"/>
-              </a:rPr>
-              <a:t>知らないようにしたいと思っています。</a:t>
-            </a:r>
-            <a:endParaRPr sz="1800">
-              <a:latin typeface="MS Gothic"/>
-              <a:cs typeface="MS Gothic"/>
-            </a:endParaRPr>
-          </a:p>
-        </p:txBody>
-      </p:sp>
-      <p:sp>
-        <p:nvSpPr>
-          <p:cNvPr id="9" name="object 9"/>
-          <p:cNvSpPr txBox="1"/>
-          <p:nvPr/>
-        </p:nvSpPr>
-        <p:spPr>
-          <a:xfrm>
-            <a:off x="1553083" y="1806917"/>
-            <a:ext cx="3062605" cy="650875"/>
-          </a:xfrm>
-          <a:prstGeom prst="rect">
-            <a:avLst/>
-          </a:prstGeom>
-          <a:ln w="9525">
-            <a:solidFill>
-              <a:srgbClr val="FFFFFF"/>
-            </a:solidFill>
-          </a:ln>
-        </p:spPr>
-        <p:txBody>
-          <a:bodyPr vert="horz" wrap="square" lIns="0" tIns="118745" rIns="0" bIns="0" rtlCol="0">
-            <a:spAutoFit/>
-          </a:bodyPr>
-          <a:lstStyle/>
-          <a:p>
-            <a:pPr marL="91440" marR="219710">
-              <a:lnSpc>
-                <a:spcPts val="2060"/>
-              </a:lnSpc>
-              <a:spcBef>
-                <a:spcPts val="935"/>
-              </a:spcBef>
-            </a:pPr>
-            <a:r>
-              <a:rPr sz="1800" spc="-5" dirty="0">
-                <a:solidFill>
-                  <a:srgbClr val="FFFFFF"/>
-                </a:solidFill>
-                <a:latin typeface="MS Gothic"/>
-                <a:cs typeface="MS Gothic"/>
-              </a:rPr>
-              <a:t>シェーダー名、テクスチャ</a:t>
-            </a:r>
-            <a:r>
-              <a:rPr sz="1800" spc="-10" dirty="0">
-                <a:solidFill>
-                  <a:srgbClr val="FFFFFF"/>
-                </a:solidFill>
-                <a:latin typeface="MS Gothic"/>
-                <a:cs typeface="MS Gothic"/>
-              </a:rPr>
-              <a:t>名、モデル名を渡す</a:t>
-            </a:r>
-            <a:endParaRPr sz="1800">
-              <a:latin typeface="MS Gothic"/>
-              <a:cs typeface="MS Gothic"/>
-            </a:endParaRPr>
-          </a:p>
-        </p:txBody>
-      </p:sp>
+      </p:pic>
     </p:spTree>
+    <p:extLst>
+      <p:ext uri="{BB962C8B-B14F-4D97-AF65-F5344CB8AC3E}">
+        <p14:creationId xmlns:p14="http://schemas.microsoft.com/office/powerpoint/2010/main" val="1173453723"/>
+      </p:ext>
+    </p:extLst>
   </p:cSld>
   <p:clrMapOvr>
     <a:masterClrMapping/>
@@ -2547,220 +1856,15 @@
           </p:nvPr>
         </p:nvSpPr>
         <p:spPr>
-          <a:prstGeom prst="rect">
-            <a:avLst/>
-          </a:prstGeom>
-        </p:spPr>
-        <p:txBody>
-          <a:bodyPr vert="horz" wrap="square" lIns="0" tIns="13335" rIns="0" bIns="0" rtlCol="0">
-            <a:spAutoFit/>
-          </a:bodyPr>
-          <a:lstStyle/>
-          <a:p>
-            <a:pPr marL="12700">
-              <a:lnSpc>
-                <a:spcPct val="100000"/>
-              </a:lnSpc>
-              <a:spcBef>
-                <a:spcPts val="105"/>
-              </a:spcBef>
-            </a:pPr>
-            <a:r>
-              <a:rPr spc="-25" dirty="0"/>
-              <a:t>シェーダーのリフレクション</a:t>
-            </a:r>
-          </a:p>
-        </p:txBody>
-      </p:sp>
-      <p:sp>
-        <p:nvSpPr>
-          <p:cNvPr id="3" name="object 3"/>
-          <p:cNvSpPr txBox="1"/>
-          <p:nvPr/>
-        </p:nvSpPr>
-        <p:spPr>
           <a:xfrm>
-            <a:off x="595985" y="1509724"/>
-            <a:ext cx="11420475" cy="2627630"/>
+            <a:off x="496777" y="1206876"/>
+            <a:ext cx="6533287" cy="690574"/>
           </a:xfrm>
           <a:prstGeom prst="rect">
             <a:avLst/>
           </a:prstGeom>
         </p:spPr>
         <p:txBody>
-          <a:bodyPr vert="horz" wrap="square" lIns="0" tIns="12065" rIns="0" bIns="0" rtlCol="0">
-            <a:spAutoFit/>
-          </a:bodyPr>
-          <a:lstStyle/>
-          <a:p>
-            <a:pPr marL="12700">
-              <a:lnSpc>
-                <a:spcPct val="100000"/>
-              </a:lnSpc>
-              <a:spcBef>
-                <a:spcPts val="95"/>
-              </a:spcBef>
-            </a:pPr>
-            <a:r>
-              <a:rPr sz="2800" spc="-40" dirty="0">
-                <a:solidFill>
-                  <a:srgbClr val="FFFFFF"/>
-                </a:solidFill>
-                <a:latin typeface="MS Gothic"/>
-                <a:cs typeface="MS Gothic"/>
-              </a:rPr>
-              <a:t>シェーダーリフレクションによる自動バインド設計</a:t>
-            </a:r>
-            <a:endParaRPr sz="2800">
-              <a:latin typeface="MS Gothic"/>
-              <a:cs typeface="MS Gothic"/>
-            </a:endParaRPr>
-          </a:p>
-          <a:p>
-            <a:pPr>
-              <a:lnSpc>
-                <a:spcPct val="100000"/>
-              </a:lnSpc>
-              <a:spcBef>
-                <a:spcPts val="1110"/>
-              </a:spcBef>
-            </a:pPr>
-            <a:endParaRPr sz="2800">
-              <a:latin typeface="MS Gothic"/>
-              <a:cs typeface="MS Gothic"/>
-            </a:endParaRPr>
-          </a:p>
-          <a:p>
-            <a:pPr marL="12700">
-              <a:lnSpc>
-                <a:spcPts val="3190"/>
-              </a:lnSpc>
-            </a:pPr>
-            <a:r>
-              <a:rPr sz="2800" spc="-40" dirty="0">
-                <a:solidFill>
-                  <a:srgbClr val="FFFFFF"/>
-                </a:solidFill>
-                <a:latin typeface="MS Gothic"/>
-                <a:cs typeface="MS Gothic"/>
-              </a:rPr>
-              <a:t>シェーダーファイルをリフレクション解析して、</a:t>
-            </a:r>
-            <a:endParaRPr sz="2800">
-              <a:latin typeface="MS Gothic"/>
-              <a:cs typeface="MS Gothic"/>
-            </a:endParaRPr>
-          </a:p>
-          <a:p>
-            <a:pPr marL="12700" marR="1091565">
-              <a:lnSpc>
-                <a:spcPts val="3030"/>
-              </a:lnSpc>
-              <a:spcBef>
-                <a:spcPts val="204"/>
-              </a:spcBef>
-            </a:pPr>
-            <a:r>
-              <a:rPr sz="2800" spc="-40" dirty="0">
-                <a:solidFill>
-                  <a:srgbClr val="FFFFFF"/>
-                </a:solidFill>
-                <a:latin typeface="MS Gothic"/>
-                <a:cs typeface="MS Gothic"/>
-              </a:rPr>
-              <a:t>各シェーダーが使用する定数バッファ名・スロット番号を自動で取得しています。❦れにより、描画時に手動でスロットを</a:t>
-            </a:r>
-            <a:endParaRPr sz="2800">
-              <a:latin typeface="MS Gothic"/>
-              <a:cs typeface="MS Gothic"/>
-            </a:endParaRPr>
-          </a:p>
-          <a:p>
-            <a:pPr marL="12700">
-              <a:lnSpc>
-                <a:spcPts val="2975"/>
-              </a:lnSpc>
-            </a:pPr>
-            <a:r>
-              <a:rPr sz="2800" spc="-40" dirty="0">
-                <a:solidFill>
-                  <a:srgbClr val="FFFFFF"/>
-                </a:solidFill>
-                <a:latin typeface="MS Gothic"/>
-                <a:cs typeface="MS Gothic"/>
-              </a:rPr>
-              <a:t>設定する手間を省き、定数バッファの自動バインドを実現しています。</a:t>
-            </a:r>
-            <a:endParaRPr sz="2800">
-              <a:latin typeface="MS Gothic"/>
-              <a:cs typeface="MS Gothic"/>
-            </a:endParaRPr>
-          </a:p>
-        </p:txBody>
-      </p:sp>
-      <p:pic>
-        <p:nvPicPr>
-          <p:cNvPr id="4" name="object 4"/>
-          <p:cNvPicPr/>
-          <p:nvPr/>
-        </p:nvPicPr>
-        <p:blipFill>
-          <a:blip r:embed="rId2" cstate="print"/>
-          <a:stretch>
-            <a:fillRect/>
-          </a:stretch>
-        </p:blipFill>
-        <p:spPr>
-          <a:xfrm>
-            <a:off x="4133850" y="4286248"/>
-            <a:ext cx="8058150" cy="2571749"/>
-          </a:xfrm>
-          <a:prstGeom prst="rect">
-            <a:avLst/>
-          </a:prstGeom>
-        </p:spPr>
-      </p:pic>
-    </p:spTree>
-  </p:cSld>
-  <p:clrMapOvr>
-    <a:masterClrMapping/>
-  </p:clrMapOvr>
-</p:sld>
-</file>
-
-<file path=ppt/slides/slide12.xml><?xml version="1.0" encoding="utf-8"?>
-<p:sld xmlns:a="http://schemas.openxmlformats.org/drawingml/2006/main" xmlns:r="http://schemas.openxmlformats.org/officeDocument/2006/relationships" xmlns:p="http://schemas.openxmlformats.org/presentationml/2006/main">
-  <p:cSld>
-    <p:spTree>
-      <p:nvGrpSpPr>
-        <p:cNvPr id="1" name=""/>
-        <p:cNvGrpSpPr/>
-        <p:nvPr/>
-      </p:nvGrpSpPr>
-      <p:grpSpPr>
-        <a:xfrm>
-          <a:off x="0" y="0"/>
-          <a:ext cx="0" cy="0"/>
-          <a:chOff x="0" y="0"/>
-          <a:chExt cx="0" cy="0"/>
-        </a:xfrm>
-      </p:grpSpPr>
-      <p:sp>
-        <p:nvSpPr>
-          <p:cNvPr id="2" name="object 2"/>
-          <p:cNvSpPr txBox="1">
-            <a:spLocks noGrp="1"/>
-          </p:cNvSpPr>
-          <p:nvPr>
-            <p:ph type="title"/>
-          </p:nvPr>
-        </p:nvSpPr>
-        <p:spPr>
-          <a:prstGeom prst="rect">
-            <a:avLst/>
-          </a:prstGeom>
-        </p:spPr>
-        <p:txBody>
           <a:bodyPr vert="horz" wrap="square" lIns="0" tIns="13335" rIns="0" bIns="0" rtlCol="0">
             <a:spAutoFit/>
           </a:bodyPr>
@@ -2775,163 +1879,14 @@
               </a:spcBef>
             </a:pPr>
             <a:r>
-              <a:rPr spc="-25" dirty="0"/>
-              <a:t>意識して開発していると❦ろ</a:t>
-            </a:r>
-          </a:p>
-        </p:txBody>
-      </p:sp>
-      <p:sp>
-        <p:nvSpPr>
-          <p:cNvPr id="3" name="object 3"/>
-          <p:cNvSpPr txBox="1"/>
-          <p:nvPr/>
-        </p:nvSpPr>
-        <p:spPr>
-          <a:xfrm>
-            <a:off x="999236" y="2033142"/>
-            <a:ext cx="7133590" cy="1220470"/>
-          </a:xfrm>
-          <a:prstGeom prst="rect">
-            <a:avLst/>
-          </a:prstGeom>
-        </p:spPr>
-        <p:txBody>
-          <a:bodyPr vert="horz" wrap="square" lIns="0" tIns="60960" rIns="0" bIns="0" rtlCol="0">
-            <a:spAutoFit/>
-          </a:bodyPr>
-          <a:lstStyle/>
-          <a:p>
-            <a:pPr marL="368935" marR="360045" indent="-356870">
-              <a:lnSpc>
-                <a:spcPts val="3020"/>
-              </a:lnSpc>
-              <a:spcBef>
-                <a:spcPts val="480"/>
-              </a:spcBef>
-            </a:pPr>
-            <a:r>
-              <a:rPr sz="2800" spc="-40" dirty="0">
-                <a:solidFill>
-                  <a:srgbClr val="FFFFFF"/>
-                </a:solidFill>
-                <a:latin typeface="MS Gothic"/>
-                <a:cs typeface="MS Gothic"/>
-              </a:rPr>
-              <a:t>スレッドの勉✲を全くできていないため、オブジェクト指向を✲く意識して、</a:t>
-            </a:r>
-            <a:endParaRPr sz="2800">
-              <a:latin typeface="MS Gothic"/>
-              <a:cs typeface="MS Gothic"/>
-            </a:endParaRPr>
-          </a:p>
-          <a:p>
-            <a:pPr marL="723900">
-              <a:lnSpc>
-                <a:spcPts val="2985"/>
-              </a:lnSpc>
-            </a:pPr>
-            <a:r>
-              <a:rPr sz="2800" spc="-40" dirty="0">
-                <a:solidFill>
-                  <a:srgbClr val="FFFFFF"/>
-                </a:solidFill>
-                <a:latin typeface="MS Gothic"/>
-                <a:cs typeface="MS Gothic"/>
-              </a:rPr>
-              <a:t>後から修正しやすいようにしています。</a:t>
-            </a:r>
-            <a:endParaRPr sz="2800">
-              <a:latin typeface="MS Gothic"/>
-              <a:cs typeface="MS Gothic"/>
-            </a:endParaRPr>
-          </a:p>
-        </p:txBody>
-      </p:sp>
-      <p:pic>
-        <p:nvPicPr>
-          <p:cNvPr id="4" name="object 4"/>
-          <p:cNvPicPr/>
-          <p:nvPr/>
-        </p:nvPicPr>
-        <p:blipFill>
-          <a:blip r:embed="rId2" cstate="print"/>
-          <a:stretch>
-            <a:fillRect/>
-          </a:stretch>
-        </p:blipFill>
-        <p:spPr>
-          <a:xfrm>
-            <a:off x="7016750" y="3969829"/>
-            <a:ext cx="3955161" cy="2067179"/>
-          </a:xfrm>
-          <a:prstGeom prst="rect">
-            <a:avLst/>
-          </a:prstGeom>
-        </p:spPr>
-      </p:pic>
-    </p:spTree>
-  </p:cSld>
-  <p:clrMapOvr>
-    <a:masterClrMapping/>
-  </p:clrMapOvr>
-</p:sld>
-</file>
-
-<file path=ppt/slides/slide13.xml><?xml version="1.0" encoding="utf-8"?>
-<p:sld xmlns:a="http://schemas.openxmlformats.org/drawingml/2006/main" xmlns:r="http://schemas.openxmlformats.org/officeDocument/2006/relationships" xmlns:p="http://schemas.openxmlformats.org/presentationml/2006/main">
-  <p:cSld>
-    <p:spTree>
-      <p:nvGrpSpPr>
-        <p:cNvPr id="1" name=""/>
-        <p:cNvGrpSpPr/>
-        <p:nvPr/>
-      </p:nvGrpSpPr>
-      <p:grpSpPr>
-        <a:xfrm>
-          <a:off x="0" y="0"/>
-          <a:ext cx="0" cy="0"/>
-          <a:chOff x="0" y="0"/>
-          <a:chExt cx="0" cy="0"/>
-        </a:xfrm>
-      </p:grpSpPr>
-      <p:sp>
-        <p:nvSpPr>
-          <p:cNvPr id="2" name="object 2"/>
-          <p:cNvSpPr txBox="1">
-            <a:spLocks noGrp="1"/>
-          </p:cNvSpPr>
-          <p:nvPr>
-            <p:ph type="title"/>
-          </p:nvPr>
-        </p:nvSpPr>
-        <p:spPr>
-          <a:xfrm>
-            <a:off x="553313" y="547877"/>
-            <a:ext cx="4497070" cy="696595"/>
-          </a:xfrm>
-          <a:prstGeom prst="rect">
-            <a:avLst/>
-          </a:prstGeom>
-        </p:spPr>
-        <p:txBody>
-          <a:bodyPr vert="horz" wrap="square" lIns="0" tIns="13335" rIns="0" bIns="0" rtlCol="0">
-            <a:spAutoFit/>
-          </a:bodyPr>
-          <a:lstStyle/>
-          <a:p>
-            <a:pPr marL="12700">
-              <a:lnSpc>
-                <a:spcPct val="100000"/>
-              </a:lnSpc>
-              <a:spcBef>
-                <a:spcPts val="105"/>
-              </a:spcBef>
-            </a:pPr>
-            <a:r>
-              <a:rPr spc="-15" dirty="0"/>
-              <a:t>今後制作するもの</a:t>
-            </a:r>
+              <a:rPr lang="ja-JP" altLang="en-US" spc="-15" dirty="0"/>
+              <a:t>１月末までに</a:t>
+            </a:r>
+            <a:r>
+              <a:rPr spc="-15" dirty="0" err="1"/>
+              <a:t>制作するもの</a:t>
+            </a:r>
+            <a:endParaRPr spc="-15" dirty="0"/>
           </a:p>
         </p:txBody>
       </p:sp>
@@ -2946,94 +1901,9 @@
           </p:nvPr>
         </p:nvSpPr>
         <p:spPr>
-          <a:prstGeom prst="rect">
-            <a:avLst/>
-          </a:prstGeom>
-        </p:spPr>
-        <p:txBody>
-          <a:bodyPr vert="horz" wrap="square" lIns="0" tIns="12065" rIns="0" bIns="0" rtlCol="0">
-            <a:spAutoFit/>
-          </a:bodyPr>
-          <a:lstStyle/>
-          <a:p>
-            <a:pPr marL="12700">
-              <a:lnSpc>
-                <a:spcPts val="3025"/>
-              </a:lnSpc>
-              <a:spcBef>
-                <a:spcPts val="95"/>
-              </a:spcBef>
-            </a:pPr>
-            <a:r>
-              <a:rPr spc="-40" dirty="0"/>
-              <a:t>・描画マネージャー</a:t>
-            </a:r>
-          </a:p>
-          <a:p>
-            <a:pPr marL="368935">
-              <a:lnSpc>
-                <a:spcPts val="3025"/>
-              </a:lnSpc>
-            </a:pPr>
-            <a:r>
-              <a:rPr spc="-40" dirty="0"/>
-              <a:t>・自作フォーマアットモデル</a:t>
-            </a:r>
-          </a:p>
-          <a:p>
-            <a:pPr marL="368935">
-              <a:lnSpc>
-                <a:spcPct val="100000"/>
-              </a:lnSpc>
-              <a:spcBef>
-                <a:spcPts val="335"/>
-              </a:spcBef>
-            </a:pPr>
-            <a:r>
-              <a:rPr spc="-40" dirty="0"/>
-              <a:t>・モデルロードモジュール</a:t>
-            </a:r>
-          </a:p>
-          <a:p>
-            <a:pPr marL="368935">
-              <a:lnSpc>
-                <a:spcPct val="100000"/>
-              </a:lnSpc>
-              <a:spcBef>
-                <a:spcPts val="325"/>
-              </a:spcBef>
-            </a:pPr>
-            <a:r>
-              <a:rPr spc="-40" dirty="0"/>
-              <a:t>・モデルマネージャー</a:t>
-            </a:r>
-          </a:p>
-          <a:p>
-            <a:pPr marL="368935">
-              <a:lnSpc>
-                <a:spcPct val="100000"/>
-              </a:lnSpc>
-              <a:spcBef>
-                <a:spcPts val="325"/>
-              </a:spcBef>
-            </a:pPr>
-            <a:r>
-              <a:rPr spc="-40" dirty="0"/>
-              <a:t>・モデルデータクラス</a:t>
-            </a:r>
-          </a:p>
-        </p:txBody>
-      </p:sp>
-      <p:sp>
-        <p:nvSpPr>
-          <p:cNvPr id="4" name="object 4"/>
-          <p:cNvSpPr txBox="1"/>
-          <p:nvPr/>
-        </p:nvSpPr>
-        <p:spPr>
           <a:xfrm>
-            <a:off x="908405" y="4353509"/>
-            <a:ext cx="6313805" cy="452120"/>
+            <a:off x="9489722" y="3795567"/>
+            <a:ext cx="1269493" cy="396904"/>
           </a:xfrm>
           <a:prstGeom prst="rect">
             <a:avLst/>
@@ -3047,263 +1917,890 @@
           <a:p>
             <a:pPr marL="12700">
               <a:lnSpc>
-                <a:spcPct val="100000"/>
+                <a:spcPts val="3025"/>
               </a:lnSpc>
               <a:spcBef>
                 <a:spcPts val="95"/>
               </a:spcBef>
             </a:pPr>
             <a:r>
-              <a:rPr sz="2800" spc="-35" dirty="0">
-                <a:solidFill>
-                  <a:srgbClr val="FFFFFF"/>
-                </a:solidFill>
-                <a:latin typeface="MS Gothic"/>
-                <a:cs typeface="MS Gothic"/>
-              </a:rPr>
-              <a:t>・バッチ処理</a:t>
-            </a:r>
-            <a:r>
-              <a:rPr sz="2800" spc="-10" dirty="0">
-                <a:solidFill>
-                  <a:srgbClr val="FFFFFF"/>
-                </a:solidFill>
-                <a:latin typeface="Arial MT"/>
-                <a:cs typeface="Arial MT"/>
-              </a:rPr>
-              <a:t>(</a:t>
-            </a:r>
-            <a:r>
-              <a:rPr sz="2800" spc="-35" dirty="0">
-                <a:solidFill>
-                  <a:srgbClr val="FFFFFF"/>
-                </a:solidFill>
-                <a:latin typeface="MS Gothic"/>
-                <a:cs typeface="MS Gothic"/>
-              </a:rPr>
-              <a:t>インスタンシングの予定</a:t>
-            </a:r>
-            <a:r>
-              <a:rPr sz="2800" spc="-50" dirty="0">
-                <a:solidFill>
-                  <a:srgbClr val="FFFFFF"/>
-                </a:solidFill>
-                <a:latin typeface="Arial MT"/>
-                <a:cs typeface="Arial MT"/>
-              </a:rPr>
-              <a:t>)</a:t>
-            </a:r>
-            <a:endParaRPr sz="2800" dirty="0">
-              <a:latin typeface="Arial MT"/>
-              <a:cs typeface="Arial MT"/>
-            </a:endParaRPr>
-          </a:p>
-        </p:txBody>
-      </p:sp>
-      <p:sp>
-        <p:nvSpPr>
-          <p:cNvPr id="5" name="object 5"/>
+              <a:rPr lang="ja-JP" altLang="en-US" spc="-40" dirty="0"/>
+              <a:t>最適化</a:t>
+            </a:r>
+            <a:endParaRPr spc="-40" dirty="0"/>
+          </a:p>
+        </p:txBody>
+      </p:sp>
+      <p:sp>
+        <p:nvSpPr>
+          <p:cNvPr id="4" name="object 4"/>
           <p:cNvSpPr txBox="1"/>
           <p:nvPr/>
         </p:nvSpPr>
         <p:spPr>
           <a:xfrm>
-            <a:off x="3551935" y="5630455"/>
-            <a:ext cx="4904105" cy="369570"/>
+            <a:off x="7432322" y="4192471"/>
+            <a:ext cx="4591750" cy="1330492"/>
           </a:xfrm>
           <a:prstGeom prst="rect">
             <a:avLst/>
           </a:prstGeom>
-          <a:ln w="9525">
-            <a:solidFill>
-              <a:srgbClr val="FFFFFF"/>
-            </a:solidFill>
-          </a:ln>
         </p:spPr>
         <p:txBody>
-          <a:bodyPr vert="horz" wrap="square" lIns="0" tIns="42544" rIns="0" bIns="0" rtlCol="0">
+          <a:bodyPr vert="horz" wrap="square" lIns="0" tIns="12065" rIns="0" bIns="0" rtlCol="0">
             <a:spAutoFit/>
           </a:bodyPr>
           <a:lstStyle/>
           <a:p>
-            <a:pPr marL="91440">
-              <a:lnSpc>
-                <a:spcPct val="100000"/>
-              </a:lnSpc>
-              <a:spcBef>
-                <a:spcPts val="334"/>
-              </a:spcBef>
-            </a:pPr>
-            <a:r>
-              <a:rPr sz="1800" dirty="0">
-                <a:solidFill>
-                  <a:srgbClr val="FFFFFF"/>
-                </a:solidFill>
-                <a:latin typeface="MS Gothic"/>
-                <a:cs typeface="MS Gothic"/>
-              </a:rPr>
-              <a:t>ロード読込みの開発が</a:t>
-            </a:r>
-            <a:r>
-              <a:rPr sz="1800" spc="-10" dirty="0">
+            <a:pPr marL="12700">
+              <a:lnSpc>
+                <a:spcPct val="100000"/>
+              </a:lnSpc>
+              <a:spcBef>
+                <a:spcPts val="95"/>
+              </a:spcBef>
+            </a:pPr>
+            <a:r>
+              <a:rPr lang="ja-JP" altLang="en-US" sz="2800" spc="-35" dirty="0">
+                <a:solidFill>
+                  <a:srgbClr val="FFFFFF"/>
+                </a:solidFill>
+                <a:latin typeface="MS Gothic"/>
+                <a:cs typeface="MS Gothic"/>
+              </a:rPr>
+              <a:t>・コマンドリスト</a:t>
+            </a:r>
+            <a:endParaRPr lang="en-US" sz="2800" spc="-35" dirty="0">
+              <a:solidFill>
+                <a:srgbClr val="FFFFFF"/>
+              </a:solidFill>
+              <a:latin typeface="MS Gothic"/>
+              <a:cs typeface="MS Gothic"/>
+            </a:endParaRPr>
+          </a:p>
+          <a:p>
+            <a:pPr marL="12700">
+              <a:lnSpc>
+                <a:spcPct val="100000"/>
+              </a:lnSpc>
+              <a:spcBef>
+                <a:spcPts val="95"/>
+              </a:spcBef>
+            </a:pPr>
+            <a:r>
+              <a:rPr lang="ja-JP" altLang="en-US" sz="2800" spc="-35" dirty="0">
+                <a:solidFill>
+                  <a:srgbClr val="FFFFFF"/>
+                </a:solidFill>
+                <a:latin typeface="MS Gothic"/>
+                <a:cs typeface="MS Gothic"/>
+              </a:rPr>
+              <a:t>・</a:t>
+            </a:r>
+            <a:r>
+              <a:rPr sz="2800" spc="-35" dirty="0" err="1">
+                <a:solidFill>
+                  <a:srgbClr val="FFFFFF"/>
+                </a:solidFill>
+                <a:latin typeface="MS Gothic"/>
+                <a:cs typeface="MS Gothic"/>
+              </a:rPr>
+              <a:t>インスタンシング</a:t>
+            </a:r>
+            <a:endParaRPr lang="en-US" sz="2800" spc="-50" dirty="0">
+              <a:solidFill>
+                <a:srgbClr val="FFFFFF"/>
+              </a:solidFill>
+              <a:latin typeface="Arial MT"/>
+              <a:cs typeface="Arial MT"/>
+            </a:endParaRPr>
+          </a:p>
+          <a:p>
+            <a:pPr marL="12700">
+              <a:lnSpc>
+                <a:spcPct val="100000"/>
+              </a:lnSpc>
+              <a:spcBef>
+                <a:spcPts val="95"/>
+              </a:spcBef>
+            </a:pPr>
+            <a:r>
+              <a:rPr lang="ja-JP" altLang="en-US" sz="2800" spc="-50" dirty="0">
                 <a:solidFill>
                   <a:srgbClr val="FFFFFF"/>
                 </a:solidFill>
                 <a:latin typeface="Arial MT"/>
                 <a:cs typeface="Arial MT"/>
               </a:rPr>
-              <a:t>1</a:t>
-            </a:r>
-            <a:r>
-              <a:rPr sz="1800" spc="-5" dirty="0">
-                <a:solidFill>
-                  <a:srgbClr val="FFFFFF"/>
-                </a:solidFill>
-                <a:latin typeface="MS Gothic"/>
-                <a:cs typeface="MS Gothic"/>
-              </a:rPr>
-              <a:t>つも進んでいません。</a:t>
-            </a:r>
-            <a:endParaRPr sz="1800">
-              <a:latin typeface="MS Gothic"/>
-              <a:cs typeface="MS Gothic"/>
-            </a:endParaRPr>
-          </a:p>
-        </p:txBody>
-      </p:sp>
-      <p:sp>
-        <p:nvSpPr>
-          <p:cNvPr id="6" name="object 6"/>
-          <p:cNvSpPr txBox="1"/>
+              <a:t>・オブジェクトの更新間引き</a:t>
+            </a:r>
+            <a:endParaRPr sz="2800" dirty="0">
+              <a:latin typeface="Arial MT"/>
+              <a:cs typeface="Arial MT"/>
+            </a:endParaRPr>
+          </a:p>
+        </p:txBody>
+      </p:sp>
+      <p:sp>
+        <p:nvSpPr>
+          <p:cNvPr id="8" name="object 3">
+            <a:extLst>
+              <a:ext uri="{FF2B5EF4-FFF2-40B4-BE49-F238E27FC236}">
+                <a16:creationId xmlns:a16="http://schemas.microsoft.com/office/drawing/2014/main" id="{10859274-81C9-FA5C-2553-45800861C883}"/>
+              </a:ext>
+            </a:extLst>
+          </p:cNvPr>
+          <p:cNvSpPr txBox="1">
+            <a:spLocks/>
+          </p:cNvSpPr>
           <p:nvPr/>
         </p:nvSpPr>
         <p:spPr>
           <a:xfrm>
-            <a:off x="6003797" y="3198253"/>
-            <a:ext cx="6054725" cy="923925"/>
+            <a:off x="501694" y="2330340"/>
+            <a:ext cx="5001895" cy="396904"/>
           </a:xfrm>
           <a:prstGeom prst="rect">
             <a:avLst/>
           </a:prstGeom>
-          <a:ln w="9525">
-            <a:solidFill>
-              <a:srgbClr val="FFFFFF"/>
-            </a:solidFill>
-          </a:ln>
         </p:spPr>
         <p:txBody>
-          <a:bodyPr vert="horz" wrap="square" lIns="0" tIns="41275" rIns="0" bIns="0" rtlCol="0">
+          <a:bodyPr vert="horz" wrap="square" lIns="0" tIns="12065" rIns="0" bIns="0" rtlCol="0">
             <a:spAutoFit/>
           </a:bodyPr>
-          <a:lstStyle/>
-          <a:p>
-            <a:pPr marL="92075" marR="696595" algn="just">
-              <a:lnSpc>
-                <a:spcPct val="100000"/>
-              </a:lnSpc>
-              <a:spcBef>
-                <a:spcPts val="325"/>
-              </a:spcBef>
-            </a:pPr>
-            <a:r>
-              <a:rPr sz="1800" spc="-15" dirty="0">
-                <a:solidFill>
-                  <a:srgbClr val="FFFFFF"/>
-                </a:solidFill>
-                <a:latin typeface="MS Gothic"/>
-                <a:cs typeface="MS Gothic"/>
-              </a:rPr>
-              <a:t>まだモデルのロードと、サンプラーマネージャーが</a:t>
-            </a:r>
-            <a:r>
-              <a:rPr sz="1800" spc="-5" dirty="0">
-                <a:solidFill>
-                  <a:srgbClr val="FFFFFF"/>
-                </a:solidFill>
-                <a:latin typeface="MS Gothic"/>
-                <a:cs typeface="MS Gothic"/>
-              </a:rPr>
-              <a:t>ないためサンプラーを共有する❦とが出来ないためそ❦を制作したいと思っています。</a:t>
-            </a:r>
-            <a:endParaRPr sz="1800">
-              <a:latin typeface="MS Gothic"/>
-              <a:cs typeface="MS Gothic"/>
-            </a:endParaRPr>
-          </a:p>
-        </p:txBody>
-      </p:sp>
-      <p:sp>
-        <p:nvSpPr>
-          <p:cNvPr id="7" name="object 7"/>
+          <a:lstStyle>
+            <a:lvl1pPr marL="0">
+              <a:defRPr sz="2800" b="0" i="0">
+                <a:solidFill>
+                  <a:schemeClr val="bg1"/>
+                </a:solidFill>
+                <a:latin typeface="MS Gothic"/>
+                <a:ea typeface="+mn-ea"/>
+                <a:cs typeface="MS Gothic"/>
+              </a:defRPr>
+            </a:lvl1pPr>
+            <a:lvl2pPr marL="457200">
+              <a:defRPr>
+                <a:latin typeface="+mn-lt"/>
+                <a:ea typeface="+mn-ea"/>
+                <a:cs typeface="+mn-cs"/>
+              </a:defRPr>
+            </a:lvl2pPr>
+            <a:lvl3pPr marL="914400">
+              <a:defRPr>
+                <a:latin typeface="+mn-lt"/>
+                <a:ea typeface="+mn-ea"/>
+                <a:cs typeface="+mn-cs"/>
+              </a:defRPr>
+            </a:lvl3pPr>
+            <a:lvl4pPr marL="1371600">
+              <a:defRPr>
+                <a:latin typeface="+mn-lt"/>
+                <a:ea typeface="+mn-ea"/>
+                <a:cs typeface="+mn-cs"/>
+              </a:defRPr>
+            </a:lvl4pPr>
+            <a:lvl5pPr marL="1828800">
+              <a:defRPr>
+                <a:latin typeface="+mn-lt"/>
+                <a:ea typeface="+mn-ea"/>
+                <a:cs typeface="+mn-cs"/>
+              </a:defRPr>
+            </a:lvl5pPr>
+            <a:lvl6pPr marL="2286000">
+              <a:defRPr>
+                <a:latin typeface="+mn-lt"/>
+                <a:ea typeface="+mn-ea"/>
+                <a:cs typeface="+mn-cs"/>
+              </a:defRPr>
+            </a:lvl6pPr>
+            <a:lvl7pPr marL="2743200">
+              <a:defRPr>
+                <a:latin typeface="+mn-lt"/>
+                <a:ea typeface="+mn-ea"/>
+                <a:cs typeface="+mn-cs"/>
+              </a:defRPr>
+            </a:lvl7pPr>
+            <a:lvl8pPr marL="3200400">
+              <a:defRPr>
+                <a:latin typeface="+mn-lt"/>
+                <a:ea typeface="+mn-ea"/>
+                <a:cs typeface="+mn-cs"/>
+              </a:defRPr>
+            </a:lvl8pPr>
+            <a:lvl9pPr marL="3657600">
+              <a:defRPr>
+                <a:latin typeface="+mn-lt"/>
+                <a:ea typeface="+mn-ea"/>
+                <a:cs typeface="+mn-cs"/>
+              </a:defRPr>
+            </a:lvl9pPr>
+          </a:lstStyle>
+          <a:p>
+            <a:pPr marL="12700">
+              <a:lnSpc>
+                <a:spcPts val="3025"/>
+              </a:lnSpc>
+              <a:spcBef>
+                <a:spcPts val="95"/>
+              </a:spcBef>
+            </a:pPr>
+            <a:r>
+              <a:rPr lang="ja-JP" altLang="en-US" spc="-40" dirty="0"/>
+              <a:t>ゲーム制作</a:t>
+            </a:r>
+          </a:p>
+        </p:txBody>
+      </p:sp>
+      <p:sp>
+        <p:nvSpPr>
+          <p:cNvPr id="9" name="object 4">
+            <a:extLst>
+              <a:ext uri="{FF2B5EF4-FFF2-40B4-BE49-F238E27FC236}">
+                <a16:creationId xmlns:a16="http://schemas.microsoft.com/office/drawing/2014/main" id="{4846F6A8-9E61-7214-27ED-9D49DE5EFAAB}"/>
+              </a:ext>
+            </a:extLst>
+          </p:cNvPr>
           <p:cNvSpPr txBox="1"/>
           <p:nvPr/>
         </p:nvSpPr>
         <p:spPr>
           <a:xfrm>
-            <a:off x="6003797" y="2068245"/>
-            <a:ext cx="6054725" cy="647065"/>
+            <a:off x="503038" y="2768203"/>
+            <a:ext cx="6313805" cy="2635978"/>
           </a:xfrm>
           <a:prstGeom prst="rect">
             <a:avLst/>
           </a:prstGeom>
-          <a:ln w="9525">
+        </p:spPr>
+        <p:txBody>
+          <a:bodyPr vert="horz" wrap="square" lIns="0" tIns="12065" rIns="0" bIns="0" rtlCol="0">
+            <a:spAutoFit/>
+          </a:bodyPr>
+          <a:lstStyle/>
+          <a:p>
+            <a:pPr marL="12700">
+              <a:lnSpc>
+                <a:spcPct val="100000"/>
+              </a:lnSpc>
+              <a:spcBef>
+                <a:spcPts val="95"/>
+              </a:spcBef>
+            </a:pPr>
+            <a:r>
+              <a:rPr lang="ja-JP" altLang="en-US" sz="2800" spc="-35" dirty="0">
+                <a:solidFill>
+                  <a:srgbClr val="FFFFFF"/>
+                </a:solidFill>
+                <a:latin typeface="MS Gothic"/>
+                <a:cs typeface="MS Gothic"/>
+              </a:rPr>
+              <a:t>・ゲーム制作</a:t>
+            </a:r>
+            <a:br>
+              <a:rPr lang="en-US" altLang="ja-JP" sz="2800" spc="-35" dirty="0">
+                <a:solidFill>
+                  <a:srgbClr val="FFFFFF"/>
+                </a:solidFill>
+                <a:latin typeface="MS Gothic"/>
+                <a:cs typeface="MS Gothic"/>
+              </a:rPr>
+            </a:br>
+            <a:r>
+              <a:rPr lang="ja-JP" altLang="en-US" sz="2800" spc="-35" dirty="0">
+                <a:solidFill>
+                  <a:srgbClr val="FFFFFF"/>
+                </a:solidFill>
+                <a:latin typeface="MS Gothic"/>
+                <a:cs typeface="MS Gothic"/>
+              </a:rPr>
+              <a:t>　　（プレイヤー 球を飛ばす）</a:t>
+            </a:r>
+            <a:endParaRPr lang="en-US" altLang="ja-JP" sz="2800" spc="-35" dirty="0">
+              <a:solidFill>
+                <a:srgbClr val="FFFFFF"/>
+              </a:solidFill>
+              <a:latin typeface="MS Gothic"/>
+              <a:cs typeface="MS Gothic"/>
+            </a:endParaRPr>
+          </a:p>
+          <a:p>
+            <a:pPr marL="12700">
+              <a:lnSpc>
+                <a:spcPct val="100000"/>
+              </a:lnSpc>
+              <a:spcBef>
+                <a:spcPts val="95"/>
+              </a:spcBef>
+            </a:pPr>
+            <a:r>
+              <a:rPr lang="ja-JP" altLang="en-US" sz="2800" spc="-35" dirty="0">
+                <a:solidFill>
+                  <a:srgbClr val="FFFFFF"/>
+                </a:solidFill>
+                <a:latin typeface="MS Gothic"/>
+                <a:cs typeface="MS Gothic"/>
+              </a:rPr>
+              <a:t>　　（スキル２つ）</a:t>
+            </a:r>
+            <a:br>
+              <a:rPr lang="en-US" altLang="ja-JP" sz="2800" spc="-35" dirty="0">
+                <a:solidFill>
+                  <a:srgbClr val="FFFFFF"/>
+                </a:solidFill>
+                <a:latin typeface="MS Gothic"/>
+                <a:cs typeface="MS Gothic"/>
+              </a:rPr>
+            </a:br>
+            <a:r>
+              <a:rPr lang="ja-JP" altLang="en-US" sz="2800" spc="-35" dirty="0">
+                <a:solidFill>
+                  <a:srgbClr val="FFFFFF"/>
+                </a:solidFill>
+                <a:latin typeface="MS Gothic"/>
+                <a:cs typeface="MS Gothic"/>
+              </a:rPr>
+              <a:t>　　（敵１種類）</a:t>
+            </a:r>
+            <a:endParaRPr lang="en-US" altLang="ja-JP" sz="2800" spc="-35" dirty="0">
+              <a:solidFill>
+                <a:srgbClr val="FFFFFF"/>
+              </a:solidFill>
+              <a:latin typeface="MS Gothic"/>
+              <a:cs typeface="MS Gothic"/>
+            </a:endParaRPr>
+          </a:p>
+          <a:p>
+            <a:pPr marL="12700">
+              <a:lnSpc>
+                <a:spcPct val="100000"/>
+              </a:lnSpc>
+              <a:spcBef>
+                <a:spcPts val="95"/>
+              </a:spcBef>
+            </a:pPr>
+            <a:r>
+              <a:rPr lang="ja-JP" altLang="en-US" sz="2800" spc="-35" dirty="0">
+                <a:solidFill>
+                  <a:srgbClr val="FFFFFF"/>
+                </a:solidFill>
+                <a:latin typeface="MS Gothic"/>
+                <a:cs typeface="MS Gothic"/>
+              </a:rPr>
+              <a:t>・フェード</a:t>
+            </a:r>
+            <a:endParaRPr lang="en-US" altLang="ja-JP" sz="2800" spc="-35" dirty="0">
+              <a:solidFill>
+                <a:srgbClr val="FFFFFF"/>
+              </a:solidFill>
+              <a:latin typeface="MS Gothic"/>
+              <a:cs typeface="MS Gothic"/>
+            </a:endParaRPr>
+          </a:p>
+          <a:p>
+            <a:pPr marL="12700">
+              <a:lnSpc>
+                <a:spcPct val="100000"/>
+              </a:lnSpc>
+              <a:spcBef>
+                <a:spcPts val="95"/>
+              </a:spcBef>
+            </a:pPr>
+            <a:r>
+              <a:rPr lang="ja-JP" altLang="en-US" sz="2800" spc="-35" dirty="0">
+                <a:solidFill>
+                  <a:srgbClr val="FFFFFF"/>
+                </a:solidFill>
+                <a:latin typeface="MS Gothic"/>
+                <a:cs typeface="MS Gothic"/>
+              </a:rPr>
+              <a:t>・</a:t>
+            </a:r>
+            <a:r>
+              <a:rPr lang="en-US" altLang="ja-JP" sz="2800" spc="-35" dirty="0">
+                <a:solidFill>
+                  <a:srgbClr val="FFFFFF"/>
+                </a:solidFill>
+                <a:latin typeface="MS Gothic"/>
+                <a:cs typeface="MS Gothic"/>
+              </a:rPr>
+              <a:t>UI</a:t>
+            </a:r>
+          </a:p>
+        </p:txBody>
+      </p:sp>
+      <p:sp>
+        <p:nvSpPr>
+          <p:cNvPr id="10" name="object 3">
+            <a:extLst>
+              <a:ext uri="{FF2B5EF4-FFF2-40B4-BE49-F238E27FC236}">
+                <a16:creationId xmlns:a16="http://schemas.microsoft.com/office/drawing/2014/main" id="{DFA22F31-3BE1-D29A-4DE2-521354303591}"/>
+              </a:ext>
+            </a:extLst>
+          </p:cNvPr>
+          <p:cNvSpPr txBox="1">
+            <a:spLocks/>
+          </p:cNvSpPr>
+          <p:nvPr/>
+        </p:nvSpPr>
+        <p:spPr>
+          <a:xfrm>
+            <a:off x="7680587" y="3795567"/>
+            <a:ext cx="1600200" cy="396904"/>
+          </a:xfrm>
+          <a:prstGeom prst="rect">
+            <a:avLst/>
+          </a:prstGeom>
+        </p:spPr>
+        <p:txBody>
+          <a:bodyPr vert="horz" wrap="square" lIns="0" tIns="12065" rIns="0" bIns="0" rtlCol="0">
+            <a:spAutoFit/>
+          </a:bodyPr>
+          <a:lstStyle>
+            <a:lvl1pPr marL="0">
+              <a:defRPr sz="2800" b="0" i="0">
+                <a:solidFill>
+                  <a:schemeClr val="bg1"/>
+                </a:solidFill>
+                <a:latin typeface="MS Gothic"/>
+                <a:ea typeface="+mn-ea"/>
+                <a:cs typeface="MS Gothic"/>
+              </a:defRPr>
+            </a:lvl1pPr>
+            <a:lvl2pPr marL="457200">
+              <a:defRPr>
+                <a:latin typeface="+mn-lt"/>
+                <a:ea typeface="+mn-ea"/>
+                <a:cs typeface="+mn-cs"/>
+              </a:defRPr>
+            </a:lvl2pPr>
+            <a:lvl3pPr marL="914400">
+              <a:defRPr>
+                <a:latin typeface="+mn-lt"/>
+                <a:ea typeface="+mn-ea"/>
+                <a:cs typeface="+mn-cs"/>
+              </a:defRPr>
+            </a:lvl3pPr>
+            <a:lvl4pPr marL="1371600">
+              <a:defRPr>
+                <a:latin typeface="+mn-lt"/>
+                <a:ea typeface="+mn-ea"/>
+                <a:cs typeface="+mn-cs"/>
+              </a:defRPr>
+            </a:lvl4pPr>
+            <a:lvl5pPr marL="1828800">
+              <a:defRPr>
+                <a:latin typeface="+mn-lt"/>
+                <a:ea typeface="+mn-ea"/>
+                <a:cs typeface="+mn-cs"/>
+              </a:defRPr>
+            </a:lvl5pPr>
+            <a:lvl6pPr marL="2286000">
+              <a:defRPr>
+                <a:latin typeface="+mn-lt"/>
+                <a:ea typeface="+mn-ea"/>
+                <a:cs typeface="+mn-cs"/>
+              </a:defRPr>
+            </a:lvl6pPr>
+            <a:lvl7pPr marL="2743200">
+              <a:defRPr>
+                <a:latin typeface="+mn-lt"/>
+                <a:ea typeface="+mn-ea"/>
+                <a:cs typeface="+mn-cs"/>
+              </a:defRPr>
+            </a:lvl7pPr>
+            <a:lvl8pPr marL="3200400">
+              <a:defRPr>
+                <a:latin typeface="+mn-lt"/>
+                <a:ea typeface="+mn-ea"/>
+                <a:cs typeface="+mn-cs"/>
+              </a:defRPr>
+            </a:lvl8pPr>
+            <a:lvl9pPr marL="3657600">
+              <a:defRPr>
+                <a:latin typeface="+mn-lt"/>
+                <a:ea typeface="+mn-ea"/>
+                <a:cs typeface="+mn-cs"/>
+              </a:defRPr>
+            </a:lvl9pPr>
+          </a:lstStyle>
+          <a:p>
+            <a:pPr marL="12700">
+              <a:lnSpc>
+                <a:spcPts val="3025"/>
+              </a:lnSpc>
+              <a:spcBef>
+                <a:spcPts val="95"/>
+              </a:spcBef>
+            </a:pPr>
+            <a:r>
+              <a:rPr lang="en-US" altLang="ja-JP" spc="-40" dirty="0"/>
+              <a:t>3</a:t>
+            </a:r>
+            <a:r>
+              <a:rPr lang="ja-JP" altLang="en-US" spc="-40" dirty="0"/>
+              <a:t>月以降</a:t>
+            </a:r>
+          </a:p>
+        </p:txBody>
+      </p:sp>
+      <p:sp>
+        <p:nvSpPr>
+          <p:cNvPr id="11" name="正方形/長方形 10">
+            <a:extLst>
+              <a:ext uri="{FF2B5EF4-FFF2-40B4-BE49-F238E27FC236}">
+                <a16:creationId xmlns:a16="http://schemas.microsoft.com/office/drawing/2014/main" id="{968F957F-FC2C-5757-F534-06BF52578C69}"/>
+              </a:ext>
+            </a:extLst>
+          </p:cNvPr>
+          <p:cNvSpPr/>
+          <p:nvPr/>
+        </p:nvSpPr>
+        <p:spPr>
+          <a:xfrm>
+            <a:off x="248265" y="1039999"/>
+            <a:ext cx="6934200" cy="4482964"/>
+          </a:xfrm>
+          <a:prstGeom prst="rect">
+            <a:avLst/>
+          </a:prstGeom>
+          <a:noFill/>
+          <a:ln>
             <a:solidFill>
-              <a:srgbClr val="FFFFFF"/>
+              <a:schemeClr val="bg1"/>
             </a:solidFill>
           </a:ln>
         </p:spPr>
-        <p:txBody>
-          <a:bodyPr vert="horz" wrap="square" lIns="0" tIns="41275" rIns="0" bIns="0" rtlCol="0">
+        <p:style>
+          <a:lnRef idx="2">
+            <a:schemeClr val="accent1">
+              <a:shade val="15000"/>
+            </a:schemeClr>
+          </a:lnRef>
+          <a:fillRef idx="1">
+            <a:schemeClr val="accent1"/>
+          </a:fillRef>
+          <a:effectRef idx="0">
+            <a:schemeClr val="accent1"/>
+          </a:effectRef>
+          <a:fontRef idx="minor">
+            <a:schemeClr val="lt1"/>
+          </a:fontRef>
+        </p:style>
+        <p:txBody>
+          <a:bodyPr rtlCol="0" anchor="ctr"/>
+          <a:lstStyle/>
+          <a:p>
+            <a:pPr algn="ctr"/>
+            <a:endParaRPr kumimoji="1" lang="ja-JP" altLang="en-US"/>
+          </a:p>
+        </p:txBody>
+      </p:sp>
+      <p:sp>
+        <p:nvSpPr>
+          <p:cNvPr id="12" name="object 3">
+            <a:extLst>
+              <a:ext uri="{FF2B5EF4-FFF2-40B4-BE49-F238E27FC236}">
+                <a16:creationId xmlns:a16="http://schemas.microsoft.com/office/drawing/2014/main" id="{1E3B75FD-F08B-F1E8-E06D-8B505986CFA1}"/>
+              </a:ext>
+            </a:extLst>
+          </p:cNvPr>
+          <p:cNvSpPr txBox="1">
+            <a:spLocks/>
+          </p:cNvSpPr>
+          <p:nvPr/>
+        </p:nvSpPr>
+        <p:spPr>
+          <a:xfrm>
+            <a:off x="9585373" y="1039999"/>
+            <a:ext cx="1539827" cy="396904"/>
+          </a:xfrm>
+          <a:prstGeom prst="rect">
+            <a:avLst/>
+          </a:prstGeom>
+        </p:spPr>
+        <p:txBody>
+          <a:bodyPr vert="horz" wrap="square" lIns="0" tIns="12065" rIns="0" bIns="0" rtlCol="0">
+            <a:spAutoFit/>
+          </a:bodyPr>
+          <a:lstStyle>
+            <a:lvl1pPr marL="0">
+              <a:defRPr sz="2800" b="0" i="0">
+                <a:solidFill>
+                  <a:schemeClr val="bg1"/>
+                </a:solidFill>
+                <a:latin typeface="MS Gothic"/>
+                <a:ea typeface="+mn-ea"/>
+                <a:cs typeface="MS Gothic"/>
+              </a:defRPr>
+            </a:lvl1pPr>
+            <a:lvl2pPr marL="457200">
+              <a:defRPr>
+                <a:latin typeface="+mn-lt"/>
+                <a:ea typeface="+mn-ea"/>
+                <a:cs typeface="+mn-cs"/>
+              </a:defRPr>
+            </a:lvl2pPr>
+            <a:lvl3pPr marL="914400">
+              <a:defRPr>
+                <a:latin typeface="+mn-lt"/>
+                <a:ea typeface="+mn-ea"/>
+                <a:cs typeface="+mn-cs"/>
+              </a:defRPr>
+            </a:lvl3pPr>
+            <a:lvl4pPr marL="1371600">
+              <a:defRPr>
+                <a:latin typeface="+mn-lt"/>
+                <a:ea typeface="+mn-ea"/>
+                <a:cs typeface="+mn-cs"/>
+              </a:defRPr>
+            </a:lvl4pPr>
+            <a:lvl5pPr marL="1828800">
+              <a:defRPr>
+                <a:latin typeface="+mn-lt"/>
+                <a:ea typeface="+mn-ea"/>
+                <a:cs typeface="+mn-cs"/>
+              </a:defRPr>
+            </a:lvl5pPr>
+            <a:lvl6pPr marL="2286000">
+              <a:defRPr>
+                <a:latin typeface="+mn-lt"/>
+                <a:ea typeface="+mn-ea"/>
+                <a:cs typeface="+mn-cs"/>
+              </a:defRPr>
+            </a:lvl6pPr>
+            <a:lvl7pPr marL="2743200">
+              <a:defRPr>
+                <a:latin typeface="+mn-lt"/>
+                <a:ea typeface="+mn-ea"/>
+                <a:cs typeface="+mn-cs"/>
+              </a:defRPr>
+            </a:lvl7pPr>
+            <a:lvl8pPr marL="3200400">
+              <a:defRPr>
+                <a:latin typeface="+mn-lt"/>
+                <a:ea typeface="+mn-ea"/>
+                <a:cs typeface="+mn-cs"/>
+              </a:defRPr>
+            </a:lvl8pPr>
+            <a:lvl9pPr marL="3657600">
+              <a:defRPr>
+                <a:latin typeface="+mn-lt"/>
+                <a:ea typeface="+mn-ea"/>
+                <a:cs typeface="+mn-cs"/>
+              </a:defRPr>
+            </a:lvl9pPr>
+          </a:lstStyle>
+          <a:p>
+            <a:pPr marL="12700">
+              <a:lnSpc>
+                <a:spcPts val="3025"/>
+              </a:lnSpc>
+              <a:spcBef>
+                <a:spcPts val="95"/>
+              </a:spcBef>
+            </a:pPr>
+            <a:r>
+              <a:rPr lang="ja-JP" altLang="en-US" spc="-40" dirty="0"/>
+              <a:t>エフェクト</a:t>
+            </a:r>
+          </a:p>
+        </p:txBody>
+      </p:sp>
+      <p:sp>
+        <p:nvSpPr>
+          <p:cNvPr id="13" name="object 4">
+            <a:extLst>
+              <a:ext uri="{FF2B5EF4-FFF2-40B4-BE49-F238E27FC236}">
+                <a16:creationId xmlns:a16="http://schemas.microsoft.com/office/drawing/2014/main" id="{6026FFF4-12BE-D0E7-790B-D102E296491F}"/>
+              </a:ext>
+            </a:extLst>
+          </p:cNvPr>
+          <p:cNvSpPr txBox="1"/>
+          <p:nvPr/>
+        </p:nvSpPr>
+        <p:spPr>
+          <a:xfrm>
+            <a:off x="7639665" y="1467071"/>
+            <a:ext cx="3444827" cy="886781"/>
+          </a:xfrm>
+          <a:prstGeom prst="rect">
+            <a:avLst/>
+          </a:prstGeom>
+        </p:spPr>
+        <p:txBody>
+          <a:bodyPr vert="horz" wrap="square" lIns="0" tIns="12065" rIns="0" bIns="0" rtlCol="0">
             <a:spAutoFit/>
           </a:bodyPr>
           <a:lstStyle/>
           <a:p>
-            <a:pPr marL="92075">
-              <a:lnSpc>
-                <a:spcPct val="100000"/>
-              </a:lnSpc>
-              <a:spcBef>
-                <a:spcPts val="325"/>
-              </a:spcBef>
-            </a:pPr>
-            <a:r>
-              <a:rPr sz="1800" spc="-20" dirty="0">
-                <a:solidFill>
-                  <a:srgbClr val="FFFFFF"/>
-                </a:solidFill>
-                <a:latin typeface="MS Gothic"/>
-                <a:cs typeface="MS Gothic"/>
-              </a:rPr>
-              <a:t>バグ修正</a:t>
-            </a:r>
-            <a:endParaRPr sz="1800">
-              <a:latin typeface="MS Gothic"/>
-              <a:cs typeface="MS Gothic"/>
-            </a:endParaRPr>
-          </a:p>
-          <a:p>
-            <a:pPr marL="92075">
-              <a:lnSpc>
-                <a:spcPct val="100000"/>
-              </a:lnSpc>
-              <a:spcBef>
-                <a:spcPts val="5"/>
-              </a:spcBef>
-            </a:pPr>
-            <a:r>
-              <a:rPr sz="1800" spc="-5" dirty="0">
-                <a:solidFill>
-                  <a:srgbClr val="FFFFFF"/>
-                </a:solidFill>
-                <a:latin typeface="MS Gothic"/>
-                <a:cs typeface="MS Gothic"/>
-              </a:rPr>
-              <a:t>・テクスチャのロード時にテクスチャを取得できない</a:t>
-            </a:r>
-            <a:endParaRPr sz="1800">
-              <a:latin typeface="MS Gothic"/>
-              <a:cs typeface="MS Gothic"/>
-            </a:endParaRPr>
+            <a:pPr marL="12700">
+              <a:lnSpc>
+                <a:spcPct val="100000"/>
+              </a:lnSpc>
+              <a:spcBef>
+                <a:spcPts val="95"/>
+              </a:spcBef>
+            </a:pPr>
+            <a:r>
+              <a:rPr lang="ja-JP" altLang="en-US" sz="2800" dirty="0">
+                <a:solidFill>
+                  <a:schemeClr val="bg1"/>
+                </a:solidFill>
+                <a:latin typeface="Arial MT"/>
+                <a:cs typeface="Arial MT"/>
+              </a:rPr>
+              <a:t>・ポストエフェクト</a:t>
+            </a:r>
+            <a:endParaRPr lang="en-US" altLang="ja-JP" sz="2800" dirty="0">
+              <a:solidFill>
+                <a:schemeClr val="bg1"/>
+              </a:solidFill>
+              <a:latin typeface="Arial MT"/>
+              <a:cs typeface="Arial MT"/>
+            </a:endParaRPr>
+          </a:p>
+          <a:p>
+            <a:pPr marL="12700">
+              <a:lnSpc>
+                <a:spcPct val="100000"/>
+              </a:lnSpc>
+              <a:spcBef>
+                <a:spcPts val="95"/>
+              </a:spcBef>
+            </a:pPr>
+            <a:r>
+              <a:rPr lang="ja-JP" altLang="en-US" sz="2800" dirty="0">
+                <a:solidFill>
+                  <a:schemeClr val="bg1"/>
+                </a:solidFill>
+                <a:latin typeface="Arial MT"/>
+                <a:cs typeface="Arial MT"/>
+              </a:rPr>
+              <a:t>・パーティクル</a:t>
+            </a:r>
+            <a:endParaRPr sz="2800" dirty="0">
+              <a:solidFill>
+                <a:schemeClr val="bg1"/>
+              </a:solidFill>
+              <a:latin typeface="Arial MT"/>
+              <a:cs typeface="Arial MT"/>
+            </a:endParaRPr>
+          </a:p>
+        </p:txBody>
+      </p:sp>
+      <p:sp>
+        <p:nvSpPr>
+          <p:cNvPr id="14" name="object 3">
+            <a:extLst>
+              <a:ext uri="{FF2B5EF4-FFF2-40B4-BE49-F238E27FC236}">
+                <a16:creationId xmlns:a16="http://schemas.microsoft.com/office/drawing/2014/main" id="{0320F7B9-2955-57D2-8170-5E1EB895DDF1}"/>
+              </a:ext>
+            </a:extLst>
+          </p:cNvPr>
+          <p:cNvSpPr txBox="1">
+            <a:spLocks/>
+          </p:cNvSpPr>
+          <p:nvPr/>
+        </p:nvSpPr>
+        <p:spPr>
+          <a:xfrm>
+            <a:off x="7776238" y="1039999"/>
+            <a:ext cx="1600200" cy="396904"/>
+          </a:xfrm>
+          <a:prstGeom prst="rect">
+            <a:avLst/>
+          </a:prstGeom>
+        </p:spPr>
+        <p:txBody>
+          <a:bodyPr vert="horz" wrap="square" lIns="0" tIns="12065" rIns="0" bIns="0" rtlCol="0">
+            <a:spAutoFit/>
+          </a:bodyPr>
+          <a:lstStyle>
+            <a:lvl1pPr marL="0">
+              <a:defRPr sz="2800" b="0" i="0">
+                <a:solidFill>
+                  <a:schemeClr val="bg1"/>
+                </a:solidFill>
+                <a:latin typeface="MS Gothic"/>
+                <a:ea typeface="+mn-ea"/>
+                <a:cs typeface="MS Gothic"/>
+              </a:defRPr>
+            </a:lvl1pPr>
+            <a:lvl2pPr marL="457200">
+              <a:defRPr>
+                <a:latin typeface="+mn-lt"/>
+                <a:ea typeface="+mn-ea"/>
+                <a:cs typeface="+mn-cs"/>
+              </a:defRPr>
+            </a:lvl2pPr>
+            <a:lvl3pPr marL="914400">
+              <a:defRPr>
+                <a:latin typeface="+mn-lt"/>
+                <a:ea typeface="+mn-ea"/>
+                <a:cs typeface="+mn-cs"/>
+              </a:defRPr>
+            </a:lvl3pPr>
+            <a:lvl4pPr marL="1371600">
+              <a:defRPr>
+                <a:latin typeface="+mn-lt"/>
+                <a:ea typeface="+mn-ea"/>
+                <a:cs typeface="+mn-cs"/>
+              </a:defRPr>
+            </a:lvl4pPr>
+            <a:lvl5pPr marL="1828800">
+              <a:defRPr>
+                <a:latin typeface="+mn-lt"/>
+                <a:ea typeface="+mn-ea"/>
+                <a:cs typeface="+mn-cs"/>
+              </a:defRPr>
+            </a:lvl5pPr>
+            <a:lvl6pPr marL="2286000">
+              <a:defRPr>
+                <a:latin typeface="+mn-lt"/>
+                <a:ea typeface="+mn-ea"/>
+                <a:cs typeface="+mn-cs"/>
+              </a:defRPr>
+            </a:lvl6pPr>
+            <a:lvl7pPr marL="2743200">
+              <a:defRPr>
+                <a:latin typeface="+mn-lt"/>
+                <a:ea typeface="+mn-ea"/>
+                <a:cs typeface="+mn-cs"/>
+              </a:defRPr>
+            </a:lvl7pPr>
+            <a:lvl8pPr marL="3200400">
+              <a:defRPr>
+                <a:latin typeface="+mn-lt"/>
+                <a:ea typeface="+mn-ea"/>
+                <a:cs typeface="+mn-cs"/>
+              </a:defRPr>
+            </a:lvl8pPr>
+            <a:lvl9pPr marL="3657600">
+              <a:defRPr>
+                <a:latin typeface="+mn-lt"/>
+                <a:ea typeface="+mn-ea"/>
+                <a:cs typeface="+mn-cs"/>
+              </a:defRPr>
+            </a:lvl9pPr>
+          </a:lstStyle>
+          <a:p>
+            <a:pPr marL="12700">
+              <a:lnSpc>
+                <a:spcPts val="3025"/>
+              </a:lnSpc>
+              <a:spcBef>
+                <a:spcPts val="95"/>
+              </a:spcBef>
+            </a:pPr>
+            <a:r>
+              <a:rPr lang="en-US" altLang="ja-JP" spc="-40" dirty="0"/>
+              <a:t>2</a:t>
+            </a:r>
+            <a:r>
+              <a:rPr lang="ja-JP" altLang="en-US" spc="-40" dirty="0"/>
+              <a:t>月以降</a:t>
+            </a:r>
           </a:p>
         </p:txBody>
       </p:sp>
@@ -3803,98 +3300,10 @@
       </p:grpSpPr>
       <p:sp>
         <p:nvSpPr>
-          <p:cNvPr id="2" name="object 2"/>
-          <p:cNvSpPr txBox="1">
-            <a:spLocks noGrp="1"/>
-          </p:cNvSpPr>
-          <p:nvPr>
-            <p:ph type="title"/>
-          </p:nvPr>
-        </p:nvSpPr>
-        <p:spPr>
-          <a:xfrm>
-            <a:off x="1867217" y="609600"/>
-            <a:ext cx="8457565" cy="1445267"/>
-          </a:xfrm>
-          <a:prstGeom prst="rect">
-            <a:avLst/>
-          </a:prstGeom>
-          <a:ln w="38100">
-            <a:solidFill>
-              <a:srgbClr val="FFFFFF"/>
-            </a:solidFill>
-          </a:ln>
-        </p:spPr>
-        <p:txBody>
-          <a:bodyPr vert="horz" wrap="square" lIns="0" tIns="212090" rIns="0" bIns="0" rtlCol="0">
-            <a:spAutoFit/>
-          </a:bodyPr>
-          <a:lstStyle/>
-          <a:p>
-            <a:pPr marL="1707514" marR="584200" indent="-1120775" algn="l">
-              <a:lnSpc>
-                <a:spcPts val="4750"/>
-              </a:lnSpc>
-              <a:spcBef>
-                <a:spcPts val="1670"/>
-              </a:spcBef>
-            </a:pPr>
-            <a:r>
-              <a:rPr lang="ja-JP" altLang="en-US" u="heavy" spc="-5" dirty="0">
-                <a:uFill>
-                  <a:solidFill>
-                    <a:srgbClr val="FFFFFF"/>
-                  </a:solidFill>
-                </a:uFill>
-              </a:rPr>
-              <a:t>この</a:t>
-            </a:r>
-            <a:r>
-              <a:rPr u="heavy" spc="-5" dirty="0" err="1">
-                <a:uFill>
-                  <a:solidFill>
-                    <a:srgbClr val="FFFFFF"/>
-                  </a:solidFill>
-                </a:uFill>
-              </a:rPr>
-              <a:t>ゲームを作成するう</a:t>
-            </a:r>
-            <a:r>
-              <a:rPr lang="ja-JP" altLang="en-US" u="heavy" spc="-5" dirty="0">
-                <a:uFill>
-                  <a:solidFill>
-                    <a:srgbClr val="FFFFFF"/>
-                  </a:solidFill>
-                </a:uFill>
-              </a:rPr>
-              <a:t>えで</a:t>
-            </a:r>
-            <a:r>
-              <a:rPr lang="ja-JP" altLang="en-US" u="heavy" spc="-10" dirty="0">
-                <a:uFill>
-                  <a:solidFill>
-                    <a:srgbClr val="FFFFFF"/>
-                  </a:solidFill>
-                </a:uFill>
-              </a:rPr>
-              <a:t>大事にしたいこと</a:t>
-            </a:r>
-            <a:endParaRPr u="heavy" spc="-10" dirty="0">
-              <a:uFill>
-                <a:solidFill>
-                  <a:srgbClr val="FFFFFF"/>
-                </a:solidFill>
-              </a:uFill>
-            </a:endParaRPr>
-          </a:p>
-        </p:txBody>
-      </p:sp>
-      <p:sp>
-        <p:nvSpPr>
           <p:cNvPr id="3" name="正方形/長方形 2">
             <a:extLst>
               <a:ext uri="{FF2B5EF4-FFF2-40B4-BE49-F238E27FC236}">
-                <a16:creationId xmlns:a16="http://schemas.microsoft.com/office/drawing/2014/main" id="{8010C25A-082A-556F-570D-8A6F63D98806}"/>
+                <a16:creationId xmlns:a16="http://schemas.microsoft.com/office/drawing/2014/main" id="{3FB25B17-844E-2C98-643A-4861163F8BA8}"/>
               </a:ext>
             </a:extLst>
           </p:cNvPr>
@@ -3903,14 +3312,14 @@
         </p:nvSpPr>
         <p:spPr>
           <a:xfrm>
-            <a:off x="1143000" y="2669533"/>
-            <a:ext cx="2704783" cy="685800"/>
+            <a:off x="2209800" y="2133600"/>
+            <a:ext cx="8305800" cy="2133600"/>
           </a:xfrm>
           <a:prstGeom prst="rect">
             <a:avLst/>
           </a:prstGeom>
           <a:noFill/>
-          <a:ln>
+          <a:ln w="38100">
             <a:solidFill>
               <a:schemeClr val="bg1"/>
             </a:solidFill>
@@ -3936,17 +3345,38 @@
           <a:bodyPr rtlCol="0" anchor="ctr"/>
           <a:lstStyle/>
           <a:p>
-            <a:pPr algn="l"/>
-            <a:r>
-              <a:rPr kumimoji="1" lang="ja-JP" altLang="en-US" dirty="0">
-                <a:ln>
+            <a:pPr algn="ctr"/>
+            <a:r>
+              <a:rPr lang="ja-JP" altLang="en-US" sz="4400" u="heavy" spc="-45" dirty="0">
+                <a:uFill>
                   <a:solidFill>
-                    <a:schemeClr val="bg1"/>
+                    <a:srgbClr val="FFFFFF"/>
                   </a:solidFill>
-                </a:ln>
-              </a:rPr>
-              <a:t>１．重たくならない</a:t>
-            </a:r>
+                </a:uFill>
+              </a:rPr>
+              <a:t>今制作し終わっている作品の</a:t>
+            </a:r>
+            <a:endParaRPr lang="en-US" altLang="ja-JP" sz="4400" u="heavy" spc="-45" dirty="0">
+              <a:uFill>
+                <a:solidFill>
+                  <a:srgbClr val="FFFFFF"/>
+                </a:solidFill>
+              </a:uFill>
+            </a:endParaRPr>
+          </a:p>
+          <a:p>
+            <a:pPr algn="ctr"/>
+            <a:r>
+              <a:rPr lang="ja-JP" altLang="en-US" sz="4400" u="heavy" spc="-40" dirty="0">
+                <a:uFill>
+                  <a:solidFill>
+                    <a:srgbClr val="FFFFFF"/>
+                  </a:solidFill>
+                </a:uFill>
+              </a:rPr>
+              <a:t>アピールポイント紹介</a:t>
+            </a:r>
+            <a:endParaRPr kumimoji="1" lang="ja-JP" altLang="en-US" sz="4400" dirty="0"/>
           </a:p>
         </p:txBody>
       </p:sp>
@@ -3987,758 +3417,6 @@
         </p:nvSpPr>
         <p:spPr>
           <a:xfrm>
-            <a:off x="346659" y="437133"/>
-            <a:ext cx="2263140" cy="696595"/>
-          </a:xfrm>
-          <a:prstGeom prst="rect">
-            <a:avLst/>
-          </a:prstGeom>
-        </p:spPr>
-        <p:txBody>
-          <a:bodyPr vert="horz" wrap="square" lIns="0" tIns="13335" rIns="0" bIns="0" rtlCol="0">
-            <a:spAutoFit/>
-          </a:bodyPr>
-          <a:lstStyle/>
-          <a:p>
-            <a:pPr marL="12700">
-              <a:lnSpc>
-                <a:spcPct val="100000"/>
-              </a:lnSpc>
-              <a:spcBef>
-                <a:spcPts val="105"/>
-              </a:spcBef>
-            </a:pPr>
-            <a:r>
-              <a:rPr u="none" spc="-15" dirty="0"/>
-              <a:t>技術選定</a:t>
-            </a:r>
-          </a:p>
-        </p:txBody>
-      </p:sp>
-      <p:sp>
-        <p:nvSpPr>
-          <p:cNvPr id="3" name="object 3"/>
-          <p:cNvSpPr txBox="1"/>
-          <p:nvPr/>
-        </p:nvSpPr>
-        <p:spPr>
-          <a:xfrm>
-            <a:off x="522338" y="1455204"/>
-            <a:ext cx="11021060" cy="1007135"/>
-          </a:xfrm>
-          <a:prstGeom prst="rect">
-            <a:avLst/>
-          </a:prstGeom>
-          <a:ln w="9525">
-            <a:solidFill>
-              <a:srgbClr val="FFFFFF"/>
-            </a:solidFill>
-          </a:ln>
-        </p:spPr>
-        <p:txBody>
-          <a:bodyPr vert="horz" wrap="square" lIns="0" tIns="41275" rIns="0" bIns="0" rtlCol="0">
-            <a:spAutoFit/>
-          </a:bodyPr>
-          <a:lstStyle/>
-          <a:p>
-            <a:pPr marL="563880" marR="3319779" indent="-358140">
-              <a:lnSpc>
-                <a:spcPct val="119600"/>
-              </a:lnSpc>
-              <a:spcBef>
-                <a:spcPts val="325"/>
-              </a:spcBef>
-            </a:pPr>
-            <a:r>
-              <a:rPr lang="ja-JP" altLang="en-US" sz="2800" spc="-35" dirty="0">
-                <a:solidFill>
-                  <a:srgbClr val="FFFFFF"/>
-                </a:solidFill>
-                <a:latin typeface="MS Gothic"/>
-                <a:cs typeface="MS Gothic"/>
-              </a:rPr>
-              <a:t>こ</a:t>
-            </a:r>
-            <a:r>
-              <a:rPr sz="2800" spc="-35" dirty="0" err="1">
-                <a:solidFill>
-                  <a:srgbClr val="FFFFFF"/>
-                </a:solidFill>
-                <a:latin typeface="MS Gothic"/>
-                <a:cs typeface="MS Gothic"/>
-              </a:rPr>
-              <a:t>のゲームで一番大事だと思っている技術は、フレームレートとロードだと思っています</a:t>
-            </a:r>
-            <a:r>
-              <a:rPr sz="2800" spc="-35" dirty="0">
-                <a:solidFill>
-                  <a:srgbClr val="FFFFFF"/>
-                </a:solidFill>
-                <a:latin typeface="MS Gothic"/>
-                <a:cs typeface="MS Gothic"/>
-              </a:rPr>
-              <a:t>。</a:t>
-            </a:r>
-            <a:endParaRPr sz="2800" dirty="0">
-              <a:latin typeface="MS Gothic"/>
-              <a:cs typeface="MS Gothic"/>
-            </a:endParaRPr>
-          </a:p>
-        </p:txBody>
-      </p:sp>
-      <p:sp>
-        <p:nvSpPr>
-          <p:cNvPr id="4" name="object 4"/>
-          <p:cNvSpPr/>
-          <p:nvPr/>
-        </p:nvSpPr>
-        <p:spPr>
-          <a:xfrm>
-            <a:off x="522338" y="4166933"/>
-            <a:ext cx="11021060" cy="2358390"/>
-          </a:xfrm>
-          <a:custGeom>
-            <a:avLst/>
-            <a:gdLst/>
-            <a:ahLst/>
-            <a:cxnLst/>
-            <a:rect l="l" t="t" r="r" b="b"/>
-            <a:pathLst>
-              <a:path w="11021060" h="2358390">
-                <a:moveTo>
-                  <a:pt x="0" y="2357881"/>
-                </a:moveTo>
-                <a:lnTo>
-                  <a:pt x="11020679" y="2357881"/>
-                </a:lnTo>
-                <a:lnTo>
-                  <a:pt x="11020679" y="0"/>
-                </a:lnTo>
-                <a:lnTo>
-                  <a:pt x="0" y="0"/>
-                </a:lnTo>
-                <a:lnTo>
-                  <a:pt x="0" y="2357881"/>
-                </a:lnTo>
-                <a:close/>
-              </a:path>
-            </a:pathLst>
-          </a:custGeom>
-          <a:ln w="9525">
-            <a:solidFill>
-              <a:srgbClr val="FFFFFF"/>
-            </a:solidFill>
-          </a:ln>
-        </p:spPr>
-        <p:txBody>
-          <a:bodyPr wrap="square" lIns="0" tIns="0" rIns="0" bIns="0" rtlCol="0"/>
-          <a:lstStyle/>
-          <a:p>
-            <a:endParaRPr/>
-          </a:p>
-        </p:txBody>
-      </p:sp>
-      <p:sp>
-        <p:nvSpPr>
-          <p:cNvPr id="5" name="object 5"/>
-          <p:cNvSpPr txBox="1"/>
-          <p:nvPr/>
-        </p:nvSpPr>
-        <p:spPr>
-          <a:xfrm>
-            <a:off x="466851" y="3524250"/>
-            <a:ext cx="11080115" cy="2741295"/>
-          </a:xfrm>
-          <a:prstGeom prst="rect">
-            <a:avLst/>
-          </a:prstGeom>
-        </p:spPr>
-        <p:txBody>
-          <a:bodyPr vert="horz" wrap="square" lIns="0" tIns="12065" rIns="0" bIns="0" rtlCol="0">
-            <a:spAutoFit/>
-          </a:bodyPr>
-          <a:lstStyle/>
-          <a:p>
-            <a:pPr marL="25400">
-              <a:lnSpc>
-                <a:spcPct val="100000"/>
-              </a:lnSpc>
-              <a:spcBef>
-                <a:spcPts val="95"/>
-              </a:spcBef>
-            </a:pPr>
-            <a:r>
-              <a:rPr sz="2800" spc="-40" dirty="0">
-                <a:solidFill>
-                  <a:srgbClr val="FFFFFF"/>
-                </a:solidFill>
-                <a:latin typeface="MS Gothic"/>
-                <a:cs typeface="MS Gothic"/>
-              </a:rPr>
-              <a:t>フレームレートのための技術</a:t>
-            </a:r>
-            <a:endParaRPr sz="2800" dirty="0">
-              <a:latin typeface="MS Gothic"/>
-              <a:cs typeface="MS Gothic"/>
-            </a:endParaRPr>
-          </a:p>
-          <a:p>
-            <a:pPr marL="260985">
-              <a:lnSpc>
-                <a:spcPct val="100000"/>
-              </a:lnSpc>
-              <a:spcBef>
-                <a:spcPts val="2590"/>
-              </a:spcBef>
-            </a:pPr>
-            <a:r>
-              <a:rPr sz="2800" spc="-35" dirty="0">
-                <a:solidFill>
-                  <a:srgbClr val="FFFFFF"/>
-                </a:solidFill>
-                <a:latin typeface="MS Gothic"/>
-                <a:cs typeface="MS Gothic"/>
-              </a:rPr>
-              <a:t>コンピュートシェーダーでメッシュレット、</a:t>
-            </a:r>
-            <a:endParaRPr sz="2800" dirty="0">
-              <a:latin typeface="MS Gothic"/>
-              <a:cs typeface="MS Gothic"/>
-            </a:endParaRPr>
-          </a:p>
-          <a:p>
-            <a:pPr marL="260985" marR="1637030">
-              <a:lnSpc>
-                <a:spcPct val="119600"/>
-              </a:lnSpc>
-              <a:spcBef>
-                <a:spcPts val="5"/>
-              </a:spcBef>
-            </a:pPr>
-            <a:r>
-              <a:rPr sz="2800" spc="-30" dirty="0">
-                <a:solidFill>
-                  <a:srgbClr val="FFFFFF"/>
-                </a:solidFill>
-                <a:latin typeface="MS Gothic"/>
-                <a:cs typeface="MS Gothic"/>
-              </a:rPr>
-              <a:t>描画マネージャーでバッチ処理</a:t>
-            </a:r>
-            <a:r>
-              <a:rPr sz="2800" b="1" spc="-10" dirty="0">
-                <a:solidFill>
-                  <a:srgbClr val="FFFFFF"/>
-                </a:solidFill>
-                <a:latin typeface="Arial"/>
-                <a:cs typeface="Arial"/>
-              </a:rPr>
-              <a:t>(</a:t>
-            </a:r>
-            <a:r>
-              <a:rPr sz="2800" spc="-30" dirty="0">
-                <a:solidFill>
-                  <a:srgbClr val="FFFFFF"/>
-                </a:solidFill>
-                <a:latin typeface="MS Gothic"/>
-                <a:cs typeface="MS Gothic"/>
-              </a:rPr>
-              <a:t>インスタンシングの予定</a:t>
-            </a:r>
-            <a:r>
-              <a:rPr sz="2800" b="1" spc="-50" dirty="0">
-                <a:solidFill>
-                  <a:srgbClr val="FFFFFF"/>
-                </a:solidFill>
-                <a:latin typeface="Arial"/>
-                <a:cs typeface="Arial"/>
-              </a:rPr>
-              <a:t>)</a:t>
-            </a:r>
-            <a:r>
-              <a:rPr sz="2800" spc="-40" dirty="0">
-                <a:solidFill>
-                  <a:srgbClr val="FFFFFF"/>
-                </a:solidFill>
-                <a:latin typeface="MS Gothic"/>
-                <a:cs typeface="MS Gothic"/>
-              </a:rPr>
-              <a:t>フラスタムカリングを実装したいと思っています。</a:t>
-            </a:r>
-            <a:endParaRPr sz="2800" dirty="0">
-              <a:latin typeface="MS Gothic"/>
-              <a:cs typeface="MS Gothic"/>
-            </a:endParaRPr>
-          </a:p>
-          <a:p>
-            <a:pPr marL="260985">
-              <a:lnSpc>
-                <a:spcPct val="100000"/>
-              </a:lnSpc>
-              <a:spcBef>
-                <a:spcPts val="670"/>
-              </a:spcBef>
-            </a:pPr>
-            <a:r>
-              <a:rPr sz="2800" spc="-30" dirty="0">
-                <a:solidFill>
-                  <a:srgbClr val="FFFFFF"/>
-                </a:solidFill>
-                <a:latin typeface="MS Gothic"/>
-                <a:cs typeface="MS Gothic"/>
-              </a:rPr>
-              <a:t>もし、❦れでも重たい場合</a:t>
-            </a:r>
-            <a:r>
-              <a:rPr sz="2800" b="1" spc="-30" dirty="0">
-                <a:solidFill>
-                  <a:srgbClr val="FFFFFF"/>
-                </a:solidFill>
-                <a:latin typeface="Arial"/>
-                <a:cs typeface="Arial"/>
-              </a:rPr>
-              <a:t>(LOD)</a:t>
-            </a:r>
-            <a:r>
-              <a:rPr sz="2800" spc="-80" dirty="0">
-                <a:solidFill>
-                  <a:srgbClr val="FFFFFF"/>
-                </a:solidFill>
-                <a:latin typeface="MS Gothic"/>
-                <a:cs typeface="MS Gothic"/>
-              </a:rPr>
-              <a:t>を実装予定です。</a:t>
-            </a:r>
-            <a:r>
-              <a:rPr sz="2100" spc="-15" baseline="-21825" dirty="0">
-                <a:solidFill>
-                  <a:srgbClr val="FFFFFF"/>
-                </a:solidFill>
-                <a:latin typeface="Arial MT"/>
-                <a:cs typeface="Arial MT"/>
-              </a:rPr>
-              <a:t>LOD</a:t>
-            </a:r>
-            <a:r>
-              <a:rPr sz="2100" spc="-30" baseline="-21825" dirty="0">
-                <a:solidFill>
-                  <a:srgbClr val="FFFFFF"/>
-                </a:solidFill>
-                <a:latin typeface="MS Gothic"/>
-                <a:cs typeface="MS Gothic"/>
-              </a:rPr>
-              <a:t>の勉✲はまだできていません</a:t>
-            </a:r>
-            <a:endParaRPr sz="2100" baseline="-21825" dirty="0">
-              <a:latin typeface="MS Gothic"/>
-              <a:cs typeface="MS Gothic"/>
-            </a:endParaRPr>
-          </a:p>
-        </p:txBody>
-      </p:sp>
-    </p:spTree>
-  </p:cSld>
-  <p:clrMapOvr>
-    <a:masterClrMapping/>
-  </p:clrMapOvr>
-</p:sld>
-</file>
-
-<file path=ppt/slides/slide5.xml><?xml version="1.0" encoding="utf-8"?>
-<p:sld xmlns:a="http://schemas.openxmlformats.org/drawingml/2006/main" xmlns:r="http://schemas.openxmlformats.org/officeDocument/2006/relationships" xmlns:p="http://schemas.openxmlformats.org/presentationml/2006/main">
-  <p:cSld>
-    <p:spTree>
-      <p:nvGrpSpPr>
-        <p:cNvPr id="1" name=""/>
-        <p:cNvGrpSpPr/>
-        <p:nvPr/>
-      </p:nvGrpSpPr>
-      <p:grpSpPr>
-        <a:xfrm>
-          <a:off x="0" y="0"/>
-          <a:ext cx="0" cy="0"/>
-          <a:chOff x="0" y="0"/>
-          <a:chExt cx="0" cy="0"/>
-        </a:xfrm>
-      </p:grpSpPr>
-      <p:sp>
-        <p:nvSpPr>
-          <p:cNvPr id="2" name="object 2"/>
-          <p:cNvSpPr txBox="1">
-            <a:spLocks noGrp="1"/>
-          </p:cNvSpPr>
-          <p:nvPr>
-            <p:ph type="title"/>
-          </p:nvPr>
-        </p:nvSpPr>
-        <p:spPr>
-          <a:xfrm>
-            <a:off x="346659" y="437133"/>
-            <a:ext cx="2263140" cy="696595"/>
-          </a:xfrm>
-          <a:prstGeom prst="rect">
-            <a:avLst/>
-          </a:prstGeom>
-        </p:spPr>
-        <p:txBody>
-          <a:bodyPr vert="horz" wrap="square" lIns="0" tIns="13335" rIns="0" bIns="0" rtlCol="0">
-            <a:spAutoFit/>
-          </a:bodyPr>
-          <a:lstStyle/>
-          <a:p>
-            <a:pPr marL="12700">
-              <a:lnSpc>
-                <a:spcPct val="100000"/>
-              </a:lnSpc>
-              <a:spcBef>
-                <a:spcPts val="105"/>
-              </a:spcBef>
-            </a:pPr>
-            <a:r>
-              <a:rPr u="none" spc="-15" dirty="0"/>
-              <a:t>技術選定</a:t>
-            </a:r>
-          </a:p>
-        </p:txBody>
-      </p:sp>
-      <p:sp>
-        <p:nvSpPr>
-          <p:cNvPr id="3" name="object 3"/>
-          <p:cNvSpPr txBox="1"/>
-          <p:nvPr/>
-        </p:nvSpPr>
-        <p:spPr>
-          <a:xfrm>
-            <a:off x="487921" y="2850133"/>
-            <a:ext cx="11021060" cy="1850389"/>
-          </a:xfrm>
-          <a:prstGeom prst="rect">
-            <a:avLst/>
-          </a:prstGeom>
-          <a:ln w="9525">
-            <a:solidFill>
-              <a:srgbClr val="FFFFFF"/>
-            </a:solidFill>
-          </a:ln>
-        </p:spPr>
-        <p:txBody>
-          <a:bodyPr vert="horz" wrap="square" lIns="0" tIns="40640" rIns="0" bIns="0" rtlCol="0">
-            <a:spAutoFit/>
-          </a:bodyPr>
-          <a:lstStyle/>
-          <a:p>
-            <a:pPr marL="205740" marR="822960">
-              <a:lnSpc>
-                <a:spcPct val="119700"/>
-              </a:lnSpc>
-              <a:spcBef>
-                <a:spcPts val="320"/>
-              </a:spcBef>
-            </a:pPr>
-            <a:r>
-              <a:rPr sz="2800" spc="-35" dirty="0">
-                <a:solidFill>
-                  <a:srgbClr val="FFFFFF"/>
-                </a:solidFill>
-                <a:latin typeface="MS Gothic"/>
-                <a:cs typeface="MS Gothic"/>
-              </a:rPr>
-              <a:t>自作モデルフォーマットを作成して、バイナリーデータで持つ</a:t>
-            </a:r>
-            <a:r>
-              <a:rPr sz="2800" spc="-15" dirty="0">
-                <a:solidFill>
-                  <a:srgbClr val="FFFFFF"/>
-                </a:solidFill>
-                <a:latin typeface="MS Gothic"/>
-                <a:cs typeface="MS Gothic"/>
-              </a:rPr>
-              <a:t>スレッド処理</a:t>
-            </a:r>
-            <a:r>
-              <a:rPr sz="2800" b="1" spc="-10" dirty="0">
-                <a:solidFill>
-                  <a:srgbClr val="FFFFFF"/>
-                </a:solidFill>
-                <a:latin typeface="Arial"/>
-                <a:cs typeface="Arial"/>
-              </a:rPr>
-              <a:t>(</a:t>
-            </a:r>
-            <a:r>
-              <a:rPr sz="2800" spc="-35" dirty="0">
-                <a:solidFill>
-                  <a:srgbClr val="FFFFFF"/>
-                </a:solidFill>
-                <a:latin typeface="MS Gothic"/>
-                <a:cs typeface="MS Gothic"/>
-              </a:rPr>
-              <a:t>バッファの生成とオブジェクトロードを</a:t>
-            </a:r>
-            <a:endParaRPr sz="2800">
-              <a:latin typeface="MS Gothic"/>
-              <a:cs typeface="MS Gothic"/>
-            </a:endParaRPr>
-          </a:p>
-          <a:p>
-            <a:pPr marL="5422900">
-              <a:lnSpc>
-                <a:spcPts val="3025"/>
-              </a:lnSpc>
-            </a:pPr>
-            <a:r>
-              <a:rPr sz="2800" spc="-30" dirty="0">
-                <a:solidFill>
-                  <a:srgbClr val="FFFFFF"/>
-                </a:solidFill>
-                <a:latin typeface="MS Gothic"/>
-                <a:cs typeface="MS Gothic"/>
-              </a:rPr>
-              <a:t>別スレッドで行うようにしたい</a:t>
-            </a:r>
-            <a:r>
-              <a:rPr sz="2800" b="1" spc="-50" dirty="0">
-                <a:solidFill>
-                  <a:srgbClr val="FFFFFF"/>
-                </a:solidFill>
-                <a:latin typeface="Arial"/>
-                <a:cs typeface="Arial"/>
-              </a:rPr>
-              <a:t>)</a:t>
-            </a:r>
-            <a:endParaRPr sz="2800">
-              <a:latin typeface="Arial"/>
-              <a:cs typeface="Arial"/>
-            </a:endParaRPr>
-          </a:p>
-        </p:txBody>
-      </p:sp>
-      <p:sp>
-        <p:nvSpPr>
-          <p:cNvPr id="4" name="object 4"/>
-          <p:cNvSpPr txBox="1"/>
-          <p:nvPr/>
-        </p:nvSpPr>
-        <p:spPr>
-          <a:xfrm>
-            <a:off x="445109" y="2207132"/>
-            <a:ext cx="4291330" cy="452120"/>
-          </a:xfrm>
-          <a:prstGeom prst="rect">
-            <a:avLst/>
-          </a:prstGeom>
-        </p:spPr>
-        <p:txBody>
-          <a:bodyPr vert="horz" wrap="square" lIns="0" tIns="12065" rIns="0" bIns="0" rtlCol="0">
-            <a:spAutoFit/>
-          </a:bodyPr>
-          <a:lstStyle/>
-          <a:p>
-            <a:pPr marL="12700">
-              <a:lnSpc>
-                <a:spcPct val="100000"/>
-              </a:lnSpc>
-              <a:spcBef>
-                <a:spcPts val="95"/>
-              </a:spcBef>
-            </a:pPr>
-            <a:r>
-              <a:rPr sz="2800" spc="-40" dirty="0">
-                <a:solidFill>
-                  <a:srgbClr val="FFFFFF"/>
-                </a:solidFill>
-                <a:latin typeface="MS Gothic"/>
-                <a:cs typeface="MS Gothic"/>
-              </a:rPr>
-              <a:t>ロード最適化のための技術</a:t>
-            </a:r>
-            <a:endParaRPr sz="2800">
-              <a:latin typeface="MS Gothic"/>
-              <a:cs typeface="MS Gothic"/>
-            </a:endParaRPr>
-          </a:p>
-        </p:txBody>
-      </p:sp>
-      <p:sp>
-        <p:nvSpPr>
-          <p:cNvPr id="5" name="object 5"/>
-          <p:cNvSpPr txBox="1"/>
-          <p:nvPr/>
-        </p:nvSpPr>
-        <p:spPr>
-          <a:xfrm>
-            <a:off x="5093970" y="2459227"/>
-            <a:ext cx="2693670" cy="239395"/>
-          </a:xfrm>
-          <a:prstGeom prst="rect">
-            <a:avLst/>
-          </a:prstGeom>
-        </p:spPr>
-        <p:txBody>
-          <a:bodyPr vert="horz" wrap="square" lIns="0" tIns="13335" rIns="0" bIns="0" rtlCol="0">
-            <a:spAutoFit/>
-          </a:bodyPr>
-          <a:lstStyle/>
-          <a:p>
-            <a:pPr marL="12700">
-              <a:lnSpc>
-                <a:spcPct val="100000"/>
-              </a:lnSpc>
-              <a:spcBef>
-                <a:spcPts val="105"/>
-              </a:spcBef>
-            </a:pPr>
-            <a:r>
-              <a:rPr sz="1400" spc="-20" dirty="0">
-                <a:solidFill>
-                  <a:srgbClr val="FFFFFF"/>
-                </a:solidFill>
-                <a:latin typeface="MS Gothic"/>
-                <a:cs typeface="MS Gothic"/>
-              </a:rPr>
-              <a:t>❦ちらは全然勉✲できていません</a:t>
-            </a:r>
-            <a:endParaRPr sz="1400">
-              <a:latin typeface="MS Gothic"/>
-              <a:cs typeface="MS Gothic"/>
-            </a:endParaRPr>
-          </a:p>
-        </p:txBody>
-      </p:sp>
-    </p:spTree>
-  </p:cSld>
-  <p:clrMapOvr>
-    <a:masterClrMapping/>
-  </p:clrMapOvr>
-</p:sld>
-</file>
-
-<file path=ppt/slides/slide6.xml><?xml version="1.0" encoding="utf-8"?>
-<p:sld xmlns:a="http://schemas.openxmlformats.org/drawingml/2006/main" xmlns:r="http://schemas.openxmlformats.org/officeDocument/2006/relationships" xmlns:p="http://schemas.openxmlformats.org/presentationml/2006/main">
-  <p:cSld>
-    <p:spTree>
-      <p:nvGrpSpPr>
-        <p:cNvPr id="1" name=""/>
-        <p:cNvGrpSpPr/>
-        <p:nvPr/>
-      </p:nvGrpSpPr>
-      <p:grpSpPr>
-        <a:xfrm>
-          <a:off x="0" y="0"/>
-          <a:ext cx="0" cy="0"/>
-          <a:chOff x="0" y="0"/>
-          <a:chExt cx="0" cy="0"/>
-        </a:xfrm>
-      </p:grpSpPr>
-      <p:sp>
-        <p:nvSpPr>
-          <p:cNvPr id="2" name="object 2"/>
-          <p:cNvSpPr txBox="1">
-            <a:spLocks noGrp="1"/>
-          </p:cNvSpPr>
-          <p:nvPr>
-            <p:ph type="title"/>
-          </p:nvPr>
-        </p:nvSpPr>
-        <p:spPr>
-          <a:xfrm>
-            <a:off x="1867535" y="2172970"/>
-            <a:ext cx="8457565" cy="1631950"/>
-          </a:xfrm>
-          <a:prstGeom prst="rect">
-            <a:avLst/>
-          </a:prstGeom>
-          <a:ln w="38100">
-            <a:solidFill>
-              <a:srgbClr val="FFFFFF"/>
-            </a:solidFill>
-          </a:ln>
-        </p:spPr>
-        <p:txBody>
-          <a:bodyPr vert="horz" wrap="square" lIns="0" tIns="267335" rIns="0" bIns="0" rtlCol="0">
-            <a:spAutoFit/>
-          </a:bodyPr>
-          <a:lstStyle/>
-          <a:p>
-            <a:pPr marL="1681480" marR="151130" indent="-1529080">
-              <a:lnSpc>
-                <a:spcPts val="4320"/>
-              </a:lnSpc>
-              <a:spcBef>
-                <a:spcPts val="2105"/>
-              </a:spcBef>
-            </a:pPr>
-            <a:r>
-              <a:rPr sz="4000" u="heavy" spc="-45" dirty="0">
-                <a:uFill>
-                  <a:solidFill>
-                    <a:srgbClr val="FFFFFF"/>
-                  </a:solidFill>
-                </a:uFill>
-              </a:rPr>
-              <a:t>今制作している描画マネージャーの</a:t>
-            </a:r>
-            <a:r>
-              <a:rPr sz="4000" u="heavy" spc="1000" dirty="0">
-                <a:uFill>
-                  <a:solidFill>
-                    <a:srgbClr val="FFFFFF"/>
-                  </a:solidFill>
-                </a:uFill>
-              </a:rPr>
-              <a:t>            </a:t>
-            </a:r>
-            <a:r>
-              <a:rPr sz="4000" u="heavy" spc="-40" dirty="0">
-                <a:uFill>
-                  <a:solidFill>
-                    <a:srgbClr val="FFFFFF"/>
-                  </a:solidFill>
-                </a:uFill>
-              </a:rPr>
-              <a:t>アピールポイント紹介</a:t>
-            </a:r>
-            <a:endParaRPr sz="4000"/>
-          </a:p>
-        </p:txBody>
-      </p:sp>
-    </p:spTree>
-  </p:cSld>
-  <p:clrMapOvr>
-    <a:masterClrMapping/>
-  </p:clrMapOvr>
-</p:sld>
-</file>
-
-<file path=ppt/slides/slide7.xml><?xml version="1.0" encoding="utf-8"?>
-<p:sld xmlns:a="http://schemas.openxmlformats.org/drawingml/2006/main" xmlns:r="http://schemas.openxmlformats.org/officeDocument/2006/relationships" xmlns:p="http://schemas.openxmlformats.org/presentationml/2006/main">
-  <p:cSld>
-    <p:spTree>
-      <p:nvGrpSpPr>
-        <p:cNvPr id="1" name=""/>
-        <p:cNvGrpSpPr/>
-        <p:nvPr/>
-      </p:nvGrpSpPr>
-      <p:grpSpPr>
-        <a:xfrm>
-          <a:off x="0" y="0"/>
-          <a:ext cx="0" cy="0"/>
-          <a:chOff x="0" y="0"/>
-          <a:chExt cx="0" cy="0"/>
-        </a:xfrm>
-      </p:grpSpPr>
-      <p:sp>
-        <p:nvSpPr>
-          <p:cNvPr id="2" name="object 2"/>
-          <p:cNvSpPr txBox="1">
-            <a:spLocks noGrp="1"/>
-          </p:cNvSpPr>
-          <p:nvPr>
-            <p:ph type="title"/>
-          </p:nvPr>
-        </p:nvSpPr>
-        <p:spPr>
-          <a:xfrm>
             <a:off x="78739" y="603884"/>
             <a:ext cx="7288530" cy="696595"/>
           </a:xfrm>
@@ -4775,8 +3453,8 @@
         </p:nvSpPr>
         <p:spPr>
           <a:xfrm>
-            <a:off x="78739" y="2134075"/>
-            <a:ext cx="9776460" cy="3949065"/>
+            <a:off x="304800" y="1832210"/>
+            <a:ext cx="9776460" cy="2884443"/>
           </a:xfrm>
           <a:prstGeom prst="rect">
             <a:avLst/>
@@ -4797,6 +3475,36 @@
               </a:spcBef>
             </a:pPr>
             <a:r>
+              <a:rPr sz="2200" spc="-35" dirty="0" err="1">
+                <a:solidFill>
+                  <a:srgbClr val="FFFFFF"/>
+                </a:solidFill>
+                <a:latin typeface="MS Gothic"/>
+                <a:cs typeface="MS Gothic"/>
+              </a:rPr>
+              <a:t>プラットフォーム固有の要素をラッパー構造体として定義する</a:t>
+            </a:r>
+            <a:r>
+              <a:rPr lang="ja-JP" altLang="en-US" sz="2200" spc="-35" dirty="0">
+                <a:solidFill>
+                  <a:srgbClr val="FFFFFF"/>
+                </a:solidFill>
+                <a:latin typeface="MS Gothic"/>
+                <a:cs typeface="MS Gothic"/>
+              </a:rPr>
+              <a:t>こ</a:t>
+            </a:r>
+            <a:r>
+              <a:rPr sz="2200" spc="-35" dirty="0" err="1">
+                <a:solidFill>
+                  <a:srgbClr val="FFFFFF"/>
+                </a:solidFill>
+                <a:latin typeface="MS Gothic"/>
+                <a:cs typeface="MS Gothic"/>
+              </a:rPr>
+              <a:t>とで</a:t>
+            </a:r>
+            <a:r>
               <a:rPr sz="2200" spc="-35" dirty="0">
                 <a:solidFill>
                   <a:srgbClr val="FFFFFF"/>
@@ -4804,9 +3512,9 @@
                 <a:latin typeface="MS Gothic"/>
                 <a:cs typeface="MS Gothic"/>
               </a:rPr>
-              <a:t>プラットフォーム固有の要素をラッパー構造体として定義する❦とで、</a:t>
-            </a:r>
-            <a:endParaRPr sz="2200">
+              <a:t>、</a:t>
+            </a:r>
+            <a:endParaRPr sz="2200" dirty="0">
               <a:latin typeface="MS Gothic"/>
               <a:cs typeface="MS Gothic"/>
             </a:endParaRPr>
@@ -4830,7 +3538,7 @@
               </a:rPr>
               <a:t>プラットフォームが変更されても</a:t>
             </a:r>
-            <a:endParaRPr sz="2200">
+            <a:endParaRPr sz="2200" dirty="0">
               <a:latin typeface="MS Gothic"/>
               <a:cs typeface="MS Gothic"/>
             </a:endParaRPr>
@@ -4845,7 +3553,7 @@
               </a:spcBef>
             </a:pPr>
             <a:r>
-              <a:rPr sz="2200" spc="-20" dirty="0">
+              <a:rPr sz="2200" spc="-20" dirty="0" err="1">
                 <a:solidFill>
                   <a:srgbClr val="FFFFFF"/>
                 </a:solidFill>
@@ -4855,7 +3563,7 @@
               <a:t>ゲーム基盤</a:t>
             </a:r>
             <a:r>
-              <a:rPr sz="2200" spc="-25" dirty="0">
+              <a:rPr sz="2200" spc="-25" dirty="0" err="1">
                 <a:solidFill>
                   <a:srgbClr val="FFFFFF"/>
                 </a:solidFill>
@@ -4865,7 +3573,7 @@
               <a:t>（</a:t>
             </a:r>
             <a:r>
-              <a:rPr sz="2200" spc="-25" dirty="0">
+              <a:rPr sz="2200" spc="-25" dirty="0" err="1">
                 <a:solidFill>
                   <a:srgbClr val="FFFFFF"/>
                 </a:solidFill>
@@ -4875,7 +3583,7 @@
               <a:t>GameMain</a:t>
             </a:r>
             <a:r>
-              <a:rPr sz="2200" spc="-25" dirty="0">
+              <a:rPr sz="2200" spc="-25" dirty="0" err="1">
                 <a:solidFill>
                   <a:srgbClr val="FFFFFF"/>
                 </a:solidFill>
@@ -4885,16 +3593,26 @@
               <a:t>）</a:t>
             </a:r>
             <a:r>
-              <a:rPr sz="2200" spc="-35" dirty="0">
-                <a:solidFill>
-                  <a:srgbClr val="FFFFFF"/>
-                </a:solidFill>
-                <a:latin typeface="MS Gothic"/>
-                <a:cs typeface="MS Gothic"/>
-              </a:rPr>
-              <a:t>を改修せずに動作させる❦とを可能にしています。</a:t>
-            </a:r>
-            <a:endParaRPr sz="2200">
+              <a:rPr sz="2200" spc="-35" dirty="0" err="1">
+                <a:solidFill>
+                  <a:srgbClr val="FFFFFF"/>
+                </a:solidFill>
+                <a:latin typeface="MS Gothic"/>
+                <a:cs typeface="MS Gothic"/>
+              </a:rPr>
+              <a:t>を改修せずに動作</a:t>
+            </a:r>
+            <a:r>
+              <a:rPr lang="ja-JP" altLang="en-US" sz="2200" spc="-35" dirty="0">
+                <a:solidFill>
+                  <a:srgbClr val="FFFFFF"/>
+                </a:solidFill>
+                <a:latin typeface="MS Gothic"/>
+                <a:cs typeface="MS Gothic"/>
+              </a:rPr>
+              <a:t>します。</a:t>
+            </a:r>
+            <a:endParaRPr sz="2200" dirty="0">
               <a:latin typeface="MS Gothic"/>
               <a:cs typeface="MS Gothic"/>
             </a:endParaRPr>
@@ -4908,7 +3626,7 @@
                 <a:spcPts val="850"/>
               </a:spcBef>
             </a:pPr>
-            <a:endParaRPr sz="2200">
+            <a:endParaRPr sz="2200" dirty="0">
               <a:latin typeface="MS Gothic"/>
               <a:cs typeface="MS Gothic"/>
             </a:endParaRPr>
@@ -4932,7 +3650,7 @@
               </a:rPr>
               <a:t>計算用構造体は共通のデータ形式を保持し、</a:t>
             </a:r>
-            <a:endParaRPr sz="2200">
+            <a:endParaRPr sz="2200" dirty="0">
               <a:latin typeface="MS Gothic"/>
               <a:cs typeface="MS Gothic"/>
             </a:endParaRPr>
@@ -4947,6 +3665,26 @@
               </a:spcBef>
             </a:pPr>
             <a:r>
+              <a:rPr sz="2200" spc="-35" dirty="0" err="1">
+                <a:solidFill>
+                  <a:srgbClr val="FFFFFF"/>
+                </a:solidFill>
+                <a:latin typeface="MS Gothic"/>
+                <a:cs typeface="MS Gothic"/>
+              </a:rPr>
+              <a:t>処理部分をプラットフォーム依存として分離する</a:t>
+            </a:r>
+            <a:r>
+              <a:rPr lang="ja-JP" altLang="en-US" sz="2200" spc="-35" dirty="0">
+                <a:solidFill>
+                  <a:srgbClr val="FFFFFF"/>
+                </a:solidFill>
+                <a:latin typeface="MS Gothic"/>
+                <a:cs typeface="MS Gothic"/>
+              </a:rPr>
+              <a:t>こと</a:t>
+            </a:r>
+            <a:r>
               <a:rPr sz="2200" spc="-35" dirty="0">
                 <a:solidFill>
                   <a:srgbClr val="FFFFFF"/>
@@ -4954,9 +3692,9 @@
                 <a:latin typeface="MS Gothic"/>
                 <a:cs typeface="MS Gothic"/>
               </a:rPr>
-              <a:t>処理部分をプラットフォーム依存として分離する❦とで、</a:t>
-            </a:r>
-            <a:endParaRPr sz="2200">
+              <a:t>で、</a:t>
+            </a:r>
+            <a:endParaRPr sz="2200" dirty="0">
               <a:latin typeface="MS Gothic"/>
               <a:cs typeface="MS Gothic"/>
             </a:endParaRPr>
@@ -4968,6 +3706,16 @@
               </a:lnSpc>
             </a:pPr>
             <a:r>
+              <a:rPr sz="2200" spc="-35" dirty="0" err="1">
+                <a:solidFill>
+                  <a:srgbClr val="FFFFFF"/>
+                </a:solidFill>
+                <a:latin typeface="MS Gothic"/>
+                <a:cs typeface="MS Gothic"/>
+              </a:rPr>
+              <a:t>各プラットフォームに最適化された実装へ容易に切り替えられる設計としています</a:t>
+            </a:r>
+            <a:r>
               <a:rPr sz="2200" spc="-35" dirty="0">
                 <a:solidFill>
                   <a:srgbClr val="FFFFFF"/>
@@ -4975,44 +3723,9 @@
                 <a:latin typeface="MS Gothic"/>
                 <a:cs typeface="MS Gothic"/>
               </a:rPr>
-              <a:t>各プラットフォームに最適化された実装へ容易に切り替えられる設計としています。</a:t>
-            </a:r>
-            <a:endParaRPr sz="2200">
-              <a:latin typeface="MS Gothic"/>
-              <a:cs typeface="MS Gothic"/>
-            </a:endParaRPr>
-          </a:p>
-          <a:p>
-            <a:pPr>
-              <a:lnSpc>
-                <a:spcPct val="100000"/>
-              </a:lnSpc>
-              <a:spcBef>
-                <a:spcPts val="2490"/>
-              </a:spcBef>
-            </a:pPr>
-            <a:endParaRPr sz="2200">
-              <a:latin typeface="MS Gothic"/>
-              <a:cs typeface="MS Gothic"/>
-            </a:endParaRPr>
-          </a:p>
-          <a:p>
-            <a:pPr marL="12700">
-              <a:lnSpc>
-                <a:spcPct val="100000"/>
-              </a:lnSpc>
-            </a:pPr>
-            <a:r>
-              <a:rPr sz="2200" spc="-35" dirty="0">
-                <a:solidFill>
-                  <a:srgbClr val="FFFFFF"/>
-                </a:solidFill>
-                <a:latin typeface="MS Gothic"/>
-                <a:cs typeface="MS Gothic"/>
-              </a:rPr>
-              <a:t>入力情報なども同じように制作予定です。</a:t>
-            </a:r>
-            <a:endParaRPr sz="2200">
+              <a:t>。</a:t>
+            </a:r>
+            <a:endParaRPr sz="2200" dirty="0">
               <a:latin typeface="MS Gothic"/>
               <a:cs typeface="MS Gothic"/>
             </a:endParaRPr>
@@ -5041,6 +3754,115 @@
           </a:prstGeom>
         </p:spPr>
       </p:pic>
+      <p:sp>
+        <p:nvSpPr>
+          <p:cNvPr id="5" name="object 3">
+            <a:extLst>
+              <a:ext uri="{FF2B5EF4-FFF2-40B4-BE49-F238E27FC236}">
+                <a16:creationId xmlns:a16="http://schemas.microsoft.com/office/drawing/2014/main" id="{54197A98-C48B-E701-616F-0DDFF2502C3D}"/>
+              </a:ext>
+            </a:extLst>
+          </p:cNvPr>
+          <p:cNvSpPr txBox="1"/>
+          <p:nvPr/>
+        </p:nvSpPr>
+        <p:spPr>
+          <a:xfrm>
+            <a:off x="304800" y="5167495"/>
+            <a:ext cx="9776460" cy="1096453"/>
+          </a:xfrm>
+          <a:prstGeom prst="rect">
+            <a:avLst/>
+          </a:prstGeom>
+        </p:spPr>
+        <p:txBody>
+          <a:bodyPr vert="horz" wrap="square" lIns="0" tIns="29209" rIns="0" bIns="0" rtlCol="0">
+            <a:spAutoFit/>
+          </a:bodyPr>
+          <a:lstStyle/>
+          <a:p>
+            <a:pPr marL="12700">
+              <a:lnSpc>
+                <a:spcPct val="100000"/>
+              </a:lnSpc>
+              <a:spcBef>
+                <a:spcPts val="229"/>
+              </a:spcBef>
+            </a:pPr>
+            <a:r>
+              <a:rPr lang="ja-JP" altLang="en-US" sz="2200" dirty="0">
+                <a:solidFill>
+                  <a:schemeClr val="bg1"/>
+                </a:solidFill>
+                <a:latin typeface="MS Gothic"/>
+                <a:cs typeface="MS Gothic"/>
+              </a:rPr>
+              <a:t>修正予定があり</a:t>
+            </a:r>
+            <a:endParaRPr lang="en-US" altLang="ja-JP" sz="2200" dirty="0">
+              <a:solidFill>
+                <a:schemeClr val="bg1"/>
+              </a:solidFill>
+              <a:latin typeface="MS Gothic"/>
+              <a:cs typeface="MS Gothic"/>
+            </a:endParaRPr>
+          </a:p>
+          <a:p>
+            <a:pPr marL="12700">
+              <a:lnSpc>
+                <a:spcPct val="100000"/>
+              </a:lnSpc>
+              <a:spcBef>
+                <a:spcPts val="229"/>
+              </a:spcBef>
+            </a:pPr>
+            <a:r>
+              <a:rPr lang="ja-JP" altLang="en-US" sz="2200" dirty="0">
+                <a:solidFill>
+                  <a:schemeClr val="bg1"/>
+                </a:solidFill>
+                <a:latin typeface="MS Gothic"/>
+                <a:cs typeface="MS Gothic"/>
+              </a:rPr>
+              <a:t>コマンドリストをゲーム内で作成し、プラットフォーム階層に</a:t>
+            </a:r>
+            <a:endParaRPr lang="en-US" altLang="ja-JP" sz="2200" dirty="0">
+              <a:solidFill>
+                <a:schemeClr val="bg1"/>
+              </a:solidFill>
+              <a:latin typeface="MS Gothic"/>
+              <a:cs typeface="MS Gothic"/>
+            </a:endParaRPr>
+          </a:p>
+          <a:p>
+            <a:pPr marL="12700">
+              <a:lnSpc>
+                <a:spcPct val="100000"/>
+              </a:lnSpc>
+              <a:spcBef>
+                <a:spcPts val="229"/>
+              </a:spcBef>
+            </a:pPr>
+            <a:r>
+              <a:rPr lang="ja-JP" altLang="en-US" sz="2200" dirty="0">
+                <a:solidFill>
+                  <a:schemeClr val="bg1"/>
+                </a:solidFill>
+                <a:latin typeface="MS Gothic"/>
+                <a:cs typeface="MS Gothic"/>
+              </a:rPr>
+              <a:t>上げて、描画マネージャー内で最適化して描画するように修正予定</a:t>
+            </a:r>
+            <a:endParaRPr sz="2200" dirty="0">
+              <a:solidFill>
+                <a:schemeClr val="bg1"/>
+              </a:solidFill>
+              <a:latin typeface="MS Gothic"/>
+              <a:cs typeface="MS Gothic"/>
+            </a:endParaRPr>
+          </a:p>
+        </p:txBody>
+      </p:sp>
     </p:spTree>
   </p:cSld>
   <p:clrMapOvr>
@@ -5049,7 +3871,7 @@
 </p:sld>
 </file>
 
-<file path=ppt/slides/slide8.xml><?xml version="1.0" encoding="utf-8"?>
+<file path=ppt/slides/slide5.xml><?xml version="1.0" encoding="utf-8"?>
 <p:sld xmlns:a="http://schemas.openxmlformats.org/drawingml/2006/main" xmlns:r="http://schemas.openxmlformats.org/officeDocument/2006/relationships" xmlns:p="http://schemas.openxmlformats.org/presentationml/2006/main">
   <p:cSld>
     <p:spTree>
@@ -5349,7 +4171,7 @@
 </p:sld>
 </file>
 
-<file path=ppt/slides/slide9.xml><?xml version="1.0" encoding="utf-8"?>
+<file path=ppt/slides/slide6.xml><?xml version="1.0" encoding="utf-8"?>
 <p:sld xmlns:a="http://schemas.openxmlformats.org/drawingml/2006/main" xmlns:r="http://schemas.openxmlformats.org/officeDocument/2006/relationships" xmlns:p="http://schemas.openxmlformats.org/presentationml/2006/main">
   <p:cSld>
     <p:spTree>
@@ -5589,6 +4411,1671 @@
         </p:spPr>
       </p:pic>
     </p:spTree>
+  </p:cSld>
+  <p:clrMapOvr>
+    <a:masterClrMapping/>
+  </p:clrMapOvr>
+</p:sld>
+</file>
+
+<file path=ppt/slides/slide7.xml><?xml version="1.0" encoding="utf-8"?>
+<p:sld xmlns:a="http://schemas.openxmlformats.org/drawingml/2006/main" xmlns:r="http://schemas.openxmlformats.org/officeDocument/2006/relationships" xmlns:p="http://schemas.openxmlformats.org/presentationml/2006/main">
+  <p:cSld>
+    <p:spTree>
+      <p:nvGrpSpPr>
+        <p:cNvPr id="1" name=""/>
+        <p:cNvGrpSpPr/>
+        <p:nvPr/>
+      </p:nvGrpSpPr>
+      <p:grpSpPr>
+        <a:xfrm>
+          <a:off x="0" y="0"/>
+          <a:ext cx="0" cy="0"/>
+          <a:chOff x="0" y="0"/>
+          <a:chExt cx="0" cy="0"/>
+        </a:xfrm>
+      </p:grpSpPr>
+      <p:sp>
+        <p:nvSpPr>
+          <p:cNvPr id="2" name="object 2"/>
+          <p:cNvSpPr txBox="1">
+            <a:spLocks noGrp="1"/>
+          </p:cNvSpPr>
+          <p:nvPr>
+            <p:ph type="title"/>
+          </p:nvPr>
+        </p:nvSpPr>
+        <p:spPr>
+          <a:xfrm>
+            <a:off x="442671" y="482041"/>
+            <a:ext cx="3936365" cy="697230"/>
+          </a:xfrm>
+          <a:prstGeom prst="rect">
+            <a:avLst/>
+          </a:prstGeom>
+        </p:spPr>
+        <p:txBody>
+          <a:bodyPr vert="horz" wrap="square" lIns="0" tIns="13335" rIns="0" bIns="0" rtlCol="0">
+            <a:spAutoFit/>
+          </a:bodyPr>
+          <a:lstStyle/>
+          <a:p>
+            <a:pPr marL="12700">
+              <a:lnSpc>
+                <a:spcPct val="100000"/>
+              </a:lnSpc>
+              <a:spcBef>
+                <a:spcPts val="105"/>
+              </a:spcBef>
+            </a:pPr>
+            <a:r>
+              <a:rPr spc="-25" dirty="0"/>
+              <a:t>描画処理の流れ</a:t>
+            </a:r>
+          </a:p>
+        </p:txBody>
+      </p:sp>
+      <p:sp>
+        <p:nvSpPr>
+          <p:cNvPr id="3" name="object 3"/>
+          <p:cNvSpPr txBox="1"/>
+          <p:nvPr/>
+        </p:nvSpPr>
+        <p:spPr>
+          <a:xfrm>
+            <a:off x="897432" y="1355597"/>
+            <a:ext cx="1517015" cy="391160"/>
+          </a:xfrm>
+          <a:prstGeom prst="rect">
+            <a:avLst/>
+          </a:prstGeom>
+        </p:spPr>
+        <p:txBody>
+          <a:bodyPr vert="horz" wrap="square" lIns="0" tIns="12700" rIns="0" bIns="0" rtlCol="0">
+            <a:spAutoFit/>
+          </a:bodyPr>
+          <a:lstStyle/>
+          <a:p>
+            <a:pPr marL="12700">
+              <a:lnSpc>
+                <a:spcPct val="100000"/>
+              </a:lnSpc>
+              <a:spcBef>
+                <a:spcPts val="100"/>
+              </a:spcBef>
+            </a:pPr>
+            <a:r>
+              <a:rPr sz="2400" spc="-10" dirty="0">
+                <a:solidFill>
+                  <a:srgbClr val="FFFFFF"/>
+                </a:solidFill>
+                <a:latin typeface="Arial MT"/>
+                <a:cs typeface="Arial MT"/>
+              </a:rPr>
+              <a:t>GameMain</a:t>
+            </a:r>
+            <a:endParaRPr sz="2400">
+              <a:latin typeface="Arial MT"/>
+              <a:cs typeface="Arial MT"/>
+            </a:endParaRPr>
+          </a:p>
+        </p:txBody>
+      </p:sp>
+      <p:sp>
+        <p:nvSpPr>
+          <p:cNvPr id="4" name="object 4"/>
+          <p:cNvSpPr txBox="1"/>
+          <p:nvPr/>
+        </p:nvSpPr>
+        <p:spPr>
+          <a:xfrm>
+            <a:off x="1150416" y="1719833"/>
+            <a:ext cx="327660" cy="793750"/>
+          </a:xfrm>
+          <a:prstGeom prst="rect">
+            <a:avLst/>
+          </a:prstGeom>
+        </p:spPr>
+        <p:txBody>
+          <a:bodyPr vert="horz" wrap="square" lIns="0" tIns="31114" rIns="0" bIns="0" rtlCol="0">
+            <a:spAutoFit/>
+          </a:bodyPr>
+          <a:lstStyle/>
+          <a:p>
+            <a:pPr marL="12700">
+              <a:lnSpc>
+                <a:spcPct val="100000"/>
+              </a:lnSpc>
+              <a:spcBef>
+                <a:spcPts val="244"/>
+              </a:spcBef>
+            </a:pPr>
+            <a:r>
+              <a:rPr sz="2400" spc="-965" dirty="0">
+                <a:solidFill>
+                  <a:srgbClr val="FFFFFF"/>
+                </a:solidFill>
+                <a:latin typeface="Arial MT"/>
+                <a:cs typeface="Arial MT"/>
+              </a:rPr>
+              <a:t>│</a:t>
+            </a:r>
+            <a:endParaRPr sz="2400">
+              <a:latin typeface="Arial MT"/>
+              <a:cs typeface="Arial MT"/>
+            </a:endParaRPr>
+          </a:p>
+          <a:p>
+            <a:pPr marL="12700">
+              <a:lnSpc>
+                <a:spcPct val="100000"/>
+              </a:lnSpc>
+              <a:spcBef>
+                <a:spcPts val="140"/>
+              </a:spcBef>
+            </a:pPr>
+            <a:r>
+              <a:rPr sz="2400" spc="-50" dirty="0">
+                <a:solidFill>
+                  <a:srgbClr val="FFFFFF"/>
+                </a:solidFill>
+                <a:latin typeface="Arial MT"/>
+                <a:cs typeface="Arial MT"/>
+              </a:rPr>
+              <a:t>▼</a:t>
+            </a:r>
+            <a:endParaRPr sz="2400">
+              <a:latin typeface="Arial MT"/>
+              <a:cs typeface="Arial MT"/>
+            </a:endParaRPr>
+          </a:p>
+        </p:txBody>
+      </p:sp>
+      <p:sp>
+        <p:nvSpPr>
+          <p:cNvPr id="5" name="object 5"/>
+          <p:cNvSpPr txBox="1"/>
+          <p:nvPr/>
+        </p:nvSpPr>
+        <p:spPr>
+          <a:xfrm>
+            <a:off x="897432" y="2504389"/>
+            <a:ext cx="4629785" cy="1924050"/>
+          </a:xfrm>
+          <a:prstGeom prst="rect">
+            <a:avLst/>
+          </a:prstGeom>
+        </p:spPr>
+        <p:txBody>
+          <a:bodyPr vert="horz" wrap="square" lIns="0" tIns="12700" rIns="0" bIns="0" rtlCol="0">
+            <a:spAutoFit/>
+          </a:bodyPr>
+          <a:lstStyle/>
+          <a:p>
+            <a:pPr marL="12700">
+              <a:lnSpc>
+                <a:spcPct val="100000"/>
+              </a:lnSpc>
+              <a:spcBef>
+                <a:spcPts val="100"/>
+              </a:spcBef>
+            </a:pPr>
+            <a:r>
+              <a:rPr sz="2400" spc="-25" dirty="0">
+                <a:solidFill>
+                  <a:srgbClr val="FFFFFF"/>
+                </a:solidFill>
+                <a:latin typeface="Arial MT"/>
+                <a:cs typeface="Arial MT"/>
+              </a:rPr>
+              <a:t>BaseDrawManager</a:t>
+            </a:r>
+            <a:r>
+              <a:rPr sz="2400" spc="-25" dirty="0">
+                <a:solidFill>
+                  <a:srgbClr val="FFFFFF"/>
+                </a:solidFill>
+                <a:latin typeface="MS Gothic"/>
+                <a:cs typeface="MS Gothic"/>
+              </a:rPr>
+              <a:t>（</a:t>
+            </a:r>
+            <a:r>
+              <a:rPr sz="2400" spc="-10" dirty="0">
+                <a:solidFill>
+                  <a:srgbClr val="FFFFFF"/>
+                </a:solidFill>
+                <a:latin typeface="MS Gothic"/>
+                <a:cs typeface="MS Gothic"/>
+              </a:rPr>
+              <a:t>抽象層</a:t>
+            </a:r>
+            <a:r>
+              <a:rPr sz="2400" spc="-50" dirty="0">
+                <a:solidFill>
+                  <a:srgbClr val="FFFFFF"/>
+                </a:solidFill>
+                <a:latin typeface="MS Gothic"/>
+                <a:cs typeface="MS Gothic"/>
+              </a:rPr>
+              <a:t>）</a:t>
+            </a:r>
+            <a:endParaRPr sz="2400">
+              <a:latin typeface="MS Gothic"/>
+              <a:cs typeface="MS Gothic"/>
+            </a:endParaRPr>
+          </a:p>
+          <a:p>
+            <a:pPr marL="265430">
+              <a:lnSpc>
+                <a:spcPct val="100000"/>
+              </a:lnSpc>
+              <a:spcBef>
+                <a:spcPts val="135"/>
+              </a:spcBef>
+            </a:pPr>
+            <a:r>
+              <a:rPr sz="2400" spc="-965" dirty="0">
+                <a:solidFill>
+                  <a:srgbClr val="FFFFFF"/>
+                </a:solidFill>
+                <a:latin typeface="Arial MT"/>
+                <a:cs typeface="Arial MT"/>
+              </a:rPr>
+              <a:t>│</a:t>
+            </a:r>
+            <a:endParaRPr sz="2400">
+              <a:latin typeface="Arial MT"/>
+              <a:cs typeface="Arial MT"/>
+            </a:endParaRPr>
+          </a:p>
+          <a:p>
+            <a:pPr marL="265430">
+              <a:lnSpc>
+                <a:spcPct val="100000"/>
+              </a:lnSpc>
+              <a:spcBef>
+                <a:spcPts val="145"/>
+              </a:spcBef>
+            </a:pPr>
+            <a:r>
+              <a:rPr sz="2400" spc="-50" dirty="0">
+                <a:solidFill>
+                  <a:srgbClr val="FFFFFF"/>
+                </a:solidFill>
+                <a:latin typeface="Arial MT"/>
+                <a:cs typeface="Arial MT"/>
+              </a:rPr>
+              <a:t>▼</a:t>
+            </a:r>
+            <a:endParaRPr sz="2400">
+              <a:latin typeface="Arial MT"/>
+              <a:cs typeface="Arial MT"/>
+            </a:endParaRPr>
+          </a:p>
+          <a:p>
+            <a:pPr marL="12700">
+              <a:lnSpc>
+                <a:spcPct val="100000"/>
+              </a:lnSpc>
+              <a:spcBef>
+                <a:spcPts val="130"/>
+              </a:spcBef>
+            </a:pPr>
+            <a:r>
+              <a:rPr sz="2400" spc="-20" dirty="0">
+                <a:solidFill>
+                  <a:srgbClr val="FFFFFF"/>
+                </a:solidFill>
+                <a:latin typeface="Arial MT"/>
+                <a:cs typeface="Arial MT"/>
+              </a:rPr>
+              <a:t>DirectX_DrawManager</a:t>
+            </a:r>
+            <a:r>
+              <a:rPr sz="2400" spc="-20" dirty="0">
+                <a:solidFill>
+                  <a:srgbClr val="FFFFFF"/>
+                </a:solidFill>
+                <a:latin typeface="MS Gothic"/>
+                <a:cs typeface="MS Gothic"/>
+              </a:rPr>
+              <a:t>（</a:t>
+            </a:r>
+            <a:r>
+              <a:rPr sz="2400" spc="-10" dirty="0">
+                <a:solidFill>
+                  <a:srgbClr val="FFFFFF"/>
+                </a:solidFill>
+                <a:latin typeface="MS Gothic"/>
+                <a:cs typeface="MS Gothic"/>
+              </a:rPr>
+              <a:t>実装層</a:t>
+            </a:r>
+            <a:r>
+              <a:rPr sz="2400" spc="-50" dirty="0">
+                <a:solidFill>
+                  <a:srgbClr val="FFFFFF"/>
+                </a:solidFill>
+                <a:latin typeface="MS Gothic"/>
+                <a:cs typeface="MS Gothic"/>
+              </a:rPr>
+              <a:t>）</a:t>
+            </a:r>
+            <a:endParaRPr sz="2400">
+              <a:latin typeface="MS Gothic"/>
+              <a:cs typeface="MS Gothic"/>
+            </a:endParaRPr>
+          </a:p>
+          <a:p>
+            <a:pPr marL="265430">
+              <a:lnSpc>
+                <a:spcPct val="100000"/>
+              </a:lnSpc>
+              <a:spcBef>
+                <a:spcPts val="135"/>
+              </a:spcBef>
+            </a:pPr>
+            <a:r>
+              <a:rPr sz="2400" spc="-965" dirty="0">
+                <a:solidFill>
+                  <a:srgbClr val="FFFFFF"/>
+                </a:solidFill>
+                <a:latin typeface="Arial MT"/>
+                <a:cs typeface="Arial MT"/>
+              </a:rPr>
+              <a:t>│</a:t>
+            </a:r>
+            <a:endParaRPr sz="2400">
+              <a:latin typeface="Arial MT"/>
+              <a:cs typeface="Arial MT"/>
+            </a:endParaRPr>
+          </a:p>
+        </p:txBody>
+      </p:sp>
+      <p:sp>
+        <p:nvSpPr>
+          <p:cNvPr id="6" name="object 6"/>
+          <p:cNvSpPr txBox="1"/>
+          <p:nvPr/>
+        </p:nvSpPr>
+        <p:spPr>
+          <a:xfrm>
+            <a:off x="1150416" y="4420870"/>
+            <a:ext cx="7108190" cy="1923414"/>
+          </a:xfrm>
+          <a:prstGeom prst="rect">
+            <a:avLst/>
+          </a:prstGeom>
+        </p:spPr>
+        <p:txBody>
+          <a:bodyPr vert="horz" wrap="square" lIns="0" tIns="12700" rIns="0" bIns="0" rtlCol="0">
+            <a:spAutoFit/>
+          </a:bodyPr>
+          <a:lstStyle/>
+          <a:p>
+            <a:pPr marL="12700">
+              <a:lnSpc>
+                <a:spcPct val="100000"/>
+              </a:lnSpc>
+              <a:spcBef>
+                <a:spcPts val="100"/>
+              </a:spcBef>
+            </a:pPr>
+            <a:r>
+              <a:rPr sz="2400" spc="-515" dirty="0">
+                <a:solidFill>
+                  <a:srgbClr val="FFFFFF"/>
+                </a:solidFill>
+                <a:latin typeface="Arial MT"/>
+                <a:cs typeface="Arial MT"/>
+              </a:rPr>
+              <a:t>├── </a:t>
+            </a:r>
+            <a:r>
+              <a:rPr sz="2400" spc="-25" dirty="0">
+                <a:solidFill>
+                  <a:srgbClr val="FFFFFF"/>
+                </a:solidFill>
+                <a:latin typeface="Arial MT"/>
+                <a:cs typeface="Arial MT"/>
+              </a:rPr>
+              <a:t>ShaderManager(</a:t>
+            </a:r>
+            <a:r>
+              <a:rPr sz="2400" dirty="0">
+                <a:solidFill>
+                  <a:srgbClr val="FFFFFF"/>
+                </a:solidFill>
+                <a:latin typeface="MS Gothic"/>
+                <a:cs typeface="MS Gothic"/>
+              </a:rPr>
+              <a:t>リフレクション情報を取得</a:t>
+            </a:r>
+            <a:r>
+              <a:rPr sz="2400" spc="-50" dirty="0">
+                <a:solidFill>
+                  <a:srgbClr val="FFFFFF"/>
+                </a:solidFill>
+                <a:latin typeface="Arial MT"/>
+                <a:cs typeface="Arial MT"/>
+              </a:rPr>
+              <a:t>)</a:t>
+            </a:r>
+            <a:endParaRPr sz="2400">
+              <a:latin typeface="Arial MT"/>
+              <a:cs typeface="Arial MT"/>
+            </a:endParaRPr>
+          </a:p>
+          <a:p>
+            <a:pPr marL="12700">
+              <a:lnSpc>
+                <a:spcPct val="100000"/>
+              </a:lnSpc>
+              <a:spcBef>
+                <a:spcPts val="130"/>
+              </a:spcBef>
+            </a:pPr>
+            <a:r>
+              <a:rPr sz="2400" spc="-480" dirty="0">
+                <a:solidFill>
+                  <a:srgbClr val="FFFFFF"/>
+                </a:solidFill>
+                <a:latin typeface="Arial MT"/>
+                <a:cs typeface="Arial MT"/>
+              </a:rPr>
+              <a:t>├── </a:t>
+            </a:r>
+            <a:r>
+              <a:rPr sz="2400" spc="-20" dirty="0">
+                <a:solidFill>
+                  <a:srgbClr val="FFFFFF"/>
+                </a:solidFill>
+                <a:latin typeface="Arial MT"/>
+                <a:cs typeface="Arial MT"/>
+              </a:rPr>
+              <a:t>ConstantBufferManager(Shader</a:t>
+            </a:r>
+            <a:r>
+              <a:rPr sz="2400" dirty="0">
+                <a:solidFill>
+                  <a:srgbClr val="FFFFFF"/>
+                </a:solidFill>
+                <a:latin typeface="MS Gothic"/>
+                <a:cs typeface="MS Gothic"/>
+              </a:rPr>
+              <a:t>から名前検索</a:t>
+            </a:r>
+            <a:r>
+              <a:rPr sz="2400" spc="-50" dirty="0">
+                <a:solidFill>
+                  <a:srgbClr val="FFFFFF"/>
+                </a:solidFill>
+                <a:latin typeface="Arial MT"/>
+                <a:cs typeface="Arial MT"/>
+              </a:rPr>
+              <a:t>)</a:t>
+            </a:r>
+            <a:endParaRPr sz="2400">
+              <a:latin typeface="Arial MT"/>
+              <a:cs typeface="Arial MT"/>
+            </a:endParaRPr>
+          </a:p>
+          <a:p>
+            <a:pPr marL="12700">
+              <a:lnSpc>
+                <a:spcPct val="100000"/>
+              </a:lnSpc>
+              <a:spcBef>
+                <a:spcPts val="130"/>
+              </a:spcBef>
+            </a:pPr>
+            <a:r>
+              <a:rPr sz="2400" spc="-490" dirty="0">
+                <a:solidFill>
+                  <a:srgbClr val="FFFFFF"/>
+                </a:solidFill>
+                <a:latin typeface="Arial MT"/>
+                <a:cs typeface="Arial MT"/>
+              </a:rPr>
+              <a:t>├── </a:t>
+            </a:r>
+            <a:r>
+              <a:rPr sz="2400" spc="-20" dirty="0">
+                <a:solidFill>
+                  <a:srgbClr val="FFFFFF"/>
+                </a:solidFill>
+                <a:latin typeface="Arial MT"/>
+                <a:cs typeface="Arial MT"/>
+              </a:rPr>
+              <a:t>VertexBufferManager</a:t>
+            </a:r>
+            <a:r>
+              <a:rPr sz="2400" spc="-20" dirty="0">
+                <a:solidFill>
+                  <a:srgbClr val="FFFFFF"/>
+                </a:solidFill>
+                <a:latin typeface="MS Gothic"/>
+                <a:cs typeface="MS Gothic"/>
+              </a:rPr>
+              <a:t>（</a:t>
+            </a:r>
+            <a:r>
+              <a:rPr sz="2400" spc="-10" dirty="0">
+                <a:solidFill>
+                  <a:srgbClr val="FFFFFF"/>
+                </a:solidFill>
+                <a:latin typeface="MS Gothic"/>
+                <a:cs typeface="MS Gothic"/>
+              </a:rPr>
+              <a:t>頂点シェーダ名で検索</a:t>
+            </a:r>
+            <a:r>
+              <a:rPr sz="2400" spc="-50" dirty="0">
+                <a:solidFill>
+                  <a:srgbClr val="FFFFFF"/>
+                </a:solidFill>
+                <a:latin typeface="Arial MT"/>
+                <a:cs typeface="Arial MT"/>
+              </a:rPr>
+              <a:t>)</a:t>
+            </a:r>
+            <a:endParaRPr sz="2400">
+              <a:latin typeface="Arial MT"/>
+              <a:cs typeface="Arial MT"/>
+            </a:endParaRPr>
+          </a:p>
+          <a:p>
+            <a:pPr marL="12700">
+              <a:lnSpc>
+                <a:spcPct val="100000"/>
+              </a:lnSpc>
+              <a:spcBef>
+                <a:spcPts val="150"/>
+              </a:spcBef>
+            </a:pPr>
+            <a:r>
+              <a:rPr sz="2400" spc="-535" dirty="0">
+                <a:solidFill>
+                  <a:srgbClr val="FFFFFF"/>
+                </a:solidFill>
+                <a:latin typeface="Arial MT"/>
+                <a:cs typeface="Arial MT"/>
+              </a:rPr>
+              <a:t>└── </a:t>
+            </a:r>
+            <a:r>
+              <a:rPr sz="2400" spc="-20" dirty="0">
+                <a:solidFill>
+                  <a:srgbClr val="FFFFFF"/>
+                </a:solidFill>
+                <a:latin typeface="Arial MT"/>
+                <a:cs typeface="Arial MT"/>
+              </a:rPr>
+              <a:t>ViewManager</a:t>
+            </a:r>
+            <a:r>
+              <a:rPr sz="2400" spc="-20" dirty="0">
+                <a:solidFill>
+                  <a:srgbClr val="FFFFFF"/>
+                </a:solidFill>
+                <a:latin typeface="MS Gothic"/>
+                <a:cs typeface="MS Gothic"/>
+              </a:rPr>
+              <a:t>（</a:t>
+            </a:r>
+            <a:r>
+              <a:rPr sz="2400" dirty="0">
+                <a:solidFill>
+                  <a:srgbClr val="FFFFFF"/>
+                </a:solidFill>
+                <a:latin typeface="MS Gothic"/>
+                <a:cs typeface="MS Gothic"/>
+              </a:rPr>
+              <a:t>テクスチャ名から取得</a:t>
+            </a:r>
+            <a:r>
+              <a:rPr sz="2400" spc="-50" dirty="0">
+                <a:solidFill>
+                  <a:srgbClr val="FFFFFF"/>
+                </a:solidFill>
+                <a:latin typeface="MS Gothic"/>
+                <a:cs typeface="MS Gothic"/>
+              </a:rPr>
+              <a:t>）</a:t>
+            </a:r>
+            <a:endParaRPr sz="2400">
+              <a:latin typeface="MS Gothic"/>
+              <a:cs typeface="MS Gothic"/>
+            </a:endParaRPr>
+          </a:p>
+          <a:p>
+            <a:pPr marL="12700">
+              <a:lnSpc>
+                <a:spcPct val="100000"/>
+              </a:lnSpc>
+              <a:spcBef>
+                <a:spcPts val="130"/>
+              </a:spcBef>
+            </a:pPr>
+            <a:r>
+              <a:rPr sz="2400" spc="-720" dirty="0">
+                <a:solidFill>
+                  <a:srgbClr val="FFFFFF"/>
+                </a:solidFill>
+                <a:latin typeface="Arial MT"/>
+                <a:cs typeface="Arial MT"/>
+              </a:rPr>
+              <a:t>└──</a:t>
+            </a:r>
+            <a:r>
+              <a:rPr sz="2400" spc="-20" dirty="0">
+                <a:solidFill>
+                  <a:srgbClr val="FFFFFF"/>
+                </a:solidFill>
+                <a:latin typeface="Arial MT"/>
+                <a:cs typeface="Arial MT"/>
+              </a:rPr>
+              <a:t> </a:t>
+            </a:r>
+            <a:r>
+              <a:rPr sz="2400" spc="-10" dirty="0">
+                <a:solidFill>
+                  <a:srgbClr val="FFFFFF"/>
+                </a:solidFill>
+                <a:latin typeface="Arial MT"/>
+                <a:cs typeface="Arial MT"/>
+              </a:rPr>
+              <a:t>TextureManager</a:t>
+            </a:r>
+            <a:endParaRPr sz="2400">
+              <a:latin typeface="Arial MT"/>
+              <a:cs typeface="Arial MT"/>
+            </a:endParaRPr>
+          </a:p>
+        </p:txBody>
+      </p:sp>
+      <p:sp>
+        <p:nvSpPr>
+          <p:cNvPr id="7" name="object 7"/>
+          <p:cNvSpPr txBox="1"/>
+          <p:nvPr/>
+        </p:nvSpPr>
+        <p:spPr>
+          <a:xfrm>
+            <a:off x="4615560" y="886764"/>
+            <a:ext cx="7576820" cy="647065"/>
+          </a:xfrm>
+          <a:prstGeom prst="rect">
+            <a:avLst/>
+          </a:prstGeom>
+          <a:ln w="9525">
+            <a:solidFill>
+              <a:srgbClr val="FFFFFF"/>
+            </a:solidFill>
+          </a:ln>
+        </p:spPr>
+        <p:txBody>
+          <a:bodyPr vert="horz" wrap="square" lIns="0" tIns="41275" rIns="0" bIns="0" rtlCol="0">
+            <a:spAutoFit/>
+          </a:bodyPr>
+          <a:lstStyle/>
+          <a:p>
+            <a:pPr marL="92075">
+              <a:lnSpc>
+                <a:spcPct val="100000"/>
+              </a:lnSpc>
+              <a:spcBef>
+                <a:spcPts val="325"/>
+              </a:spcBef>
+            </a:pPr>
+            <a:r>
+              <a:rPr sz="1800" dirty="0">
+                <a:solidFill>
+                  <a:srgbClr val="FFFFFF"/>
+                </a:solidFill>
+                <a:latin typeface="Arial MT"/>
+                <a:cs typeface="Arial MT"/>
+              </a:rPr>
+              <a:t>GameMain</a:t>
+            </a:r>
+            <a:r>
+              <a:rPr sz="1800" spc="-35" dirty="0">
+                <a:solidFill>
+                  <a:srgbClr val="FFFFFF"/>
+                </a:solidFill>
+                <a:latin typeface="Arial MT"/>
+                <a:cs typeface="Arial MT"/>
+              </a:rPr>
+              <a:t> </a:t>
+            </a:r>
+            <a:r>
+              <a:rPr sz="1800" spc="-135" dirty="0">
+                <a:solidFill>
+                  <a:srgbClr val="FFFFFF"/>
+                </a:solidFill>
+                <a:latin typeface="MS Gothic"/>
+                <a:cs typeface="MS Gothic"/>
+              </a:rPr>
+              <a:t>から </a:t>
+            </a:r>
+            <a:r>
+              <a:rPr sz="1800" dirty="0">
+                <a:solidFill>
+                  <a:srgbClr val="FFFFFF"/>
+                </a:solidFill>
+                <a:latin typeface="Arial MT"/>
+                <a:cs typeface="Arial MT"/>
+              </a:rPr>
+              <a:t>API</a:t>
+            </a:r>
+            <a:r>
+              <a:rPr sz="1800" spc="-20" dirty="0">
+                <a:solidFill>
+                  <a:srgbClr val="FFFFFF"/>
+                </a:solidFill>
+                <a:latin typeface="Arial MT"/>
+                <a:cs typeface="Arial MT"/>
+              </a:rPr>
+              <a:t> </a:t>
+            </a:r>
+            <a:r>
+              <a:rPr sz="1800" spc="-5" dirty="0">
+                <a:solidFill>
+                  <a:srgbClr val="FFFFFF"/>
+                </a:solidFill>
+                <a:latin typeface="MS Gothic"/>
+                <a:cs typeface="MS Gothic"/>
+              </a:rPr>
+              <a:t>非依存の描画命令を送信</a:t>
+            </a:r>
+            <a:endParaRPr sz="1800">
+              <a:latin typeface="MS Gothic"/>
+              <a:cs typeface="MS Gothic"/>
+            </a:endParaRPr>
+          </a:p>
+          <a:p>
+            <a:pPr marL="92075">
+              <a:lnSpc>
+                <a:spcPct val="100000"/>
+              </a:lnSpc>
+            </a:pPr>
+            <a:r>
+              <a:rPr sz="1800" spc="-10" dirty="0">
+                <a:solidFill>
+                  <a:srgbClr val="FFFFFF"/>
+                </a:solidFill>
+                <a:latin typeface="MS Gothic"/>
+                <a:cs typeface="MS Gothic"/>
+              </a:rPr>
+              <a:t>❦の流れを共通化し、</a:t>
+            </a:r>
+            <a:r>
+              <a:rPr sz="1800" spc="-10" dirty="0">
+                <a:solidFill>
+                  <a:srgbClr val="FFFFFF"/>
+                </a:solidFill>
+                <a:latin typeface="Arial MT"/>
+                <a:cs typeface="Arial MT"/>
+              </a:rPr>
+              <a:t>API</a:t>
+            </a:r>
+            <a:r>
+              <a:rPr sz="1800" spc="-15" dirty="0">
+                <a:solidFill>
+                  <a:srgbClr val="FFFFFF"/>
+                </a:solidFill>
+                <a:latin typeface="MS Gothic"/>
+                <a:cs typeface="MS Gothic"/>
+              </a:rPr>
+              <a:t>差し替えを容易にできるように設計しました</a:t>
+            </a:r>
+            <a:endParaRPr sz="1800">
+              <a:latin typeface="MS Gothic"/>
+              <a:cs typeface="MS Gothic"/>
+            </a:endParaRPr>
+          </a:p>
+        </p:txBody>
+      </p:sp>
+      <p:sp>
+        <p:nvSpPr>
+          <p:cNvPr id="8" name="object 8"/>
+          <p:cNvSpPr txBox="1"/>
+          <p:nvPr/>
+        </p:nvSpPr>
+        <p:spPr>
+          <a:xfrm>
+            <a:off x="6255511" y="2967240"/>
+            <a:ext cx="5614670" cy="923925"/>
+          </a:xfrm>
+          <a:prstGeom prst="rect">
+            <a:avLst/>
+          </a:prstGeom>
+          <a:ln w="9525">
+            <a:solidFill>
+              <a:srgbClr val="FFFFFF"/>
+            </a:solidFill>
+          </a:ln>
+        </p:spPr>
+        <p:txBody>
+          <a:bodyPr vert="horz" wrap="square" lIns="0" tIns="41910" rIns="0" bIns="0" rtlCol="0">
+            <a:spAutoFit/>
+          </a:bodyPr>
+          <a:lstStyle/>
+          <a:p>
+            <a:pPr marL="92075" marR="256540">
+              <a:lnSpc>
+                <a:spcPct val="100000"/>
+              </a:lnSpc>
+              <a:spcBef>
+                <a:spcPts val="330"/>
+              </a:spcBef>
+            </a:pPr>
+            <a:r>
+              <a:rPr sz="1800" spc="-5" dirty="0">
+                <a:solidFill>
+                  <a:srgbClr val="FFFFFF"/>
+                </a:solidFill>
+                <a:latin typeface="MS Gothic"/>
+                <a:cs typeface="MS Gothic"/>
+              </a:rPr>
+              <a:t>現在は、描画に必要な名前を引数で渡しているが、</a:t>
+            </a:r>
+            <a:r>
+              <a:rPr sz="1800" dirty="0">
+                <a:solidFill>
+                  <a:srgbClr val="FFFFFF"/>
+                </a:solidFill>
+                <a:latin typeface="MS Gothic"/>
+                <a:cs typeface="MS Gothic"/>
+              </a:rPr>
+              <a:t>将来的には、描画</a:t>
+            </a:r>
+            <a:r>
+              <a:rPr sz="1800" spc="-10" dirty="0">
+                <a:solidFill>
+                  <a:srgbClr val="FFFFFF"/>
+                </a:solidFill>
+                <a:latin typeface="Arial MT"/>
+                <a:cs typeface="Arial MT"/>
+              </a:rPr>
+              <a:t>ID</a:t>
+            </a:r>
+            <a:r>
+              <a:rPr sz="1800" spc="-5" dirty="0">
+                <a:solidFill>
+                  <a:srgbClr val="FFFFFF"/>
+                </a:solidFill>
+                <a:latin typeface="MS Gothic"/>
+                <a:cs typeface="MS Gothic"/>
+              </a:rPr>
+              <a:t>で描画してオブジェクトが</a:t>
+            </a:r>
+            <a:endParaRPr sz="1800">
+              <a:latin typeface="MS Gothic"/>
+              <a:cs typeface="MS Gothic"/>
+            </a:endParaRPr>
+          </a:p>
+          <a:p>
+            <a:pPr marL="92075">
+              <a:lnSpc>
+                <a:spcPct val="100000"/>
+              </a:lnSpc>
+            </a:pPr>
+            <a:r>
+              <a:rPr sz="1800" spc="-5" dirty="0">
+                <a:solidFill>
+                  <a:srgbClr val="FFFFFF"/>
+                </a:solidFill>
+                <a:latin typeface="MS Gothic"/>
+                <a:cs typeface="MS Gothic"/>
+              </a:rPr>
+              <a:t>知らないようにしたいと思っています。</a:t>
+            </a:r>
+            <a:endParaRPr sz="1800">
+              <a:latin typeface="MS Gothic"/>
+              <a:cs typeface="MS Gothic"/>
+            </a:endParaRPr>
+          </a:p>
+        </p:txBody>
+      </p:sp>
+      <p:sp>
+        <p:nvSpPr>
+          <p:cNvPr id="9" name="object 9"/>
+          <p:cNvSpPr txBox="1"/>
+          <p:nvPr/>
+        </p:nvSpPr>
+        <p:spPr>
+          <a:xfrm>
+            <a:off x="1553083" y="1806917"/>
+            <a:ext cx="3062605" cy="650875"/>
+          </a:xfrm>
+          <a:prstGeom prst="rect">
+            <a:avLst/>
+          </a:prstGeom>
+          <a:ln w="9525">
+            <a:solidFill>
+              <a:srgbClr val="FFFFFF"/>
+            </a:solidFill>
+          </a:ln>
+        </p:spPr>
+        <p:txBody>
+          <a:bodyPr vert="horz" wrap="square" lIns="0" tIns="118745" rIns="0" bIns="0" rtlCol="0">
+            <a:spAutoFit/>
+          </a:bodyPr>
+          <a:lstStyle/>
+          <a:p>
+            <a:pPr marL="91440" marR="219710">
+              <a:lnSpc>
+                <a:spcPts val="2060"/>
+              </a:lnSpc>
+              <a:spcBef>
+                <a:spcPts val="935"/>
+              </a:spcBef>
+            </a:pPr>
+            <a:r>
+              <a:rPr sz="1800" spc="-5" dirty="0">
+                <a:solidFill>
+                  <a:srgbClr val="FFFFFF"/>
+                </a:solidFill>
+                <a:latin typeface="MS Gothic"/>
+                <a:cs typeface="MS Gothic"/>
+              </a:rPr>
+              <a:t>シェーダー名、テクスチャ</a:t>
+            </a:r>
+            <a:r>
+              <a:rPr sz="1800" spc="-10" dirty="0">
+                <a:solidFill>
+                  <a:srgbClr val="FFFFFF"/>
+                </a:solidFill>
+                <a:latin typeface="MS Gothic"/>
+                <a:cs typeface="MS Gothic"/>
+              </a:rPr>
+              <a:t>名、モデル名を渡す</a:t>
+            </a:r>
+            <a:endParaRPr sz="1800">
+              <a:latin typeface="MS Gothic"/>
+              <a:cs typeface="MS Gothic"/>
+            </a:endParaRPr>
+          </a:p>
+        </p:txBody>
+      </p:sp>
+    </p:spTree>
+  </p:cSld>
+  <p:clrMapOvr>
+    <a:masterClrMapping/>
+  </p:clrMapOvr>
+</p:sld>
+</file>
+
+<file path=ppt/slides/slide8.xml><?xml version="1.0" encoding="utf-8"?>
+<p:sld xmlns:a="http://schemas.openxmlformats.org/drawingml/2006/main" xmlns:r="http://schemas.openxmlformats.org/officeDocument/2006/relationships" xmlns:p="http://schemas.openxmlformats.org/presentationml/2006/main">
+  <p:cSld>
+    <p:spTree>
+      <p:nvGrpSpPr>
+        <p:cNvPr id="1" name=""/>
+        <p:cNvGrpSpPr/>
+        <p:nvPr/>
+      </p:nvGrpSpPr>
+      <p:grpSpPr>
+        <a:xfrm>
+          <a:off x="0" y="0"/>
+          <a:ext cx="0" cy="0"/>
+          <a:chOff x="0" y="0"/>
+          <a:chExt cx="0" cy="0"/>
+        </a:xfrm>
+      </p:grpSpPr>
+      <p:sp>
+        <p:nvSpPr>
+          <p:cNvPr id="2" name="object 2"/>
+          <p:cNvSpPr txBox="1">
+            <a:spLocks noGrp="1"/>
+          </p:cNvSpPr>
+          <p:nvPr>
+            <p:ph type="title"/>
+          </p:nvPr>
+        </p:nvSpPr>
+        <p:spPr>
+          <a:prstGeom prst="rect">
+            <a:avLst/>
+          </a:prstGeom>
+        </p:spPr>
+        <p:txBody>
+          <a:bodyPr vert="horz" wrap="square" lIns="0" tIns="13335" rIns="0" bIns="0" rtlCol="0">
+            <a:spAutoFit/>
+          </a:bodyPr>
+          <a:lstStyle/>
+          <a:p>
+            <a:pPr marL="12700">
+              <a:lnSpc>
+                <a:spcPct val="100000"/>
+              </a:lnSpc>
+              <a:spcBef>
+                <a:spcPts val="105"/>
+              </a:spcBef>
+            </a:pPr>
+            <a:r>
+              <a:rPr spc="-25" dirty="0"/>
+              <a:t>シェーダーのリフレクション</a:t>
+            </a:r>
+          </a:p>
+        </p:txBody>
+      </p:sp>
+      <p:sp>
+        <p:nvSpPr>
+          <p:cNvPr id="3" name="object 3"/>
+          <p:cNvSpPr txBox="1"/>
+          <p:nvPr/>
+        </p:nvSpPr>
+        <p:spPr>
+          <a:xfrm>
+            <a:off x="595985" y="1509724"/>
+            <a:ext cx="11420475" cy="2627630"/>
+          </a:xfrm>
+          <a:prstGeom prst="rect">
+            <a:avLst/>
+          </a:prstGeom>
+        </p:spPr>
+        <p:txBody>
+          <a:bodyPr vert="horz" wrap="square" lIns="0" tIns="12065" rIns="0" bIns="0" rtlCol="0">
+            <a:spAutoFit/>
+          </a:bodyPr>
+          <a:lstStyle/>
+          <a:p>
+            <a:pPr marL="12700">
+              <a:lnSpc>
+                <a:spcPct val="100000"/>
+              </a:lnSpc>
+              <a:spcBef>
+                <a:spcPts val="95"/>
+              </a:spcBef>
+            </a:pPr>
+            <a:r>
+              <a:rPr sz="2800" spc="-40" dirty="0">
+                <a:solidFill>
+                  <a:srgbClr val="FFFFFF"/>
+                </a:solidFill>
+                <a:latin typeface="MS Gothic"/>
+                <a:cs typeface="MS Gothic"/>
+              </a:rPr>
+              <a:t>シェーダーリフレクションによる自動バインド設計</a:t>
+            </a:r>
+            <a:endParaRPr sz="2800" dirty="0">
+              <a:latin typeface="MS Gothic"/>
+              <a:cs typeface="MS Gothic"/>
+            </a:endParaRPr>
+          </a:p>
+          <a:p>
+            <a:pPr>
+              <a:lnSpc>
+                <a:spcPct val="100000"/>
+              </a:lnSpc>
+              <a:spcBef>
+                <a:spcPts val="1110"/>
+              </a:spcBef>
+            </a:pPr>
+            <a:endParaRPr sz="2800" dirty="0">
+              <a:latin typeface="MS Gothic"/>
+              <a:cs typeface="MS Gothic"/>
+            </a:endParaRPr>
+          </a:p>
+          <a:p>
+            <a:pPr marL="12700">
+              <a:lnSpc>
+                <a:spcPts val="3190"/>
+              </a:lnSpc>
+            </a:pPr>
+            <a:r>
+              <a:rPr sz="2800" spc="-40" dirty="0">
+                <a:solidFill>
+                  <a:srgbClr val="FFFFFF"/>
+                </a:solidFill>
+                <a:latin typeface="MS Gothic"/>
+                <a:cs typeface="MS Gothic"/>
+              </a:rPr>
+              <a:t>シェーダーファイルをリフレクション解析して、</a:t>
+            </a:r>
+            <a:endParaRPr sz="2800" dirty="0">
+              <a:latin typeface="MS Gothic"/>
+              <a:cs typeface="MS Gothic"/>
+            </a:endParaRPr>
+          </a:p>
+          <a:p>
+            <a:pPr marL="12700" marR="1091565">
+              <a:lnSpc>
+                <a:spcPts val="3030"/>
+              </a:lnSpc>
+              <a:spcBef>
+                <a:spcPts val="204"/>
+              </a:spcBef>
+            </a:pPr>
+            <a:r>
+              <a:rPr sz="2800" spc="-40" dirty="0" err="1">
+                <a:solidFill>
+                  <a:srgbClr val="FFFFFF"/>
+                </a:solidFill>
+                <a:latin typeface="MS Gothic"/>
+                <a:cs typeface="MS Gothic"/>
+              </a:rPr>
+              <a:t>各シェーダーが使用する定数バッファ名・スロット番号を自動で取得しています</a:t>
+            </a:r>
+            <a:r>
+              <a:rPr sz="2800" spc="-40" dirty="0">
+                <a:solidFill>
+                  <a:srgbClr val="FFFFFF"/>
+                </a:solidFill>
+                <a:latin typeface="MS Gothic"/>
+                <a:cs typeface="MS Gothic"/>
+              </a:rPr>
+              <a:t>。</a:t>
+            </a:r>
+            <a:r>
+              <a:rPr lang="ja-JP" altLang="en-US" sz="2800" spc="-40" dirty="0">
+                <a:solidFill>
+                  <a:srgbClr val="FFFFFF"/>
+                </a:solidFill>
+                <a:latin typeface="MS Gothic"/>
+                <a:cs typeface="MS Gothic"/>
+              </a:rPr>
+              <a:t>こ</a:t>
+            </a:r>
+            <a:r>
+              <a:rPr sz="2800" spc="-40" dirty="0" err="1">
+                <a:solidFill>
+                  <a:srgbClr val="FFFFFF"/>
+                </a:solidFill>
+                <a:latin typeface="MS Gothic"/>
+                <a:cs typeface="MS Gothic"/>
+              </a:rPr>
+              <a:t>れにより、描画時に手動でスロットを</a:t>
+            </a:r>
+            <a:endParaRPr sz="2800" dirty="0">
+              <a:latin typeface="MS Gothic"/>
+              <a:cs typeface="MS Gothic"/>
+            </a:endParaRPr>
+          </a:p>
+          <a:p>
+            <a:pPr marL="12700">
+              <a:lnSpc>
+                <a:spcPts val="2975"/>
+              </a:lnSpc>
+            </a:pPr>
+            <a:r>
+              <a:rPr sz="2800" spc="-40" dirty="0">
+                <a:solidFill>
+                  <a:srgbClr val="FFFFFF"/>
+                </a:solidFill>
+                <a:latin typeface="MS Gothic"/>
+                <a:cs typeface="MS Gothic"/>
+              </a:rPr>
+              <a:t>設定する手間を省き、定数バッファの自動バインドを実現しています。</a:t>
+            </a:r>
+            <a:endParaRPr sz="2800" dirty="0">
+              <a:latin typeface="MS Gothic"/>
+              <a:cs typeface="MS Gothic"/>
+            </a:endParaRPr>
+          </a:p>
+        </p:txBody>
+      </p:sp>
+      <p:pic>
+        <p:nvPicPr>
+          <p:cNvPr id="4" name="object 4"/>
+          <p:cNvPicPr/>
+          <p:nvPr/>
+        </p:nvPicPr>
+        <p:blipFill>
+          <a:blip r:embed="rId2" cstate="print"/>
+          <a:stretch>
+            <a:fillRect/>
+          </a:stretch>
+        </p:blipFill>
+        <p:spPr>
+          <a:xfrm>
+            <a:off x="4133850" y="4286248"/>
+            <a:ext cx="8058150" cy="2571749"/>
+          </a:xfrm>
+          <a:prstGeom prst="rect">
+            <a:avLst/>
+          </a:prstGeom>
+        </p:spPr>
+      </p:pic>
+    </p:spTree>
+  </p:cSld>
+  <p:clrMapOvr>
+    <a:masterClrMapping/>
+  </p:clrMapOvr>
+</p:sld>
+</file>
+
+<file path=ppt/slides/slide9.xml><?xml version="1.0" encoding="utf-8"?>
+<p:sld xmlns:a="http://schemas.openxmlformats.org/drawingml/2006/main" xmlns:r="http://schemas.openxmlformats.org/officeDocument/2006/relationships" xmlns:p="http://schemas.openxmlformats.org/presentationml/2006/main">
+  <p:cSld>
+    <p:spTree>
+      <p:nvGrpSpPr>
+        <p:cNvPr id="1" name="">
+          <a:extLst>
+            <a:ext uri="{FF2B5EF4-FFF2-40B4-BE49-F238E27FC236}">
+              <a16:creationId xmlns:a16="http://schemas.microsoft.com/office/drawing/2014/main" id="{A31E9078-C6B6-73FD-F90E-D2386614B1C7}"/>
+            </a:ext>
+          </a:extLst>
+        </p:cNvPr>
+        <p:cNvGrpSpPr/>
+        <p:nvPr/>
+      </p:nvGrpSpPr>
+      <p:grpSpPr>
+        <a:xfrm>
+          <a:off x="0" y="0"/>
+          <a:ext cx="0" cy="0"/>
+          <a:chOff x="0" y="0"/>
+          <a:chExt cx="0" cy="0"/>
+        </a:xfrm>
+      </p:grpSpPr>
+      <p:sp>
+        <p:nvSpPr>
+          <p:cNvPr id="2" name="object 2">
+            <a:extLst>
+              <a:ext uri="{FF2B5EF4-FFF2-40B4-BE49-F238E27FC236}">
+                <a16:creationId xmlns:a16="http://schemas.microsoft.com/office/drawing/2014/main" id="{3B491F53-2077-DD43-6445-047B82C38A1F}"/>
+              </a:ext>
+            </a:extLst>
+          </p:cNvPr>
+          <p:cNvSpPr txBox="1">
+            <a:spLocks noGrp="1"/>
+          </p:cNvSpPr>
+          <p:nvPr>
+            <p:ph type="title"/>
+          </p:nvPr>
+        </p:nvSpPr>
+        <p:spPr>
+          <a:xfrm>
+            <a:off x="457200" y="381000"/>
+            <a:ext cx="7287259" cy="697230"/>
+          </a:xfrm>
+          <a:prstGeom prst="rect">
+            <a:avLst/>
+          </a:prstGeom>
+        </p:spPr>
+        <p:txBody>
+          <a:bodyPr vert="horz" wrap="square" lIns="0" tIns="13335" rIns="0" bIns="0" rtlCol="0">
+            <a:spAutoFit/>
+          </a:bodyPr>
+          <a:lstStyle/>
+          <a:p>
+            <a:pPr marL="12700">
+              <a:lnSpc>
+                <a:spcPct val="100000"/>
+              </a:lnSpc>
+              <a:spcBef>
+                <a:spcPts val="105"/>
+              </a:spcBef>
+            </a:pPr>
+            <a:r>
+              <a:rPr lang="ja-JP" altLang="en-US" spc="-25" dirty="0"/>
+              <a:t>当たり判定 </a:t>
+            </a:r>
+            <a:r>
+              <a:rPr lang="en-US" altLang="ja-JP" spc="-25" dirty="0" err="1"/>
+              <a:t>AABBTree</a:t>
+            </a:r>
+            <a:endParaRPr spc="-25" dirty="0"/>
+          </a:p>
+        </p:txBody>
+      </p:sp>
+      <p:sp>
+        <p:nvSpPr>
+          <p:cNvPr id="3" name="object 3">
+            <a:extLst>
+              <a:ext uri="{FF2B5EF4-FFF2-40B4-BE49-F238E27FC236}">
+                <a16:creationId xmlns:a16="http://schemas.microsoft.com/office/drawing/2014/main" id="{ECEC2C75-85EC-B2A5-3DBC-9BB607FB4E78}"/>
+              </a:ext>
+            </a:extLst>
+          </p:cNvPr>
+          <p:cNvSpPr txBox="1"/>
+          <p:nvPr/>
+        </p:nvSpPr>
+        <p:spPr>
+          <a:xfrm>
+            <a:off x="595985" y="1509724"/>
+            <a:ext cx="11420475" cy="4854534"/>
+          </a:xfrm>
+          <a:prstGeom prst="rect">
+            <a:avLst/>
+          </a:prstGeom>
+        </p:spPr>
+        <p:txBody>
+          <a:bodyPr vert="horz" wrap="square" lIns="0" tIns="12065" rIns="0" bIns="0" rtlCol="0">
+            <a:spAutoFit/>
+          </a:bodyPr>
+          <a:lstStyle/>
+          <a:p>
+            <a:pPr marL="12700">
+              <a:lnSpc>
+                <a:spcPct val="100000"/>
+              </a:lnSpc>
+              <a:spcBef>
+                <a:spcPts val="95"/>
+              </a:spcBef>
+            </a:pPr>
+            <a:r>
+              <a:rPr lang="ja-JP" altLang="en-US" sz="2800" dirty="0">
+                <a:solidFill>
+                  <a:schemeClr val="bg1"/>
+                </a:solidFill>
+                <a:latin typeface="MS Gothic"/>
+                <a:cs typeface="MS Gothic"/>
+              </a:rPr>
+              <a:t>当たり判定を高速化するために、</a:t>
+            </a:r>
+            <a:r>
+              <a:rPr lang="en-US" altLang="ja-JP" sz="2800" dirty="0" err="1">
+                <a:solidFill>
+                  <a:schemeClr val="bg1"/>
+                </a:solidFill>
+                <a:latin typeface="MS Gothic"/>
+                <a:cs typeface="MS Gothic"/>
+              </a:rPr>
+              <a:t>AABBTree</a:t>
+            </a:r>
+            <a:r>
+              <a:rPr lang="ja-JP" altLang="en-US" sz="2800" dirty="0">
+                <a:solidFill>
+                  <a:schemeClr val="bg1"/>
+                </a:solidFill>
+                <a:latin typeface="MS Gothic"/>
+                <a:cs typeface="MS Gothic"/>
+              </a:rPr>
+              <a:t>を使用しました。</a:t>
+            </a:r>
+            <a:endParaRPr lang="en-US" altLang="ja-JP" sz="2800" dirty="0">
+              <a:solidFill>
+                <a:schemeClr val="bg1"/>
+              </a:solidFill>
+              <a:latin typeface="MS Gothic"/>
+              <a:cs typeface="MS Gothic"/>
+            </a:endParaRPr>
+          </a:p>
+          <a:p>
+            <a:pPr marL="12700">
+              <a:lnSpc>
+                <a:spcPct val="100000"/>
+              </a:lnSpc>
+              <a:spcBef>
+                <a:spcPts val="95"/>
+              </a:spcBef>
+            </a:pPr>
+            <a:endParaRPr lang="en-US" altLang="ja-JP" sz="2800" dirty="0">
+              <a:solidFill>
+                <a:schemeClr val="bg1"/>
+              </a:solidFill>
+              <a:latin typeface="MS Gothic"/>
+              <a:cs typeface="MS Gothic"/>
+            </a:endParaRPr>
+          </a:p>
+          <a:p>
+            <a:pPr marL="12700">
+              <a:lnSpc>
+                <a:spcPct val="100000"/>
+              </a:lnSpc>
+              <a:spcBef>
+                <a:spcPts val="95"/>
+              </a:spcBef>
+            </a:pPr>
+            <a:r>
+              <a:rPr lang="en-US" altLang="ja-JP" sz="2800" dirty="0">
+                <a:solidFill>
+                  <a:schemeClr val="bg1"/>
+                </a:solidFill>
+                <a:latin typeface="MS Gothic"/>
+                <a:cs typeface="MS Gothic"/>
+              </a:rPr>
+              <a:t>Grid</a:t>
+            </a:r>
+            <a:r>
+              <a:rPr lang="ja-JP" altLang="en-US" sz="2800" dirty="0">
+                <a:solidFill>
+                  <a:schemeClr val="bg1"/>
+                </a:solidFill>
+                <a:latin typeface="MS Gothic"/>
+                <a:cs typeface="MS Gothic"/>
+              </a:rPr>
+              <a:t>ではなく</a:t>
+            </a:r>
+            <a:r>
+              <a:rPr lang="en-US" altLang="ja-JP" sz="2800" dirty="0" err="1">
+                <a:solidFill>
+                  <a:schemeClr val="bg1"/>
+                </a:solidFill>
+                <a:latin typeface="MS Gothic"/>
+                <a:cs typeface="MS Gothic"/>
+              </a:rPr>
+              <a:t>AABBTree</a:t>
+            </a:r>
+            <a:r>
+              <a:rPr lang="ja-JP" altLang="en-US" sz="2800" dirty="0">
+                <a:solidFill>
+                  <a:schemeClr val="bg1"/>
+                </a:solidFill>
+                <a:latin typeface="MS Gothic"/>
+                <a:cs typeface="MS Gothic"/>
+              </a:rPr>
+              <a:t>を使用した理由は、</a:t>
+            </a:r>
+            <a:endParaRPr lang="en-US" altLang="ja-JP" sz="2800" dirty="0">
+              <a:solidFill>
+                <a:schemeClr val="bg1"/>
+              </a:solidFill>
+              <a:latin typeface="MS Gothic"/>
+              <a:cs typeface="MS Gothic"/>
+            </a:endParaRPr>
+          </a:p>
+          <a:p>
+            <a:pPr marL="12700">
+              <a:lnSpc>
+                <a:spcPct val="100000"/>
+              </a:lnSpc>
+              <a:spcBef>
+                <a:spcPts val="95"/>
+              </a:spcBef>
+            </a:pPr>
+            <a:r>
+              <a:rPr lang="ja-JP" altLang="en-US" sz="2800" dirty="0">
+                <a:solidFill>
+                  <a:schemeClr val="bg1"/>
+                </a:solidFill>
+                <a:latin typeface="MS Gothic"/>
+                <a:cs typeface="MS Gothic"/>
+              </a:rPr>
+              <a:t>３つあります。</a:t>
+            </a:r>
+            <a:br>
+              <a:rPr lang="en-US" altLang="ja-JP" sz="2800" dirty="0">
+                <a:solidFill>
+                  <a:schemeClr val="bg1"/>
+                </a:solidFill>
+                <a:latin typeface="MS Gothic"/>
+                <a:cs typeface="MS Gothic"/>
+              </a:rPr>
+            </a:br>
+            <a:endParaRPr lang="en-US" altLang="ja-JP" sz="2800" dirty="0">
+              <a:solidFill>
+                <a:schemeClr val="bg1"/>
+              </a:solidFill>
+              <a:latin typeface="MS Gothic"/>
+              <a:cs typeface="MS Gothic"/>
+            </a:endParaRPr>
+          </a:p>
+          <a:p>
+            <a:pPr marL="12700">
+              <a:lnSpc>
+                <a:spcPct val="100000"/>
+              </a:lnSpc>
+              <a:spcBef>
+                <a:spcPts val="95"/>
+              </a:spcBef>
+            </a:pPr>
+            <a:r>
+              <a:rPr lang="ja-JP" altLang="en-US" sz="2800" dirty="0">
+                <a:solidFill>
+                  <a:schemeClr val="bg1"/>
+                </a:solidFill>
+                <a:latin typeface="MS Gothic"/>
+                <a:cs typeface="MS Gothic"/>
+              </a:rPr>
+              <a:t>１つ目は、特定のセルの判定数が増えてしまう点</a:t>
+            </a:r>
+            <a:endParaRPr lang="en-US" altLang="ja-JP" sz="2800" dirty="0">
+              <a:solidFill>
+                <a:schemeClr val="bg1"/>
+              </a:solidFill>
+              <a:latin typeface="MS Gothic"/>
+              <a:cs typeface="MS Gothic"/>
+            </a:endParaRPr>
+          </a:p>
+          <a:p>
+            <a:pPr marL="12700">
+              <a:lnSpc>
+                <a:spcPct val="100000"/>
+              </a:lnSpc>
+              <a:spcBef>
+                <a:spcPts val="95"/>
+              </a:spcBef>
+            </a:pPr>
+            <a:r>
+              <a:rPr lang="ja-JP" altLang="en-US" sz="2800" dirty="0">
+                <a:solidFill>
+                  <a:schemeClr val="bg1"/>
+                </a:solidFill>
+                <a:latin typeface="MS Gothic"/>
+                <a:cs typeface="MS Gothic"/>
+              </a:rPr>
+              <a:t>２つ目は、当たり判定の回数などが開発者が想定しにくい点</a:t>
+            </a:r>
+            <a:endParaRPr lang="en-US" altLang="ja-JP" sz="2800" dirty="0">
+              <a:solidFill>
+                <a:schemeClr val="bg1"/>
+              </a:solidFill>
+              <a:latin typeface="MS Gothic"/>
+              <a:cs typeface="MS Gothic"/>
+            </a:endParaRPr>
+          </a:p>
+          <a:p>
+            <a:pPr marL="12700">
+              <a:lnSpc>
+                <a:spcPct val="100000"/>
+              </a:lnSpc>
+              <a:spcBef>
+                <a:spcPts val="95"/>
+              </a:spcBef>
+            </a:pPr>
+            <a:r>
+              <a:rPr lang="ja-JP" altLang="en-US" sz="2800" dirty="0">
+                <a:solidFill>
+                  <a:schemeClr val="bg1"/>
+                </a:solidFill>
+                <a:latin typeface="MS Gothic"/>
+                <a:cs typeface="MS Gothic"/>
+              </a:rPr>
+              <a:t>３つ目は、マルチスレッドに対応したときに</a:t>
+            </a:r>
+            <a:br>
+              <a:rPr lang="en-US" altLang="ja-JP" sz="2800" dirty="0">
+                <a:solidFill>
+                  <a:schemeClr val="bg1"/>
+                </a:solidFill>
+                <a:latin typeface="MS Gothic"/>
+                <a:cs typeface="MS Gothic"/>
+              </a:rPr>
+            </a:br>
+            <a:r>
+              <a:rPr lang="ja-JP" altLang="en-US" sz="2800" dirty="0">
+                <a:solidFill>
+                  <a:schemeClr val="bg1"/>
+                </a:solidFill>
+                <a:latin typeface="MS Gothic"/>
+                <a:cs typeface="MS Gothic"/>
+              </a:rPr>
+              <a:t>　　　　　　　　　　特定のセルに偏りが出て遅くなってしまう点。</a:t>
+            </a:r>
+            <a:endParaRPr lang="en-US" altLang="ja-JP" sz="2800" dirty="0">
+              <a:solidFill>
+                <a:schemeClr val="bg1"/>
+              </a:solidFill>
+              <a:latin typeface="MS Gothic"/>
+              <a:cs typeface="MS Gothic"/>
+            </a:endParaRPr>
+          </a:p>
+          <a:p>
+            <a:pPr marL="12700">
+              <a:lnSpc>
+                <a:spcPct val="100000"/>
+              </a:lnSpc>
+              <a:spcBef>
+                <a:spcPts val="95"/>
+              </a:spcBef>
+            </a:pPr>
+            <a:endParaRPr lang="en-US" altLang="ja-JP" sz="2800" dirty="0">
+              <a:solidFill>
+                <a:schemeClr val="bg1"/>
+              </a:solidFill>
+              <a:latin typeface="MS Gothic"/>
+              <a:cs typeface="MS Gothic"/>
+            </a:endParaRPr>
+          </a:p>
+          <a:p>
+            <a:pPr marL="12700">
+              <a:lnSpc>
+                <a:spcPct val="100000"/>
+              </a:lnSpc>
+              <a:spcBef>
+                <a:spcPts val="95"/>
+              </a:spcBef>
+            </a:pPr>
+            <a:r>
+              <a:rPr lang="ja-JP" altLang="en-US" sz="2800" dirty="0">
+                <a:solidFill>
+                  <a:schemeClr val="bg1"/>
+                </a:solidFill>
+                <a:latin typeface="MS Gothic"/>
+                <a:cs typeface="MS Gothic"/>
+              </a:rPr>
+              <a:t>が</a:t>
+            </a:r>
+            <a:r>
+              <a:rPr lang="en-US" altLang="ja-JP" sz="2800" dirty="0" err="1">
+                <a:solidFill>
+                  <a:schemeClr val="bg1"/>
+                </a:solidFill>
+                <a:latin typeface="MS Gothic"/>
+                <a:cs typeface="MS Gothic"/>
+              </a:rPr>
+              <a:t>AABBTree</a:t>
+            </a:r>
+            <a:r>
+              <a:rPr lang="ja-JP" altLang="en-US" sz="2800" dirty="0">
+                <a:solidFill>
+                  <a:schemeClr val="bg1"/>
+                </a:solidFill>
+                <a:latin typeface="MS Gothic"/>
+                <a:cs typeface="MS Gothic"/>
+              </a:rPr>
+              <a:t>を使用することにした理由です。</a:t>
+            </a:r>
+            <a:endParaRPr lang="en-US" altLang="ja-JP" sz="2800" dirty="0">
+              <a:solidFill>
+                <a:schemeClr val="bg1"/>
+              </a:solidFill>
+              <a:latin typeface="MS Gothic"/>
+              <a:cs typeface="MS Gothic"/>
+            </a:endParaRPr>
+          </a:p>
+        </p:txBody>
+      </p:sp>
+    </p:spTree>
+    <p:extLst>
+      <p:ext uri="{BB962C8B-B14F-4D97-AF65-F5344CB8AC3E}">
+        <p14:creationId xmlns:p14="http://schemas.microsoft.com/office/powerpoint/2010/main" val="3487275278"/>
+      </p:ext>
+    </p:extLst>
   </p:cSld>
   <p:clrMapOvr>
     <a:masterClrMapping/>

--- a/作品詳細アピール.pptx
+++ b/作品詳細アピール.pptx
@@ -14,8 +14,7 @@
     <p:sldId id="267" r:id="rId8"/>
     <p:sldId id="268" r:id="rId9"/>
     <p:sldId id="271" r:id="rId10"/>
-    <p:sldId id="272" r:id="rId11"/>
-    <p:sldId id="270" r:id="rId12"/>
+    <p:sldId id="270" r:id="rId11"/>
   </p:sldIdLst>
   <p:sldSz cx="12192000" cy="6858000"/>
   <p:notesSz cx="12192000" cy="6858000"/>
@@ -1528,307 +1527,6 @@
 </file>
 
 <file path=ppt/slides/slide10.xml><?xml version="1.0" encoding="utf-8"?>
-<p:sld xmlns:a="http://schemas.openxmlformats.org/drawingml/2006/main" xmlns:r="http://schemas.openxmlformats.org/officeDocument/2006/relationships" xmlns:p="http://schemas.openxmlformats.org/presentationml/2006/main">
-  <p:cSld>
-    <p:spTree>
-      <p:nvGrpSpPr>
-        <p:cNvPr id="1" name="">
-          <a:extLst>
-            <a:ext uri="{FF2B5EF4-FFF2-40B4-BE49-F238E27FC236}">
-              <a16:creationId xmlns:a16="http://schemas.microsoft.com/office/drawing/2014/main" id="{E8F20201-F212-8E15-5BAA-85DE9FAD732B}"/>
-            </a:ext>
-          </a:extLst>
-        </p:cNvPr>
-        <p:cNvGrpSpPr/>
-        <p:nvPr/>
-      </p:nvGrpSpPr>
-      <p:grpSpPr>
-        <a:xfrm>
-          <a:off x="0" y="0"/>
-          <a:ext cx="0" cy="0"/>
-          <a:chOff x="0" y="0"/>
-          <a:chExt cx="0" cy="0"/>
-        </a:xfrm>
-      </p:grpSpPr>
-      <p:sp>
-        <p:nvSpPr>
-          <p:cNvPr id="2" name="object 2">
-            <a:extLst>
-              <a:ext uri="{FF2B5EF4-FFF2-40B4-BE49-F238E27FC236}">
-                <a16:creationId xmlns:a16="http://schemas.microsoft.com/office/drawing/2014/main" id="{5D34781A-E9FB-0FC3-3B12-32B525CFF24A}"/>
-              </a:ext>
-            </a:extLst>
-          </p:cNvPr>
-          <p:cNvSpPr txBox="1">
-            <a:spLocks noGrp="1"/>
-          </p:cNvSpPr>
-          <p:nvPr>
-            <p:ph type="title"/>
-          </p:nvPr>
-        </p:nvSpPr>
-        <p:spPr>
-          <a:xfrm>
-            <a:off x="457200" y="381000"/>
-            <a:ext cx="7287259" cy="697230"/>
-          </a:xfrm>
-          <a:prstGeom prst="rect">
-            <a:avLst/>
-          </a:prstGeom>
-        </p:spPr>
-        <p:txBody>
-          <a:bodyPr vert="horz" wrap="square" lIns="0" tIns="13335" rIns="0" bIns="0" rtlCol="0">
-            <a:spAutoFit/>
-          </a:bodyPr>
-          <a:lstStyle/>
-          <a:p>
-            <a:pPr marL="12700">
-              <a:lnSpc>
-                <a:spcPct val="100000"/>
-              </a:lnSpc>
-              <a:spcBef>
-                <a:spcPts val="105"/>
-              </a:spcBef>
-            </a:pPr>
-            <a:r>
-              <a:rPr lang="ja-JP" altLang="en-US" spc="-25" dirty="0"/>
-              <a:t>当たり判定 </a:t>
-            </a:r>
-            <a:r>
-              <a:rPr lang="en-US" altLang="ja-JP" spc="-25" dirty="0" err="1"/>
-              <a:t>AABBTree</a:t>
-            </a:r>
-            <a:endParaRPr spc="-25" dirty="0"/>
-          </a:p>
-        </p:txBody>
-      </p:sp>
-      <p:sp>
-        <p:nvSpPr>
-          <p:cNvPr id="3" name="object 3">
-            <a:extLst>
-              <a:ext uri="{FF2B5EF4-FFF2-40B4-BE49-F238E27FC236}">
-                <a16:creationId xmlns:a16="http://schemas.microsoft.com/office/drawing/2014/main" id="{091F54AC-0E1D-829F-9292-E5B3131B496A}"/>
-              </a:ext>
-            </a:extLst>
-          </p:cNvPr>
-          <p:cNvSpPr txBox="1"/>
-          <p:nvPr/>
-        </p:nvSpPr>
-        <p:spPr>
-          <a:xfrm>
-            <a:off x="609600" y="1524000"/>
-            <a:ext cx="11420475" cy="2217915"/>
-          </a:xfrm>
-          <a:prstGeom prst="rect">
-            <a:avLst/>
-          </a:prstGeom>
-        </p:spPr>
-        <p:txBody>
-          <a:bodyPr vert="horz" wrap="square" lIns="0" tIns="12065" rIns="0" bIns="0" rtlCol="0">
-            <a:spAutoFit/>
-          </a:bodyPr>
-          <a:lstStyle/>
-          <a:p>
-            <a:pPr marL="12700">
-              <a:lnSpc>
-                <a:spcPct val="100000"/>
-              </a:lnSpc>
-              <a:spcBef>
-                <a:spcPts val="95"/>
-              </a:spcBef>
-            </a:pPr>
-            <a:r>
-              <a:rPr lang="ja-JP" altLang="en-US" sz="2800" dirty="0">
-                <a:solidFill>
-                  <a:schemeClr val="bg1"/>
-                </a:solidFill>
-                <a:latin typeface="MS Gothic"/>
-                <a:cs typeface="MS Gothic"/>
-              </a:rPr>
-              <a:t>どれくらい早くなったのか</a:t>
-            </a:r>
-            <a:endParaRPr lang="en-US" altLang="ja-JP" sz="2800" dirty="0">
-              <a:solidFill>
-                <a:schemeClr val="bg1"/>
-              </a:solidFill>
-              <a:latin typeface="MS Gothic"/>
-              <a:cs typeface="MS Gothic"/>
-            </a:endParaRPr>
-          </a:p>
-          <a:p>
-            <a:pPr marL="12700">
-              <a:lnSpc>
-                <a:spcPct val="100000"/>
-              </a:lnSpc>
-              <a:spcBef>
-                <a:spcPts val="95"/>
-              </a:spcBef>
-            </a:pPr>
-            <a:r>
-              <a:rPr lang="en-US" altLang="ja-JP" sz="2800" dirty="0" err="1">
-                <a:solidFill>
-                  <a:schemeClr val="bg1"/>
-                </a:solidFill>
-                <a:latin typeface="MS Gothic"/>
-                <a:cs typeface="MS Gothic"/>
-              </a:rPr>
-              <a:t>AABBTree</a:t>
-            </a:r>
-            <a:r>
-              <a:rPr lang="ja-JP" altLang="en-US" sz="2800" dirty="0">
-                <a:solidFill>
-                  <a:schemeClr val="bg1"/>
-                </a:solidFill>
-                <a:latin typeface="MS Gothic"/>
-                <a:cs typeface="MS Gothic"/>
-              </a:rPr>
-              <a:t>を使用すると</a:t>
-            </a:r>
-            <a:endParaRPr lang="en-US" altLang="ja-JP" sz="2800" dirty="0">
-              <a:solidFill>
-                <a:schemeClr val="bg1"/>
-              </a:solidFill>
-              <a:latin typeface="MS Gothic"/>
-              <a:cs typeface="MS Gothic"/>
-            </a:endParaRPr>
-          </a:p>
-          <a:p>
-            <a:pPr marL="12700">
-              <a:lnSpc>
-                <a:spcPct val="100000"/>
-              </a:lnSpc>
-              <a:spcBef>
-                <a:spcPts val="95"/>
-              </a:spcBef>
-            </a:pPr>
-            <a:r>
-              <a:rPr lang="ja-JP" altLang="en-US" sz="2800" dirty="0">
-                <a:solidFill>
-                  <a:schemeClr val="bg1"/>
-                </a:solidFill>
-                <a:latin typeface="MS Gothic"/>
-                <a:cs typeface="MS Gothic"/>
-              </a:rPr>
-              <a:t>押し戻し処理などを入れて</a:t>
-            </a:r>
-            <a:endParaRPr lang="en-US" altLang="ja-JP" sz="2800" dirty="0">
-              <a:solidFill>
-                <a:schemeClr val="bg1"/>
-              </a:solidFill>
-              <a:latin typeface="MS Gothic"/>
-              <a:cs typeface="MS Gothic"/>
-            </a:endParaRPr>
-          </a:p>
-          <a:p>
-            <a:pPr marL="12700">
-              <a:lnSpc>
-                <a:spcPct val="100000"/>
-              </a:lnSpc>
-              <a:spcBef>
-                <a:spcPts val="95"/>
-              </a:spcBef>
-            </a:pPr>
-            <a:r>
-              <a:rPr lang="ja-JP" altLang="en-US" sz="2800" dirty="0">
-                <a:solidFill>
-                  <a:schemeClr val="bg1"/>
-                </a:solidFill>
-                <a:latin typeface="MS Gothic"/>
-                <a:cs typeface="MS Gothic"/>
-              </a:rPr>
-              <a:t> </a:t>
-            </a:r>
-            <a:r>
-              <a:rPr lang="en-US" altLang="ja-JP" sz="2800" dirty="0">
-                <a:solidFill>
-                  <a:schemeClr val="bg1"/>
-                </a:solidFill>
-                <a:latin typeface="MS Gothic"/>
-                <a:cs typeface="MS Gothic"/>
-              </a:rPr>
-              <a:t>0.006</a:t>
-            </a:r>
-            <a:r>
-              <a:rPr lang="ja-JP" altLang="en-US" sz="2800" dirty="0">
-                <a:solidFill>
-                  <a:schemeClr val="bg1"/>
-                </a:solidFill>
-                <a:latin typeface="MS Gothic"/>
-                <a:cs typeface="MS Gothic"/>
-              </a:rPr>
-              <a:t> 秒くらい</a:t>
-            </a:r>
-            <a:endParaRPr lang="en-US" altLang="ja-JP" sz="2800" dirty="0">
-              <a:solidFill>
-                <a:schemeClr val="bg1"/>
-              </a:solidFill>
-              <a:latin typeface="MS Gothic"/>
-              <a:cs typeface="MS Gothic"/>
-            </a:endParaRPr>
-          </a:p>
-          <a:p>
-            <a:pPr marL="12700">
-              <a:lnSpc>
-                <a:spcPct val="100000"/>
-              </a:lnSpc>
-              <a:spcBef>
-                <a:spcPts val="95"/>
-              </a:spcBef>
-            </a:pPr>
-            <a:endParaRPr lang="en-US" altLang="ja-JP" sz="2800" dirty="0">
-              <a:solidFill>
-                <a:schemeClr val="bg1"/>
-              </a:solidFill>
-              <a:latin typeface="MS Gothic"/>
-              <a:cs typeface="MS Gothic"/>
-            </a:endParaRPr>
-          </a:p>
-        </p:txBody>
-      </p:sp>
-      <p:pic>
-        <p:nvPicPr>
-          <p:cNvPr id="7" name="図 6" descr="グラフィカル ユーザー インターフェイス&#10;&#10;AI 生成コンテンツは誤りを含む可能性があります。">
-            <a:extLst>
-              <a:ext uri="{FF2B5EF4-FFF2-40B4-BE49-F238E27FC236}">
-                <a16:creationId xmlns:a16="http://schemas.microsoft.com/office/drawing/2014/main" id="{78DA35B5-0016-0478-FB9B-80688324A03C}"/>
-              </a:ext>
-            </a:extLst>
-          </p:cNvPr>
-          <p:cNvPicPr>
-            <a:picLocks noChangeAspect="1"/>
-          </p:cNvPicPr>
-          <p:nvPr/>
-        </p:nvPicPr>
-        <p:blipFill>
-          <a:blip r:embed="rId2"/>
-          <a:srcRect t="51672" b="27979"/>
-          <a:stretch>
-            <a:fillRect/>
-          </a:stretch>
-        </p:blipFill>
-        <p:spPr>
-          <a:xfrm>
-            <a:off x="7744459" y="1295400"/>
-            <a:ext cx="2908031" cy="697230"/>
-          </a:xfrm>
-          <a:prstGeom prst="rect">
-            <a:avLst/>
-          </a:prstGeom>
-        </p:spPr>
-      </p:pic>
-    </p:spTree>
-    <p:extLst>
-      <p:ext uri="{BB962C8B-B14F-4D97-AF65-F5344CB8AC3E}">
-        <p14:creationId xmlns:p14="http://schemas.microsoft.com/office/powerpoint/2010/main" val="1173453723"/>
-      </p:ext>
-    </p:extLst>
-  </p:cSld>
-  <p:clrMapOvr>
-    <a:masterClrMapping/>
-  </p:clrMapOvr>
-</p:sld>
-</file>
-
-<file path=ppt/slides/slide11.xml><?xml version="1.0" encoding="utf-8"?>
 <p:sld xmlns:a="http://schemas.openxmlformats.org/drawingml/2006/main" xmlns:r="http://schemas.openxmlformats.org/officeDocument/2006/relationships" xmlns:p="http://schemas.openxmlformats.org/presentationml/2006/main">
   <p:cSld>
     <p:spTree>
